--- a/presentation/hito1-vrcar.pptx
+++ b/presentation/hito1-vrcar.pptx
@@ -3114,7 +3114,7 @@
         <p:spPr>
           <a:xfrm>
             <a:off x="0" y="0"/>
-            <a:ext cx="12191695" cy="128016"/>
+            <a:ext cx="63500" cy="6858000"/>
           </a:xfrm>
           <a:prstGeom prst="rect">
             <a:avLst/>
@@ -3151,20 +3151,20 @@
       </p:sp>
       <p:sp>
         <p:nvSpPr>
-          <p:cNvPr id="3" name="Oval 2"/>
+          <p:cNvPr id="3" name="Rectangle 2"/>
           <p:cNvSpPr/>
           <p:nvPr/>
         </p:nvSpPr>
         <p:spPr>
           <a:xfrm>
-            <a:off x="7985455" y="2651760"/>
-            <a:ext cx="5669280" cy="5669280"/>
-          </a:xfrm>
-          <a:prstGeom prst="ellipse">
+            <a:off x="8366760" y="822960"/>
+            <a:ext cx="12700" cy="5212080"/>
+          </a:xfrm>
+          <a:prstGeom prst="rect">
             <a:avLst/>
           </a:prstGeom>
           <a:solidFill>
-            <a:srgbClr val="111B2E"/>
+            <a:srgbClr val="27334A"/>
           </a:solidFill>
           <a:ln>
             <a:noFill/>
@@ -3195,109 +3195,101 @@
       </p:sp>
       <p:sp>
         <p:nvSpPr>
-          <p:cNvPr id="4" name="Oval 3"/>
+          <p:cNvPr id="4" name="TextBox 3"/>
+          <p:cNvSpPr txBox="1"/>
+          <p:nvPr/>
+        </p:nvSpPr>
+        <p:spPr>
+          <a:xfrm>
+            <a:off x="868680" y="822960"/>
+            <a:ext cx="6995160" cy="365760"/>
+          </a:xfrm>
+          <a:prstGeom prst="rect">
+            <a:avLst/>
+          </a:prstGeom>
+          <a:noFill/>
+        </p:spPr>
+        <p:txBody>
+          <a:bodyPr wrap="square" anchor="t" lIns="0" rIns="0" tIns="0" bIns="0">
+            <a:spAutoFit/>
+          </a:bodyPr>
+          <a:lstStyle/>
+          <a:p>
+            <a:pPr algn="l">
+              <a:spcBef>
+                <a:spcPts val="0"/>
+              </a:spcBef>
+              <a:spcAft>
+                <a:spcPts val="0"/>
+              </a:spcAft>
+            </a:pPr>
+            <a:r>
+              <a:rPr sz="1250" b="1" i="0" spc="260">
+                <a:solidFill>
+                  <a:srgbClr val="A9B4C9"/>
+                </a:solidFill>
+                <a:latin typeface="Calibri"/>
+              </a:rPr>
+              <a:t>IDI 3185 · REALIDAD EXTENDIDA</a:t>
+            </a:r>
+          </a:p>
+        </p:txBody>
+      </p:sp>
+      <p:sp>
+        <p:nvSpPr>
+          <p:cNvPr id="5" name="TextBox 4"/>
+          <p:cNvSpPr txBox="1"/>
+          <p:nvPr/>
+        </p:nvSpPr>
+        <p:spPr>
+          <a:xfrm>
+            <a:off x="868680" y="1170432"/>
+            <a:ext cx="6995160" cy="365760"/>
+          </a:xfrm>
+          <a:prstGeom prst="rect">
+            <a:avLst/>
+          </a:prstGeom>
+          <a:noFill/>
+        </p:spPr>
+        <p:txBody>
+          <a:bodyPr wrap="square" anchor="t" lIns="0" rIns="0" tIns="0" bIns="0">
+            <a:spAutoFit/>
+          </a:bodyPr>
+          <a:lstStyle/>
+          <a:p>
+            <a:pPr algn="l">
+              <a:spcBef>
+                <a:spcPts val="0"/>
+              </a:spcBef>
+              <a:spcAft>
+                <a:spcPts val="0"/>
+              </a:spcAft>
+            </a:pPr>
+            <a:r>
+              <a:rPr sz="1250" b="1" i="0" spc="260">
+                <a:solidFill>
+                  <a:srgbClr val="35D0C7"/>
+                </a:solidFill>
+                <a:latin typeface="Calibri"/>
+              </a:rPr>
+              <a:t>HITO 1 — FORMULACIÓN DEL PROYECTO</a:t>
+            </a:r>
+          </a:p>
+        </p:txBody>
+      </p:sp>
+      <p:sp>
+        <p:nvSpPr>
+          <p:cNvPr id="6" name="Rectangle 5"/>
           <p:cNvSpPr/>
           <p:nvPr/>
         </p:nvSpPr>
         <p:spPr>
           <a:xfrm>
-            <a:off x="8899855" y="3566160"/>
-            <a:ext cx="3840480" cy="3840480"/>
-          </a:xfrm>
-          <a:prstGeom prst="ellipse">
-            <a:avLst/>
-          </a:prstGeom>
-          <a:solidFill>
-            <a:srgbClr val="0B1220"/>
-          </a:solidFill>
-          <a:ln>
-            <a:noFill/>
-          </a:ln>
-          <a:effectLst/>
-        </p:spPr>
-        <p:style>
-          <a:lnRef idx="1">
-            <a:schemeClr val="accent1"/>
-          </a:lnRef>
-          <a:fillRef idx="3">
-            <a:schemeClr val="accent1"/>
-          </a:fillRef>
-          <a:effectRef idx="2">
-            <a:schemeClr val="accent1"/>
-          </a:effectRef>
-          <a:fontRef idx="minor">
-            <a:schemeClr val="lt1"/>
-          </a:fontRef>
-        </p:style>
-        <p:txBody>
-          <a:bodyPr rtlCol="0" anchor="ctr"/>
-          <a:lstStyle/>
-          <a:p>
-            <a:pPr algn="ctr"/>
-          </a:p>
-        </p:txBody>
-      </p:sp>
-      <p:sp>
-        <p:nvSpPr>
-          <p:cNvPr id="5" name="Oval 4"/>
-          <p:cNvSpPr/>
-          <p:nvPr/>
-        </p:nvSpPr>
-        <p:spPr>
-          <a:xfrm>
-            <a:off x="9357055" y="3977640"/>
-            <a:ext cx="1828800" cy="1828800"/>
-          </a:xfrm>
-          <a:prstGeom prst="ellipse">
-            <a:avLst/>
-          </a:prstGeom>
-          <a:solidFill>
-            <a:srgbClr val="111B2E"/>
-          </a:solidFill>
-          <a:ln w="19050">
-            <a:solidFill>
-              <a:srgbClr val="35D0C7"/>
-            </a:solidFill>
-          </a:ln>
-          <a:effectLst/>
-        </p:spPr>
-        <p:style>
-          <a:lnRef idx="1">
-            <a:schemeClr val="accent1"/>
-          </a:lnRef>
-          <a:fillRef idx="3">
-            <a:schemeClr val="accent1"/>
-          </a:fillRef>
-          <a:effectRef idx="2">
-            <a:schemeClr val="accent1"/>
-          </a:effectRef>
-          <a:fontRef idx="minor">
-            <a:schemeClr val="lt1"/>
-          </a:fontRef>
-        </p:style>
-        <p:txBody>
-          <a:bodyPr rtlCol="0" anchor="ctr"/>
-          <a:lstStyle/>
-          <a:p>
-            <a:pPr algn="ctr"/>
-          </a:p>
-        </p:txBody>
-      </p:sp>
-      <p:sp>
-        <p:nvSpPr>
-          <p:cNvPr id="6" name="Rounded Rectangle 5"/>
-          <p:cNvSpPr/>
-          <p:nvPr/>
-        </p:nvSpPr>
-        <p:spPr>
-          <a:xfrm>
-            <a:off x="9704527" y="4782312"/>
-            <a:ext cx="1133856" cy="384048"/>
-          </a:xfrm>
-          <a:prstGeom prst="roundRect">
-            <a:avLst>
-              <a:gd name="adj" fmla="val 50000"/>
-            </a:avLst>
+            <a:off x="868680" y="1874519"/>
+            <a:ext cx="594360" cy="38100"/>
+          </a:xfrm>
+          <a:prstGeom prst="rect">
+            <a:avLst/>
           </a:prstGeom>
           <a:solidFill>
             <a:srgbClr val="FF7A33"/>
@@ -3331,22 +3323,153 @@
       </p:sp>
       <p:sp>
         <p:nvSpPr>
-          <p:cNvPr id="7" name="Rounded Rectangle 6"/>
+          <p:cNvPr id="7" name="TextBox 6"/>
+          <p:cNvSpPr txBox="1"/>
+          <p:nvPr/>
+        </p:nvSpPr>
+        <p:spPr>
+          <a:xfrm>
+            <a:off x="868680" y="2148840"/>
+            <a:ext cx="6995160" cy="1051560"/>
+          </a:xfrm>
+          <a:prstGeom prst="rect">
+            <a:avLst/>
+          </a:prstGeom>
+          <a:noFill/>
+        </p:spPr>
+        <p:txBody>
+          <a:bodyPr wrap="square" anchor="t" lIns="0" rIns="0" tIns="0" bIns="0">
+            <a:spAutoFit/>
+          </a:bodyPr>
+          <a:lstStyle/>
+          <a:p>
+            <a:pPr algn="l">
+              <a:spcBef>
+                <a:spcPts val="0"/>
+              </a:spcBef>
+              <a:spcAft>
+                <a:spcPts val="0"/>
+              </a:spcAft>
+            </a:pPr>
+            <a:r>
+              <a:rPr sz="5800" b="1" i="0">
+                <a:solidFill>
+                  <a:srgbClr val="F4F6FB"/>
+                </a:solidFill>
+                <a:latin typeface="Calibri"/>
+              </a:rPr>
+              <a:t>VR Car</a:t>
+            </a:r>
+          </a:p>
+        </p:txBody>
+      </p:sp>
+      <p:sp>
+        <p:nvSpPr>
+          <p:cNvPr id="8" name="TextBox 7"/>
+          <p:cNvSpPr txBox="1"/>
+          <p:nvPr/>
+        </p:nvSpPr>
+        <p:spPr>
+          <a:xfrm>
+            <a:off x="868680" y="3063240"/>
+            <a:ext cx="6995160" cy="777240"/>
+          </a:xfrm>
+          <a:prstGeom prst="rect">
+            <a:avLst/>
+          </a:prstGeom>
+          <a:noFill/>
+        </p:spPr>
+        <p:txBody>
+          <a:bodyPr wrap="square" anchor="t" lIns="0" rIns="0" tIns="0" bIns="0">
+            <a:spAutoFit/>
+          </a:bodyPr>
+          <a:lstStyle/>
+          <a:p>
+            <a:pPr algn="l">
+              <a:lnSpc>
+                <a:spcPct val="125000"/>
+              </a:lnSpc>
+              <a:spcBef>
+                <a:spcPts val="0"/>
+              </a:spcBef>
+              <a:spcAft>
+                <a:spcPts val="0"/>
+              </a:spcAft>
+            </a:pPr>
+            <a:r>
+              <a:rPr sz="1750" b="0" i="1">
+                <a:solidFill>
+                  <a:srgbClr val="A9B4C9"/>
+                </a:solidFill>
+                <a:latin typeface="Calibri"/>
+              </a:rPr>
+              <a:t>Percepción a Escala Real: un simulador de conducción en
+realidad virtual</a:t>
+            </a:r>
+          </a:p>
+        </p:txBody>
+      </p:sp>
+      <p:sp>
+        <p:nvSpPr>
+          <p:cNvPr id="9" name="TextBox 8"/>
+          <p:cNvSpPr txBox="1"/>
+          <p:nvPr/>
+        </p:nvSpPr>
+        <p:spPr>
+          <a:xfrm>
+            <a:off x="868680" y="3977639"/>
+            <a:ext cx="6995160" cy="1051560"/>
+          </a:xfrm>
+          <a:prstGeom prst="rect">
+            <a:avLst/>
+          </a:prstGeom>
+          <a:noFill/>
+        </p:spPr>
+        <p:txBody>
+          <a:bodyPr wrap="square" anchor="t" lIns="0" rIns="0" tIns="0" bIns="0">
+            <a:spAutoFit/>
+          </a:bodyPr>
+          <a:lstStyle/>
+          <a:p>
+            <a:pPr algn="l">
+              <a:lnSpc>
+                <a:spcPct val="135000"/>
+              </a:lnSpc>
+              <a:spcBef>
+                <a:spcPts val="0"/>
+              </a:spcBef>
+              <a:spcAft>
+                <a:spcPts val="0"/>
+              </a:spcAft>
+            </a:pPr>
+            <a:r>
+              <a:rPr sz="1550" b="0" i="0">
+                <a:solidFill>
+                  <a:srgbClr val="A9B4C9"/>
+                </a:solidFill>
+                <a:latin typeface="Calibri"/>
+              </a:rPr>
+              <a:t>Aprender, con el propio cuerpo, el tamaño real del auto y el juicio de distancias — antes de la primera clase práctica.</a:t>
+            </a:r>
+          </a:p>
+        </p:txBody>
+      </p:sp>
+      <p:sp>
+        <p:nvSpPr>
+          <p:cNvPr id="10" name="Rectangle 9"/>
           <p:cNvSpPr/>
           <p:nvPr/>
         </p:nvSpPr>
         <p:spPr>
           <a:xfrm>
-            <a:off x="9978847" y="4581144"/>
-            <a:ext cx="585216" cy="256032"/>
-          </a:xfrm>
-          <a:prstGeom prst="roundRect">
-            <a:avLst>
-              <a:gd name="adj" fmla="val 50000"/>
-            </a:avLst>
+            <a:off x="868680" y="5257800"/>
+            <a:ext cx="6995160" cy="12700"/>
+          </a:xfrm>
+          <a:prstGeom prst="rect">
+            <a:avLst/>
           </a:prstGeom>
           <a:solidFill>
-            <a:srgbClr val="FF7A33"/>
+            <a:srgbClr val="27334A"/>
           </a:solidFill>
           <a:ln>
             <a:noFill/>
@@ -3377,102 +3500,14 @@
       </p:sp>
       <p:sp>
         <p:nvSpPr>
-          <p:cNvPr id="8" name="Oval 7"/>
-          <p:cNvSpPr/>
-          <p:nvPr/>
-        </p:nvSpPr>
-        <p:spPr>
-          <a:xfrm>
-            <a:off x="9850831" y="5056632"/>
-            <a:ext cx="219456" cy="219456"/>
-          </a:xfrm>
-          <a:prstGeom prst="ellipse">
-            <a:avLst/>
-          </a:prstGeom>
-          <a:solidFill>
-            <a:srgbClr val="0B1220"/>
-          </a:solidFill>
-          <a:ln>
-            <a:noFill/>
-          </a:ln>
-          <a:effectLst/>
-        </p:spPr>
-        <p:style>
-          <a:lnRef idx="1">
-            <a:schemeClr val="accent1"/>
-          </a:lnRef>
-          <a:fillRef idx="3">
-            <a:schemeClr val="accent1"/>
-          </a:fillRef>
-          <a:effectRef idx="2">
-            <a:schemeClr val="accent1"/>
-          </a:effectRef>
-          <a:fontRef idx="minor">
-            <a:schemeClr val="lt1"/>
-          </a:fontRef>
-        </p:style>
-        <p:txBody>
-          <a:bodyPr rtlCol="0" anchor="ctr"/>
-          <a:lstStyle/>
-          <a:p>
-            <a:pPr algn="ctr"/>
-          </a:p>
-        </p:txBody>
-      </p:sp>
-      <p:sp>
-        <p:nvSpPr>
-          <p:cNvPr id="9" name="Oval 8"/>
-          <p:cNvSpPr/>
-          <p:nvPr/>
-        </p:nvSpPr>
-        <p:spPr>
-          <a:xfrm>
-            <a:off x="10472623" y="5056632"/>
-            <a:ext cx="219456" cy="219456"/>
-          </a:xfrm>
-          <a:prstGeom prst="ellipse">
-            <a:avLst/>
-          </a:prstGeom>
-          <a:solidFill>
-            <a:srgbClr val="0B1220"/>
-          </a:solidFill>
-          <a:ln>
-            <a:noFill/>
-          </a:ln>
-          <a:effectLst/>
-        </p:spPr>
-        <p:style>
-          <a:lnRef idx="1">
-            <a:schemeClr val="accent1"/>
-          </a:lnRef>
-          <a:fillRef idx="3">
-            <a:schemeClr val="accent1"/>
-          </a:fillRef>
-          <a:effectRef idx="2">
-            <a:schemeClr val="accent1"/>
-          </a:effectRef>
-          <a:fontRef idx="minor">
-            <a:schemeClr val="lt1"/>
-          </a:fontRef>
-        </p:style>
-        <p:txBody>
-          <a:bodyPr rtlCol="0" anchor="ctr"/>
-          <a:lstStyle/>
-          <a:p>
-            <a:pPr algn="ctr"/>
-          </a:p>
-        </p:txBody>
-      </p:sp>
-      <p:sp>
-        <p:nvSpPr>
-          <p:cNvPr id="10" name="TextBox 9"/>
-          <p:cNvSpPr txBox="1"/>
-          <p:nvPr/>
-        </p:nvSpPr>
-        <p:spPr>
-          <a:xfrm>
-            <a:off x="822960" y="1417320"/>
-            <a:ext cx="7315200" cy="457200"/>
+          <p:cNvPr id="11" name="TextBox 10"/>
+          <p:cNvSpPr txBox="1"/>
+          <p:nvPr/>
+        </p:nvSpPr>
+        <p:spPr>
+          <a:xfrm>
+            <a:off x="868680" y="5486400"/>
+            <a:ext cx="6995160" cy="914400"/>
           </a:xfrm>
           <a:prstGeom prst="rect">
             <a:avLst/>
@@ -3494,69 +3529,88 @@
               </a:spcAft>
             </a:pPr>
             <a:r>
-              <a:rPr sz="1400" b="1" i="0" spc="240">
+              <a:rPr sz="1400" b="1" i="0">
+                <a:solidFill>
+                  <a:srgbClr val="F4F6FB"/>
+                </a:solidFill>
+                <a:latin typeface="Calibri"/>
+              </a:rPr>
+              <a:t>Estefanía Pakarati  ·  Emmanuel Norambuena  ·  Matías Harrison</a:t>
+            </a:r>
+          </a:p>
+          <a:p>
+            <a:pPr algn="l">
+              <a:spcBef>
+                <a:spcPts val="400"/>
+              </a:spcBef>
+              <a:spcAft>
+                <a:spcPts val="0"/>
+              </a:spcAft>
+            </a:pPr>
+            <a:r>
+              <a:rPr sz="1250" b="0" i="0">
+                <a:solidFill>
+                  <a:srgbClr val="A9B4C9"/>
+                </a:solidFill>
+                <a:latin typeface="Calibri"/>
+              </a:rPr>
+              <a:t>Pontificia Universidad Católica de Chile</a:t>
+            </a:r>
+          </a:p>
+        </p:txBody>
+      </p:sp>
+      <p:sp>
+        <p:nvSpPr>
+          <p:cNvPr id="12" name="TextBox 11"/>
+          <p:cNvSpPr txBox="1"/>
+          <p:nvPr/>
+        </p:nvSpPr>
+        <p:spPr>
+          <a:xfrm>
+            <a:off x="8869680" y="2148840"/>
+            <a:ext cx="2681935" cy="292608"/>
+          </a:xfrm>
+          <a:prstGeom prst="rect">
+            <a:avLst/>
+          </a:prstGeom>
+          <a:noFill/>
+        </p:spPr>
+        <p:txBody>
+          <a:bodyPr wrap="square" anchor="t" lIns="0" rIns="0" tIns="0" bIns="0">
+            <a:spAutoFit/>
+          </a:bodyPr>
+          <a:lstStyle/>
+          <a:p>
+            <a:pPr algn="l">
+              <a:spcBef>
+                <a:spcPts val="0"/>
+              </a:spcBef>
+              <a:spcAft>
+                <a:spcPts val="0"/>
+              </a:spcAft>
+            </a:pPr>
+            <a:r>
+              <a:rPr sz="1100" b="1" i="0" spc="200">
                 <a:solidFill>
                   <a:srgbClr val="35D0C7"/>
                 </a:solidFill>
                 <a:latin typeface="Calibri"/>
               </a:rPr>
-              <a:t>IDI 3185 · REALIDAD EXTENDIDA — HITO 1</a:t>
-            </a:r>
-          </a:p>
-        </p:txBody>
-      </p:sp>
-      <p:sp>
-        <p:nvSpPr>
-          <p:cNvPr id="11" name="TextBox 10"/>
-          <p:cNvSpPr txBox="1"/>
-          <p:nvPr/>
-        </p:nvSpPr>
-        <p:spPr>
-          <a:xfrm>
-            <a:off x="777240" y="1965960"/>
-            <a:ext cx="8778240" cy="1280160"/>
-          </a:xfrm>
-          <a:prstGeom prst="rect">
-            <a:avLst/>
-          </a:prstGeom>
-          <a:noFill/>
-        </p:spPr>
-        <p:txBody>
-          <a:bodyPr wrap="square" anchor="t" lIns="0" rIns="0" tIns="0" bIns="0">
-            <a:spAutoFit/>
-          </a:bodyPr>
-          <a:lstStyle/>
-          <a:p>
-            <a:pPr algn="l">
-              <a:spcBef>
-                <a:spcPts val="0"/>
-              </a:spcBef>
-              <a:spcAft>
-                <a:spcPts val="0"/>
-              </a:spcAft>
-            </a:pPr>
-            <a:r>
-              <a:rPr sz="6600" b="1" i="0">
-                <a:solidFill>
-                  <a:srgbClr val="F4F6FB"/>
-                </a:solidFill>
-                <a:latin typeface="Calibri"/>
-              </a:rPr>
-              <a:t>VR Car</a:t>
-            </a:r>
-          </a:p>
-        </p:txBody>
-      </p:sp>
-      <p:sp>
-        <p:nvSpPr>
-          <p:cNvPr id="12" name="TextBox 11"/>
-          <p:cNvSpPr txBox="1"/>
-          <p:nvPr/>
-        </p:nvSpPr>
-        <p:spPr>
-          <a:xfrm>
-            <a:off x="822960" y="3108960"/>
-            <a:ext cx="7589520" cy="1234440"/>
+              <a:t>HARDWARE</a:t>
+            </a:r>
+          </a:p>
+        </p:txBody>
+      </p:sp>
+      <p:sp>
+        <p:nvSpPr>
+          <p:cNvPr id="13" name="TextBox 12"/>
+          <p:cNvSpPr txBox="1"/>
+          <p:nvPr/>
+        </p:nvSpPr>
+        <p:spPr>
+          <a:xfrm>
+            <a:off x="8869680" y="2423160"/>
+            <a:ext cx="2681935" cy="457200"/>
           </a:xfrm>
           <a:prstGeom prst="rect">
             <a:avLst/>
@@ -3571,7 +3625,7 @@
           <a:p>
             <a:pPr algn="l">
               <a:lnSpc>
-                <a:spcPct val="130000"/>
+                <a:spcPct val="110000"/>
               </a:lnSpc>
               <a:spcBef>
                 <a:spcPts val="0"/>
@@ -3581,58 +3635,14 @@
               </a:spcAft>
             </a:pPr>
             <a:r>
-              <a:rPr sz="2000" b="0" i="0">
-                <a:solidFill>
-                  <a:srgbClr val="A9B4C9"/>
-                </a:solidFill>
-                <a:latin typeface="Calibri"/>
-              </a:rPr>
-              <a:t>Un simulador de conducción en realidad virtual para aprender, con el propio cuerpo, el tamaño real del auto y el juicio de distancias.</a:t>
-            </a:r>
-          </a:p>
-        </p:txBody>
-      </p:sp>
-      <p:sp>
-        <p:nvSpPr>
-          <p:cNvPr id="13" name="Rectangle 12"/>
-          <p:cNvSpPr/>
-          <p:nvPr/>
-        </p:nvSpPr>
-        <p:spPr>
-          <a:xfrm>
-            <a:off x="822960" y="4617720"/>
-            <a:ext cx="2194560" cy="25400"/>
-          </a:xfrm>
-          <a:prstGeom prst="rect">
-            <a:avLst/>
-          </a:prstGeom>
-          <a:solidFill>
-            <a:srgbClr val="FF7A33"/>
-          </a:solidFill>
-          <a:ln>
-            <a:noFill/>
-          </a:ln>
-          <a:effectLst/>
-        </p:spPr>
-        <p:style>
-          <a:lnRef idx="1">
-            <a:schemeClr val="accent1"/>
-          </a:lnRef>
-          <a:fillRef idx="3">
-            <a:schemeClr val="accent1"/>
-          </a:fillRef>
-          <a:effectRef idx="2">
-            <a:schemeClr val="accent1"/>
-          </a:effectRef>
-          <a:fontRef idx="minor">
-            <a:schemeClr val="lt1"/>
-          </a:fontRef>
-        </p:style>
-        <p:txBody>
-          <a:bodyPr rtlCol="0" anchor="ctr"/>
-          <a:lstStyle/>
-          <a:p>
-            <a:pPr algn="ctr"/>
+              <a:rPr sz="1500" b="0" i="0">
+                <a:solidFill>
+                  <a:srgbClr val="F4F6FB"/>
+                </a:solidFill>
+                <a:latin typeface="Calibri"/>
+              </a:rPr>
+              <a:t>Meta Quest 3</a:t>
+            </a:r>
           </a:p>
         </p:txBody>
       </p:sp>
@@ -3644,8 +3654,8 @@
         </p:nvSpPr>
         <p:spPr>
           <a:xfrm>
-            <a:off x="822960" y="4846320"/>
-            <a:ext cx="7315200" cy="1097280"/>
+            <a:off x="8869680" y="3108960"/>
+            <a:ext cx="2681935" cy="292608"/>
           </a:xfrm>
           <a:prstGeom prst="rect">
             <a:avLst/>
@@ -3667,32 +3677,232 @@
               </a:spcAft>
             </a:pPr>
             <a:r>
-              <a:rPr sz="1500" b="1" i="0">
+              <a:rPr sz="1100" b="1" i="0" spc="200">
+                <a:solidFill>
+                  <a:srgbClr val="35D0C7"/>
+                </a:solidFill>
+                <a:latin typeface="Calibri"/>
+              </a:rPr>
+              <a:t>MOTOR</a:t>
+            </a:r>
+          </a:p>
+        </p:txBody>
+      </p:sp>
+      <p:sp>
+        <p:nvSpPr>
+          <p:cNvPr id="15" name="TextBox 14"/>
+          <p:cNvSpPr txBox="1"/>
+          <p:nvPr/>
+        </p:nvSpPr>
+        <p:spPr>
+          <a:xfrm>
+            <a:off x="8869680" y="3383280"/>
+            <a:ext cx="2681935" cy="457200"/>
+          </a:xfrm>
+          <a:prstGeom prst="rect">
+            <a:avLst/>
+          </a:prstGeom>
+          <a:noFill/>
+        </p:spPr>
+        <p:txBody>
+          <a:bodyPr wrap="square" anchor="t" lIns="0" rIns="0" tIns="0" bIns="0">
+            <a:spAutoFit/>
+          </a:bodyPr>
+          <a:lstStyle/>
+          <a:p>
+            <a:pPr algn="l">
+              <a:lnSpc>
+                <a:spcPct val="110000"/>
+              </a:lnSpc>
+              <a:spcBef>
+                <a:spcPts val="0"/>
+              </a:spcBef>
+              <a:spcAft>
+                <a:spcPts val="0"/>
+              </a:spcAft>
+            </a:pPr>
+            <a:r>
+              <a:rPr sz="1500" b="0" i="0">
                 <a:solidFill>
                   <a:srgbClr val="F4F6FB"/>
                 </a:solidFill>
                 <a:latin typeface="Calibri"/>
               </a:rPr>
-              <a:t>Estefanía Pakarati  ·  Emmanuel Norambuena  ·  Matías Harrison</a:t>
-            </a:r>
-          </a:p>
+              <a:t>Unity · XR Interaction Toolkit</a:t>
+            </a:r>
+          </a:p>
+        </p:txBody>
+      </p:sp>
+      <p:sp>
+        <p:nvSpPr>
+          <p:cNvPr id="16" name="TextBox 15"/>
+          <p:cNvSpPr txBox="1"/>
+          <p:nvPr/>
+        </p:nvSpPr>
+        <p:spPr>
+          <a:xfrm>
+            <a:off x="8869680" y="4069080"/>
+            <a:ext cx="2681935" cy="292608"/>
+          </a:xfrm>
+          <a:prstGeom prst="rect">
+            <a:avLst/>
+          </a:prstGeom>
+          <a:noFill/>
+        </p:spPr>
+        <p:txBody>
+          <a:bodyPr wrap="square" anchor="t" lIns="0" rIns="0" tIns="0" bIns="0">
+            <a:spAutoFit/>
+          </a:bodyPr>
+          <a:lstStyle/>
           <a:p>
             <a:pPr algn="l">
               <a:spcBef>
-                <a:spcPts val="400"/>
-              </a:spcBef>
-              <a:spcAft>
-                <a:spcPts val="0"/>
-              </a:spcAft>
-            </a:pPr>
-            <a:r>
-              <a:rPr sz="1300" b="0" i="0">
-                <a:solidFill>
-                  <a:srgbClr val="A9B4C9"/>
-                </a:solidFill>
-                <a:latin typeface="Calibri"/>
-              </a:rPr>
-              <a:t>Pontificia Universidad Católica de Chile</a:t>
+                <a:spcPts val="0"/>
+              </a:spcBef>
+              <a:spcAft>
+                <a:spcPts val="0"/>
+              </a:spcAft>
+            </a:pPr>
+            <a:r>
+              <a:rPr sz="1100" b="1" i="0" spc="200">
+                <a:solidFill>
+                  <a:srgbClr val="35D0C7"/>
+                </a:solidFill>
+                <a:latin typeface="Calibri"/>
+              </a:rPr>
+              <a:t>ALCANCE</a:t>
+            </a:r>
+          </a:p>
+        </p:txBody>
+      </p:sp>
+      <p:sp>
+        <p:nvSpPr>
+          <p:cNvPr id="17" name="TextBox 16"/>
+          <p:cNvSpPr txBox="1"/>
+          <p:nvPr/>
+        </p:nvSpPr>
+        <p:spPr>
+          <a:xfrm>
+            <a:off x="8869680" y="4343400"/>
+            <a:ext cx="2681935" cy="457200"/>
+          </a:xfrm>
+          <a:prstGeom prst="rect">
+            <a:avLst/>
+          </a:prstGeom>
+          <a:noFill/>
+        </p:spPr>
+        <p:txBody>
+          <a:bodyPr wrap="square" anchor="t" lIns="0" rIns="0" tIns="0" bIns="0">
+            <a:spAutoFit/>
+          </a:bodyPr>
+          <a:lstStyle/>
+          <a:p>
+            <a:pPr algn="l">
+              <a:lnSpc>
+                <a:spcPct val="110000"/>
+              </a:lnSpc>
+              <a:spcBef>
+                <a:spcPts val="0"/>
+              </a:spcBef>
+              <a:spcAft>
+                <a:spcPts val="0"/>
+              </a:spcAft>
+            </a:pPr>
+            <a:r>
+              <a:rPr sz="1500" b="0" i="0">
+                <a:solidFill>
+                  <a:srgbClr val="F4F6FB"/>
+                </a:solidFill>
+                <a:latin typeface="Calibri"/>
+              </a:rPr>
+              <a:t>Manejo básico + escala 1:1</a:t>
+            </a:r>
+          </a:p>
+        </p:txBody>
+      </p:sp>
+      <p:sp>
+        <p:nvSpPr>
+          <p:cNvPr id="18" name="TextBox 17"/>
+          <p:cNvSpPr txBox="1"/>
+          <p:nvPr/>
+        </p:nvSpPr>
+        <p:spPr>
+          <a:xfrm>
+            <a:off x="8869680" y="5029200"/>
+            <a:ext cx="2681935" cy="292608"/>
+          </a:xfrm>
+          <a:prstGeom prst="rect">
+            <a:avLst/>
+          </a:prstGeom>
+          <a:noFill/>
+        </p:spPr>
+        <p:txBody>
+          <a:bodyPr wrap="square" anchor="t" lIns="0" rIns="0" tIns="0" bIns="0">
+            <a:spAutoFit/>
+          </a:bodyPr>
+          <a:lstStyle/>
+          <a:p>
+            <a:pPr algn="l">
+              <a:spcBef>
+                <a:spcPts val="0"/>
+              </a:spcBef>
+              <a:spcAft>
+                <a:spcPts val="0"/>
+              </a:spcAft>
+            </a:pPr>
+            <a:r>
+              <a:rPr sz="1100" b="1" i="0" spc="200">
+                <a:solidFill>
+                  <a:srgbClr val="35D0C7"/>
+                </a:solidFill>
+                <a:latin typeface="Calibri"/>
+              </a:rPr>
+              <a:t>PRÓXIMO HITO</a:t>
+            </a:r>
+          </a:p>
+        </p:txBody>
+      </p:sp>
+      <p:sp>
+        <p:nvSpPr>
+          <p:cNvPr id="19" name="TextBox 18"/>
+          <p:cNvSpPr txBox="1"/>
+          <p:nvPr/>
+        </p:nvSpPr>
+        <p:spPr>
+          <a:xfrm>
+            <a:off x="8869680" y="5303520"/>
+            <a:ext cx="2681935" cy="457200"/>
+          </a:xfrm>
+          <a:prstGeom prst="rect">
+            <a:avLst/>
+          </a:prstGeom>
+          <a:noFill/>
+        </p:spPr>
+        <p:txBody>
+          <a:bodyPr wrap="square" anchor="t" lIns="0" rIns="0" tIns="0" bIns="0">
+            <a:spAutoFit/>
+          </a:bodyPr>
+          <a:lstStyle/>
+          <a:p>
+            <a:pPr algn="l">
+              <a:lnSpc>
+                <a:spcPct val="110000"/>
+              </a:lnSpc>
+              <a:spcBef>
+                <a:spcPts val="0"/>
+              </a:spcBef>
+              <a:spcAft>
+                <a:spcPts val="0"/>
+              </a:spcAft>
+            </a:pPr>
+            <a:r>
+              <a:rPr sz="1500" b="0" i="0">
+                <a:solidFill>
+                  <a:srgbClr val="F4F6FB"/>
+                </a:solidFill>
+                <a:latin typeface="Calibri"/>
+              </a:rPr>
+              <a:t>Prototipo lo-fi, 13 oct</a:t>
             </a:r>
           </a:p>
         </p:txBody>
@@ -6464,7 +6674,7 @@
         <p:spPr>
           <a:xfrm>
             <a:off x="640080" y="2148840"/>
-            <a:ext cx="3310128" cy="3520440"/>
+            <a:ext cx="3310128" cy="3657600"/>
           </a:xfrm>
           <a:prstGeom prst="roundRect">
             <a:avLst>
@@ -6598,7 +6808,7 @@
         <p:spPr>
           <a:xfrm>
             <a:off x="896112" y="3017520"/>
-            <a:ext cx="2798064" cy="731520"/>
+            <a:ext cx="2798064" cy="777240"/>
           </a:xfrm>
           <a:prstGeom prst="rect">
             <a:avLst/>
@@ -6642,7 +6852,7 @@
         </p:nvSpPr>
         <p:spPr>
           <a:xfrm>
-            <a:off x="896112" y="3566160"/>
+            <a:off x="896112" y="3813048"/>
             <a:ext cx="2798064" cy="320040"/>
           </a:xfrm>
           <a:prstGeom prst="rect">
@@ -6684,8 +6894,8 @@
         </p:nvSpPr>
         <p:spPr>
           <a:xfrm>
-            <a:off x="896112" y="3931920"/>
-            <a:ext cx="2798064" cy="1508760"/>
+            <a:off x="896112" y="4178808"/>
+            <a:ext cx="2798064" cy="1417320"/>
           </a:xfrm>
           <a:prstGeom prst="rect">
             <a:avLst/>
@@ -6730,7 +6940,7 @@
         <p:spPr>
           <a:xfrm>
             <a:off x="4206240" y="2148840"/>
-            <a:ext cx="3310128" cy="3520440"/>
+            <a:ext cx="3310128" cy="3657600"/>
           </a:xfrm>
           <a:prstGeom prst="roundRect">
             <a:avLst>
@@ -6864,7 +7074,7 @@
         <p:spPr>
           <a:xfrm>
             <a:off x="4462272" y="3017520"/>
-            <a:ext cx="2798064" cy="731520"/>
+            <a:ext cx="2798064" cy="777240"/>
           </a:xfrm>
           <a:prstGeom prst="rect">
             <a:avLst/>
@@ -6908,7 +7118,7 @@
         </p:nvSpPr>
         <p:spPr>
           <a:xfrm>
-            <a:off x="4462272" y="3566160"/>
+            <a:off x="4462272" y="3813048"/>
             <a:ext cx="2798064" cy="320040"/>
           </a:xfrm>
           <a:prstGeom prst="rect">
@@ -6950,8 +7160,8 @@
         </p:nvSpPr>
         <p:spPr>
           <a:xfrm>
-            <a:off x="4462272" y="3931920"/>
-            <a:ext cx="2798064" cy="1508760"/>
+            <a:off x="4462272" y="4178808"/>
+            <a:ext cx="2798064" cy="1417320"/>
           </a:xfrm>
           <a:prstGeom prst="rect">
             <a:avLst/>
@@ -6996,7 +7206,7 @@
         <p:spPr>
           <a:xfrm>
             <a:off x="7772400" y="2148840"/>
-            <a:ext cx="3310128" cy="3520440"/>
+            <a:ext cx="3310128" cy="3657600"/>
           </a:xfrm>
           <a:prstGeom prst="roundRect">
             <a:avLst>
@@ -7130,7 +7340,7 @@
         <p:spPr>
           <a:xfrm>
             <a:off x="8028432" y="3017520"/>
-            <a:ext cx="2798064" cy="731520"/>
+            <a:ext cx="2798064" cy="777240"/>
           </a:xfrm>
           <a:prstGeom prst="rect">
             <a:avLst/>
@@ -7174,7 +7384,7 @@
         </p:nvSpPr>
         <p:spPr>
           <a:xfrm>
-            <a:off x="8028432" y="3566160"/>
+            <a:off x="8028432" y="3813048"/>
             <a:ext cx="2798064" cy="320040"/>
           </a:xfrm>
           <a:prstGeom prst="rect">
@@ -7216,8 +7426,8 @@
         </p:nvSpPr>
         <p:spPr>
           <a:xfrm>
-            <a:off x="8028432" y="3931920"/>
-            <a:ext cx="2798064" cy="1508760"/>
+            <a:off x="8028432" y="4178808"/>
+            <a:ext cx="2798064" cy="1417320"/>
           </a:xfrm>
           <a:prstGeom prst="rect">
             <a:avLst/>

--- a/presentation/hito1-vrcar.pptx
+++ b/presentation/hito1-vrcar.pptx
@@ -3093,7 +3093,7 @@
     <p:bg>
       <p:bgPr>
         <a:solidFill>
-          <a:srgbClr val="0B1220"/>
+          <a:srgbClr val="080812"/>
         </a:solidFill>
         <a:effectLst/>
       </p:bgPr>
@@ -3107,20 +3107,218 @@
       <p:grpSpPr/>
       <p:sp>
         <p:nvSpPr>
-          <p:cNvPr id="2" name="Rectangle 1"/>
+          <p:cNvPr id="2" name="Oval 1"/>
           <p:cNvSpPr/>
           <p:nvPr/>
         </p:nvSpPr>
         <p:spPr>
           <a:xfrm>
-            <a:off x="0" y="0"/>
-            <a:ext cx="63500" cy="6858000"/>
+            <a:off x="7040880" y="-1828800"/>
+            <a:ext cx="4937760" cy="4937760"/>
+          </a:xfrm>
+          <a:prstGeom prst="ellipse">
+            <a:avLst/>
+          </a:prstGeom>
+          <a:gradFill flip="none" rotWithShape="1">
+            <a:gsLst>
+              <a:gs pos="0">
+                <a:srgbClr val="3B9EF6">
+                  <a:alpha val="60000"/>
+                </a:srgbClr>
+              </a:gs>
+              <a:gs pos="55000">
+                <a:srgbClr val="3B9EF6">
+                  <a:alpha val="26000"/>
+                </a:srgbClr>
+              </a:gs>
+              <a:gs pos="100000">
+                <a:srgbClr val="3B9EF6">
+                  <a:alpha val="0"/>
+                </a:srgbClr>
+              </a:gs>
+            </a:gsLst>
+            <a:path path="circle">
+              <a:fillToRect l="50000" t="50000" r="50000" b="50000"/>
+            </a:path>
+          </a:gradFill>
+          <a:ln>
+            <a:noFill/>
+          </a:ln>
+          <a:effectLst/>
+          <a:effectLst>
+            <a:softEdge rad="1005840"/>
+          </a:effectLst>
+        </p:spPr>
+        <p:style>
+          <a:lnRef idx="1">
+            <a:schemeClr val="accent1"/>
+          </a:lnRef>
+          <a:fillRef idx="3">
+            <a:schemeClr val="accent1"/>
+          </a:fillRef>
+          <a:effectRef idx="2">
+            <a:schemeClr val="accent1"/>
+          </a:effectRef>
+          <a:fontRef idx="minor">
+            <a:schemeClr val="lt1"/>
+          </a:fontRef>
+        </p:style>
+        <p:txBody>
+          <a:bodyPr rtlCol="0" anchor="ctr"/>
+          <a:lstStyle/>
+          <a:p>
+            <a:pPr algn="ctr"/>
+          </a:p>
+        </p:txBody>
+      </p:sp>
+      <p:sp>
+        <p:nvSpPr>
+          <p:cNvPr id="3" name="Oval 2"/>
+          <p:cNvSpPr/>
+          <p:nvPr/>
+        </p:nvSpPr>
+        <p:spPr>
+          <a:xfrm>
+            <a:off x="7863840" y="914399"/>
+            <a:ext cx="5669280" cy="5669280"/>
+          </a:xfrm>
+          <a:prstGeom prst="ellipse">
+            <a:avLst/>
+          </a:prstGeom>
+          <a:gradFill flip="none" rotWithShape="1">
+            <a:gsLst>
+              <a:gs pos="0">
+                <a:srgbClr val="8B5CF6">
+                  <a:alpha val="65000"/>
+                </a:srgbClr>
+              </a:gs>
+              <a:gs pos="55000">
+                <a:srgbClr val="8B5CF6">
+                  <a:alpha val="30000"/>
+                </a:srgbClr>
+              </a:gs>
+              <a:gs pos="100000">
+                <a:srgbClr val="8B5CF6">
+                  <a:alpha val="0"/>
+                </a:srgbClr>
+              </a:gs>
+            </a:gsLst>
+            <a:path path="circle">
+              <a:fillToRect l="50000" t="50000" r="50000" b="50000"/>
+            </a:path>
+          </a:gradFill>
+          <a:ln>
+            <a:noFill/>
+          </a:ln>
+          <a:effectLst/>
+          <a:effectLst>
+            <a:softEdge rad="1005840"/>
+          </a:effectLst>
+        </p:spPr>
+        <p:style>
+          <a:lnRef idx="1">
+            <a:schemeClr val="accent1"/>
+          </a:lnRef>
+          <a:fillRef idx="3">
+            <a:schemeClr val="accent1"/>
+          </a:fillRef>
+          <a:effectRef idx="2">
+            <a:schemeClr val="accent1"/>
+          </a:effectRef>
+          <a:fontRef idx="minor">
+            <a:schemeClr val="lt1"/>
+          </a:fontRef>
+        </p:style>
+        <p:txBody>
+          <a:bodyPr rtlCol="0" anchor="ctr"/>
+          <a:lstStyle/>
+          <a:p>
+            <a:pPr algn="ctr"/>
+          </a:p>
+        </p:txBody>
+      </p:sp>
+      <p:sp>
+        <p:nvSpPr>
+          <p:cNvPr id="4" name="Oval 3"/>
+          <p:cNvSpPr/>
+          <p:nvPr/>
+        </p:nvSpPr>
+        <p:spPr>
+          <a:xfrm>
+            <a:off x="6858000" y="4114800"/>
+            <a:ext cx="4389120" cy="4389120"/>
+          </a:xfrm>
+          <a:prstGeom prst="ellipse">
+            <a:avLst/>
+          </a:prstGeom>
+          <a:gradFill flip="none" rotWithShape="1">
+            <a:gsLst>
+              <a:gs pos="0">
+                <a:srgbClr val="F46FB8">
+                  <a:alpha val="55000"/>
+                </a:srgbClr>
+              </a:gs>
+              <a:gs pos="55000">
+                <a:srgbClr val="F46FB8">
+                  <a:alpha val="24000"/>
+                </a:srgbClr>
+              </a:gs>
+              <a:gs pos="100000">
+                <a:srgbClr val="F46FB8">
+                  <a:alpha val="0"/>
+                </a:srgbClr>
+              </a:gs>
+            </a:gsLst>
+            <a:path path="circle">
+              <a:fillToRect l="50000" t="50000" r="50000" b="50000"/>
+            </a:path>
+          </a:gradFill>
+          <a:ln>
+            <a:noFill/>
+          </a:ln>
+          <a:effectLst/>
+          <a:effectLst>
+            <a:softEdge rad="1005840"/>
+          </a:effectLst>
+        </p:spPr>
+        <p:style>
+          <a:lnRef idx="1">
+            <a:schemeClr val="accent1"/>
+          </a:lnRef>
+          <a:fillRef idx="3">
+            <a:schemeClr val="accent1"/>
+          </a:fillRef>
+          <a:effectRef idx="2">
+            <a:schemeClr val="accent1"/>
+          </a:effectRef>
+          <a:fontRef idx="minor">
+            <a:schemeClr val="lt1"/>
+          </a:fontRef>
+        </p:style>
+        <p:txBody>
+          <a:bodyPr rtlCol="0" anchor="ctr"/>
+          <a:lstStyle/>
+          <a:p>
+            <a:pPr algn="ctr"/>
+          </a:p>
+        </p:txBody>
+      </p:sp>
+      <p:sp>
+        <p:nvSpPr>
+          <p:cNvPr id="5" name="Rectangle 4"/>
+          <p:cNvSpPr/>
+          <p:nvPr/>
+        </p:nvSpPr>
+        <p:spPr>
+          <a:xfrm>
+            <a:off x="8366760" y="822960"/>
+            <a:ext cx="12700" cy="5212080"/>
           </a:xfrm>
           <a:prstGeom prst="rect">
             <a:avLst/>
           </a:prstGeom>
           <a:solidFill>
-            <a:srgbClr val="FF7A33"/>
+            <a:srgbClr val="2A273E"/>
           </a:solidFill>
           <a:ln>
             <a:noFill/>
@@ -3151,20 +3349,24 @@
       </p:sp>
       <p:sp>
         <p:nvSpPr>
-          <p:cNvPr id="3" name="Rectangle 2"/>
+          <p:cNvPr id="6" name="Rounded Rectangle 5"/>
           <p:cNvSpPr/>
           <p:nvPr/>
         </p:nvSpPr>
         <p:spPr>
           <a:xfrm>
-            <a:off x="8366760" y="822960"/>
-            <a:ext cx="12700" cy="5212080"/>
-          </a:xfrm>
-          <a:prstGeom prst="rect">
-            <a:avLst/>
+            <a:off x="8686800" y="1691640"/>
+            <a:ext cx="2864815" cy="4572000"/>
+          </a:xfrm>
+          <a:prstGeom prst="roundRect">
+            <a:avLst>
+              <a:gd name="adj" fmla="val 7000"/>
+            </a:avLst>
           </a:prstGeom>
           <a:solidFill>
-            <a:srgbClr val="27334A"/>
+            <a:srgbClr val="171528">
+              <a:alpha val="60000"/>
+            </a:srgbClr>
           </a:solidFill>
           <a:ln>
             <a:noFill/>
@@ -3195,7 +3397,7 @@
       </p:sp>
       <p:sp>
         <p:nvSpPr>
-          <p:cNvPr id="4" name="TextBox 3"/>
+          <p:cNvPr id="7" name="TextBox 6"/>
           <p:cNvSpPr txBox="1"/>
           <p:nvPr/>
         </p:nvSpPr>
@@ -3226,7 +3428,7 @@
             <a:r>
               <a:rPr sz="1250" b="1" i="0" spc="260">
                 <a:solidFill>
-                  <a:srgbClr val="A9B4C9"/>
+                  <a:srgbClr val="ACA8C4"/>
                 </a:solidFill>
                 <a:latin typeface="Calibri"/>
               </a:rPr>
@@ -3237,7 +3439,7 @@
       </p:sp>
       <p:sp>
         <p:nvSpPr>
-          <p:cNvPr id="5" name="TextBox 4"/>
+          <p:cNvPr id="8" name="TextBox 7"/>
           <p:cNvSpPr txBox="1"/>
           <p:nvPr/>
         </p:nvSpPr>
@@ -3268,7 +3470,7 @@
             <a:r>
               <a:rPr sz="1250" b="1" i="0" spc="260">
                 <a:solidFill>
-                  <a:srgbClr val="35D0C7"/>
+                  <a:srgbClr val="3B9EF6"/>
                 </a:solidFill>
                 <a:latin typeface="Calibri"/>
               </a:rPr>
@@ -3279,7 +3481,7 @@
       </p:sp>
       <p:sp>
         <p:nvSpPr>
-          <p:cNvPr id="6" name="Rectangle 5"/>
+          <p:cNvPr id="9" name="Rectangle 8"/>
           <p:cNvSpPr/>
           <p:nvPr/>
         </p:nvSpPr>
@@ -3292,7 +3494,7 @@
             <a:avLst/>
           </a:prstGeom>
           <a:solidFill>
-            <a:srgbClr val="FF7A33"/>
+            <a:srgbClr val="F46FB8"/>
           </a:solidFill>
           <a:ln>
             <a:noFill/>
@@ -3323,7 +3525,7 @@
       </p:sp>
       <p:sp>
         <p:nvSpPr>
-          <p:cNvPr id="7" name="TextBox 6"/>
+          <p:cNvPr id="10" name="TextBox 9"/>
           <p:cNvSpPr txBox="1"/>
           <p:nvPr/>
         </p:nvSpPr>
@@ -3354,9 +3556,16 @@
             <a:r>
               <a:rPr sz="5800" b="1" i="0">
                 <a:solidFill>
-                  <a:srgbClr val="F4F6FB"/>
-                </a:solidFill>
-                <a:latin typeface="Calibri"/>
+                  <a:srgbClr val="F6F5FB"/>
+                </a:solidFill>
+                <a:latin typeface="Calibri"/>
+                <a:effectLst>
+                  <a:glow rad="127000">
+                    <a:srgbClr val="8B5CF6">
+                      <a:alpha val="45000"/>
+                    </a:srgbClr>
+                  </a:glow>
+                </a:effectLst>
               </a:rPr>
               <a:t>VR Car</a:t>
             </a:r>
@@ -3365,7 +3574,7 @@
       </p:sp>
       <p:sp>
         <p:nvSpPr>
-          <p:cNvPr id="8" name="TextBox 7"/>
+          <p:cNvPr id="11" name="TextBox 10"/>
           <p:cNvSpPr txBox="1"/>
           <p:nvPr/>
         </p:nvSpPr>
@@ -3399,7 +3608,7 @@
             <a:r>
               <a:rPr sz="1750" b="0" i="1">
                 <a:solidFill>
-                  <a:srgbClr val="A9B4C9"/>
+                  <a:srgbClr val="ACA8C4"/>
                 </a:solidFill>
                 <a:latin typeface="Calibri"/>
               </a:rPr>
@@ -3411,7 +3620,7 @@
       </p:sp>
       <p:sp>
         <p:nvSpPr>
-          <p:cNvPr id="9" name="TextBox 8"/>
+          <p:cNvPr id="12" name="TextBox 11"/>
           <p:cNvSpPr txBox="1"/>
           <p:nvPr/>
         </p:nvSpPr>
@@ -3445,7 +3654,7 @@
             <a:r>
               <a:rPr sz="1550" b="0" i="0">
                 <a:solidFill>
-                  <a:srgbClr val="A9B4C9"/>
+                  <a:srgbClr val="ACA8C4"/>
                 </a:solidFill>
                 <a:latin typeface="Calibri"/>
               </a:rPr>
@@ -3456,7 +3665,7 @@
       </p:sp>
       <p:sp>
         <p:nvSpPr>
-          <p:cNvPr id="10" name="Rectangle 9"/>
+          <p:cNvPr id="13" name="Rectangle 12"/>
           <p:cNvSpPr/>
           <p:nvPr/>
         </p:nvSpPr>
@@ -3469,7 +3678,7 @@
             <a:avLst/>
           </a:prstGeom>
           <a:solidFill>
-            <a:srgbClr val="27334A"/>
+            <a:srgbClr val="2A273E"/>
           </a:solidFill>
           <a:ln>
             <a:noFill/>
@@ -3500,7 +3709,7 @@
       </p:sp>
       <p:sp>
         <p:nvSpPr>
-          <p:cNvPr id="11" name="TextBox 10"/>
+          <p:cNvPr id="14" name="TextBox 13"/>
           <p:cNvSpPr txBox="1"/>
           <p:nvPr/>
         </p:nvSpPr>
@@ -3531,7 +3740,7 @@
             <a:r>
               <a:rPr sz="1400" b="1" i="0">
                 <a:solidFill>
-                  <a:srgbClr val="F4F6FB"/>
+                  <a:srgbClr val="F6F5FB"/>
                 </a:solidFill>
                 <a:latin typeface="Calibri"/>
               </a:rPr>
@@ -3550,7 +3759,7 @@
             <a:r>
               <a:rPr sz="1250" b="0" i="0">
                 <a:solidFill>
-                  <a:srgbClr val="A9B4C9"/>
+                  <a:srgbClr val="ACA8C4"/>
                 </a:solidFill>
                 <a:latin typeface="Calibri"/>
               </a:rPr>
@@ -3561,7 +3770,7 @@
       </p:sp>
       <p:sp>
         <p:nvSpPr>
-          <p:cNvPr id="12" name="TextBox 11"/>
+          <p:cNvPr id="15" name="TextBox 14"/>
           <p:cNvSpPr txBox="1"/>
           <p:nvPr/>
         </p:nvSpPr>
@@ -3592,7 +3801,7 @@
             <a:r>
               <a:rPr sz="1100" b="1" i="0" spc="200">
                 <a:solidFill>
-                  <a:srgbClr val="35D0C7"/>
+                  <a:srgbClr val="3B9EF6"/>
                 </a:solidFill>
                 <a:latin typeface="Calibri"/>
               </a:rPr>
@@ -3603,7 +3812,7 @@
       </p:sp>
       <p:sp>
         <p:nvSpPr>
-          <p:cNvPr id="13" name="TextBox 12"/>
+          <p:cNvPr id="16" name="TextBox 15"/>
           <p:cNvSpPr txBox="1"/>
           <p:nvPr/>
         </p:nvSpPr>
@@ -3637,7 +3846,7 @@
             <a:r>
               <a:rPr sz="1500" b="0" i="0">
                 <a:solidFill>
-                  <a:srgbClr val="F4F6FB"/>
+                  <a:srgbClr val="F6F5FB"/>
                 </a:solidFill>
                 <a:latin typeface="Calibri"/>
               </a:rPr>
@@ -3648,7 +3857,7 @@
       </p:sp>
       <p:sp>
         <p:nvSpPr>
-          <p:cNvPr id="14" name="TextBox 13"/>
+          <p:cNvPr id="17" name="TextBox 16"/>
           <p:cNvSpPr txBox="1"/>
           <p:nvPr/>
         </p:nvSpPr>
@@ -3679,7 +3888,7 @@
             <a:r>
               <a:rPr sz="1100" b="1" i="0" spc="200">
                 <a:solidFill>
-                  <a:srgbClr val="35D0C7"/>
+                  <a:srgbClr val="3B9EF6"/>
                 </a:solidFill>
                 <a:latin typeface="Calibri"/>
               </a:rPr>
@@ -3690,7 +3899,7 @@
       </p:sp>
       <p:sp>
         <p:nvSpPr>
-          <p:cNvPr id="15" name="TextBox 14"/>
+          <p:cNvPr id="18" name="TextBox 17"/>
           <p:cNvSpPr txBox="1"/>
           <p:nvPr/>
         </p:nvSpPr>
@@ -3724,7 +3933,7 @@
             <a:r>
               <a:rPr sz="1500" b="0" i="0">
                 <a:solidFill>
-                  <a:srgbClr val="F4F6FB"/>
+                  <a:srgbClr val="F6F5FB"/>
                 </a:solidFill>
                 <a:latin typeface="Calibri"/>
               </a:rPr>
@@ -3735,7 +3944,7 @@
       </p:sp>
       <p:sp>
         <p:nvSpPr>
-          <p:cNvPr id="16" name="TextBox 15"/>
+          <p:cNvPr id="19" name="TextBox 18"/>
           <p:cNvSpPr txBox="1"/>
           <p:nvPr/>
         </p:nvSpPr>
@@ -3766,7 +3975,7 @@
             <a:r>
               <a:rPr sz="1100" b="1" i="0" spc="200">
                 <a:solidFill>
-                  <a:srgbClr val="35D0C7"/>
+                  <a:srgbClr val="3B9EF6"/>
                 </a:solidFill>
                 <a:latin typeface="Calibri"/>
               </a:rPr>
@@ -3777,7 +3986,7 @@
       </p:sp>
       <p:sp>
         <p:nvSpPr>
-          <p:cNvPr id="17" name="TextBox 16"/>
+          <p:cNvPr id="20" name="TextBox 19"/>
           <p:cNvSpPr txBox="1"/>
           <p:nvPr/>
         </p:nvSpPr>
@@ -3811,7 +4020,7 @@
             <a:r>
               <a:rPr sz="1500" b="0" i="0">
                 <a:solidFill>
-                  <a:srgbClr val="F4F6FB"/>
+                  <a:srgbClr val="F6F5FB"/>
                 </a:solidFill>
                 <a:latin typeface="Calibri"/>
               </a:rPr>
@@ -3822,7 +4031,7 @@
       </p:sp>
       <p:sp>
         <p:nvSpPr>
-          <p:cNvPr id="18" name="TextBox 17"/>
+          <p:cNvPr id="21" name="TextBox 20"/>
           <p:cNvSpPr txBox="1"/>
           <p:nvPr/>
         </p:nvSpPr>
@@ -3853,7 +4062,7 @@
             <a:r>
               <a:rPr sz="1100" b="1" i="0" spc="200">
                 <a:solidFill>
-                  <a:srgbClr val="35D0C7"/>
+                  <a:srgbClr val="3B9EF6"/>
                 </a:solidFill>
                 <a:latin typeface="Calibri"/>
               </a:rPr>
@@ -3864,7 +4073,7 @@
       </p:sp>
       <p:sp>
         <p:nvSpPr>
-          <p:cNvPr id="19" name="TextBox 18"/>
+          <p:cNvPr id="22" name="TextBox 21"/>
           <p:cNvSpPr txBox="1"/>
           <p:nvPr/>
         </p:nvSpPr>
@@ -3898,7 +4107,7 @@
             <a:r>
               <a:rPr sz="1500" b="0" i="0">
                 <a:solidFill>
-                  <a:srgbClr val="F4F6FB"/>
+                  <a:srgbClr val="F6F5FB"/>
                 </a:solidFill>
                 <a:latin typeface="Calibri"/>
               </a:rPr>
@@ -3921,7 +4130,7 @@
     <p:bg>
       <p:bgPr>
         <a:solidFill>
-          <a:srgbClr val="0B1220"/>
+          <a:srgbClr val="080812"/>
         </a:solidFill>
         <a:effectLst/>
       </p:bgPr>
@@ -3935,20 +4144,309 @@
       <p:grpSpPr/>
       <p:sp>
         <p:nvSpPr>
-          <p:cNvPr id="2" name="Rectangle 1"/>
+          <p:cNvPr id="2" name="Oval 1"/>
           <p:cNvSpPr/>
           <p:nvPr/>
         </p:nvSpPr>
         <p:spPr>
           <a:xfrm>
-            <a:off x="0" y="0"/>
-            <a:ext cx="12191695" cy="128016"/>
+            <a:off x="-3566160" y="-3749040"/>
+            <a:ext cx="5669280" cy="5669280"/>
+          </a:xfrm>
+          <a:prstGeom prst="ellipse">
+            <a:avLst/>
+          </a:prstGeom>
+          <a:gradFill flip="none" rotWithShape="1">
+            <a:gsLst>
+              <a:gs pos="0">
+                <a:srgbClr val="3B9EF6">
+                  <a:alpha val="50000"/>
+                </a:srgbClr>
+              </a:gs>
+              <a:gs pos="55000">
+                <a:srgbClr val="3B9EF6">
+                  <a:alpha val="20000"/>
+                </a:srgbClr>
+              </a:gs>
+              <a:gs pos="100000">
+                <a:srgbClr val="3B9EF6">
+                  <a:alpha val="0"/>
+                </a:srgbClr>
+              </a:gs>
+            </a:gsLst>
+            <a:path path="circle">
+              <a:fillToRect l="50000" t="50000" r="50000" b="50000"/>
+            </a:path>
+          </a:gradFill>
+          <a:ln>
+            <a:noFill/>
+          </a:ln>
+          <a:effectLst/>
+          <a:effectLst>
+            <a:softEdge rad="1005840"/>
+          </a:effectLst>
+        </p:spPr>
+        <p:style>
+          <a:lnRef idx="1">
+            <a:schemeClr val="accent1"/>
+          </a:lnRef>
+          <a:fillRef idx="3">
+            <a:schemeClr val="accent1"/>
+          </a:fillRef>
+          <a:effectRef idx="2">
+            <a:schemeClr val="accent1"/>
+          </a:effectRef>
+          <a:fontRef idx="minor">
+            <a:schemeClr val="lt1"/>
+          </a:fontRef>
+        </p:style>
+        <p:txBody>
+          <a:bodyPr rtlCol="0" anchor="ctr"/>
+          <a:lstStyle/>
+          <a:p>
+            <a:pPr algn="ctr"/>
+          </a:p>
+        </p:txBody>
+      </p:sp>
+      <p:sp>
+        <p:nvSpPr>
+          <p:cNvPr id="3" name="Oval 2"/>
+          <p:cNvSpPr/>
+          <p:nvPr/>
+        </p:nvSpPr>
+        <p:spPr>
+          <a:xfrm>
+            <a:off x="-640080" y="-1005840"/>
+            <a:ext cx="6035040" cy="6035040"/>
+          </a:xfrm>
+          <a:prstGeom prst="ellipse">
+            <a:avLst/>
+          </a:prstGeom>
+          <a:gradFill flip="none" rotWithShape="1">
+            <a:gsLst>
+              <a:gs pos="0">
+                <a:srgbClr val="8B5CF6">
+                  <a:alpha val="48000"/>
+                </a:srgbClr>
+              </a:gs>
+              <a:gs pos="55000">
+                <a:srgbClr val="8B5CF6">
+                  <a:alpha val="20000"/>
+                </a:srgbClr>
+              </a:gs>
+              <a:gs pos="100000">
+                <a:srgbClr val="8B5CF6">
+                  <a:alpha val="0"/>
+                </a:srgbClr>
+              </a:gs>
+            </a:gsLst>
+            <a:path path="circle">
+              <a:fillToRect l="50000" t="50000" r="50000" b="50000"/>
+            </a:path>
+          </a:gradFill>
+          <a:ln>
+            <a:noFill/>
+          </a:ln>
+          <a:effectLst/>
+          <a:effectLst>
+            <a:softEdge rad="1005840"/>
+          </a:effectLst>
+        </p:spPr>
+        <p:style>
+          <a:lnRef idx="1">
+            <a:schemeClr val="accent1"/>
+          </a:lnRef>
+          <a:fillRef idx="3">
+            <a:schemeClr val="accent1"/>
+          </a:fillRef>
+          <a:effectRef idx="2">
+            <a:schemeClr val="accent1"/>
+          </a:effectRef>
+          <a:fontRef idx="minor">
+            <a:schemeClr val="lt1"/>
+          </a:fontRef>
+        </p:style>
+        <p:txBody>
+          <a:bodyPr rtlCol="0" anchor="ctr"/>
+          <a:lstStyle/>
+          <a:p>
+            <a:pPr algn="ctr"/>
+          </a:p>
+        </p:txBody>
+      </p:sp>
+      <p:sp>
+        <p:nvSpPr>
+          <p:cNvPr id="4" name="Oval 3"/>
+          <p:cNvSpPr/>
+          <p:nvPr/>
+        </p:nvSpPr>
+        <p:spPr>
+          <a:xfrm>
+            <a:off x="-1280160" y="3657600"/>
+            <a:ext cx="4754880" cy="4754880"/>
+          </a:xfrm>
+          <a:prstGeom prst="ellipse">
+            <a:avLst/>
+          </a:prstGeom>
+          <a:gradFill flip="none" rotWithShape="1">
+            <a:gsLst>
+              <a:gs pos="0">
+                <a:srgbClr val="F46FB8">
+                  <a:alpha val="42000"/>
+                </a:srgbClr>
+              </a:gs>
+              <a:gs pos="55000">
+                <a:srgbClr val="F46FB8">
+                  <a:alpha val="18000"/>
+                </a:srgbClr>
+              </a:gs>
+              <a:gs pos="100000">
+                <a:srgbClr val="F46FB8">
+                  <a:alpha val="0"/>
+                </a:srgbClr>
+              </a:gs>
+            </a:gsLst>
+            <a:path path="circle">
+              <a:fillToRect l="50000" t="50000" r="50000" b="50000"/>
+            </a:path>
+          </a:gradFill>
+          <a:ln>
+            <a:noFill/>
+          </a:ln>
+          <a:effectLst/>
+          <a:effectLst>
+            <a:softEdge rad="1005840"/>
+          </a:effectLst>
+        </p:spPr>
+        <p:style>
+          <a:lnRef idx="1">
+            <a:schemeClr val="accent1"/>
+          </a:lnRef>
+          <a:fillRef idx="3">
+            <a:schemeClr val="accent1"/>
+          </a:fillRef>
+          <a:effectRef idx="2">
+            <a:schemeClr val="accent1"/>
+          </a:effectRef>
+          <a:fontRef idx="minor">
+            <a:schemeClr val="lt1"/>
+          </a:fontRef>
+        </p:style>
+        <p:txBody>
+          <a:bodyPr rtlCol="0" anchor="ctr"/>
+          <a:lstStyle/>
+          <a:p>
+            <a:pPr algn="ctr"/>
+          </a:p>
+        </p:txBody>
+      </p:sp>
+      <p:sp>
+        <p:nvSpPr>
+          <p:cNvPr id="5" name="TextBox 4"/>
+          <p:cNvSpPr txBox="1"/>
+          <p:nvPr/>
+        </p:nvSpPr>
+        <p:spPr>
+          <a:xfrm>
+            <a:off x="822960" y="2286000"/>
+            <a:ext cx="8686800" cy="457200"/>
+          </a:xfrm>
+          <a:prstGeom prst="rect">
+            <a:avLst/>
+          </a:prstGeom>
+          <a:noFill/>
+        </p:spPr>
+        <p:txBody>
+          <a:bodyPr wrap="square" anchor="t" lIns="0" rIns="0" tIns="0" bIns="0">
+            <a:spAutoFit/>
+          </a:bodyPr>
+          <a:lstStyle/>
+          <a:p>
+            <a:pPr algn="l">
+              <a:spcBef>
+                <a:spcPts val="0"/>
+              </a:spcBef>
+              <a:spcAft>
+                <a:spcPts val="0"/>
+              </a:spcAft>
+            </a:pPr>
+            <a:r>
+              <a:rPr sz="1400" b="1" i="0" spc="240">
+                <a:solidFill>
+                  <a:srgbClr val="3B9EF6"/>
+                </a:solidFill>
+                <a:latin typeface="Calibri"/>
+              </a:rPr>
+              <a:t>GRACIAS</a:t>
+            </a:r>
+          </a:p>
+        </p:txBody>
+      </p:sp>
+      <p:sp>
+        <p:nvSpPr>
+          <p:cNvPr id="6" name="TextBox 5"/>
+          <p:cNvSpPr txBox="1"/>
+          <p:nvPr/>
+        </p:nvSpPr>
+        <p:spPr>
+          <a:xfrm>
+            <a:off x="777240" y="2697480"/>
+            <a:ext cx="9601200" cy="1097280"/>
+          </a:xfrm>
+          <a:prstGeom prst="rect">
+            <a:avLst/>
+          </a:prstGeom>
+          <a:noFill/>
+        </p:spPr>
+        <p:txBody>
+          <a:bodyPr wrap="square" anchor="t" lIns="0" rIns="0" tIns="0" bIns="0">
+            <a:spAutoFit/>
+          </a:bodyPr>
+          <a:lstStyle/>
+          <a:p>
+            <a:pPr algn="l">
+              <a:spcBef>
+                <a:spcPts val="0"/>
+              </a:spcBef>
+              <a:spcAft>
+                <a:spcPts val="0"/>
+              </a:spcAft>
+            </a:pPr>
+            <a:r>
+              <a:rPr sz="5400" b="1" i="0">
+                <a:solidFill>
+                  <a:srgbClr val="F6F5FB"/>
+                </a:solidFill>
+                <a:latin typeface="Calibri"/>
+                <a:effectLst>
+                  <a:glow rad="127000">
+                    <a:srgbClr val="F46FB8">
+                      <a:alpha val="45000"/>
+                    </a:srgbClr>
+                  </a:glow>
+                </a:effectLst>
+              </a:rPr>
+              <a:t>¿Preguntas?</a:t>
+            </a:r>
+          </a:p>
+        </p:txBody>
+      </p:sp>
+      <p:sp>
+        <p:nvSpPr>
+          <p:cNvPr id="7" name="Rectangle 6"/>
+          <p:cNvSpPr/>
+          <p:nvPr/>
+        </p:nvSpPr>
+        <p:spPr>
+          <a:xfrm>
+            <a:off x="822960" y="3977639"/>
+            <a:ext cx="2194560" cy="25400"/>
           </a:xfrm>
           <a:prstGeom prst="rect">
             <a:avLst/>
           </a:prstGeom>
           <a:solidFill>
-            <a:srgbClr val="35D0C7"/>
+            <a:srgbClr val="8B5CF6"/>
           </a:solidFill>
           <a:ln>
             <a:noFill/>
@@ -3979,58 +4477,14 @@
       </p:sp>
       <p:sp>
         <p:nvSpPr>
-          <p:cNvPr id="3" name="Oval 2"/>
-          <p:cNvSpPr/>
-          <p:nvPr/>
-        </p:nvSpPr>
-        <p:spPr>
-          <a:xfrm>
-            <a:off x="-1463040" y="-1463040"/>
-            <a:ext cx="4754880" cy="4754880"/>
-          </a:xfrm>
-          <a:prstGeom prst="ellipse">
-            <a:avLst/>
-          </a:prstGeom>
-          <a:solidFill>
-            <a:srgbClr val="111B2E"/>
-          </a:solidFill>
-          <a:ln>
-            <a:noFill/>
-          </a:ln>
-          <a:effectLst/>
-        </p:spPr>
-        <p:style>
-          <a:lnRef idx="1">
-            <a:schemeClr val="accent1"/>
-          </a:lnRef>
-          <a:fillRef idx="3">
-            <a:schemeClr val="accent1"/>
-          </a:fillRef>
-          <a:effectRef idx="2">
-            <a:schemeClr val="accent1"/>
-          </a:effectRef>
-          <a:fontRef idx="minor">
-            <a:schemeClr val="lt1"/>
-          </a:fontRef>
-        </p:style>
-        <p:txBody>
-          <a:bodyPr rtlCol="0" anchor="ctr"/>
-          <a:lstStyle/>
-          <a:p>
-            <a:pPr algn="ctr"/>
-          </a:p>
-        </p:txBody>
-      </p:sp>
-      <p:sp>
-        <p:nvSpPr>
-          <p:cNvPr id="4" name="TextBox 3"/>
+          <p:cNvPr id="8" name="TextBox 7"/>
           <p:cNvSpPr txBox="1"/>
           <p:nvPr/>
         </p:nvSpPr>
         <p:spPr>
           <a:xfrm>
-            <a:off x="822960" y="2286000"/>
-            <a:ext cx="8686800" cy="457200"/>
+            <a:off x="822960" y="4206240"/>
+            <a:ext cx="9144000" cy="1463040"/>
           </a:xfrm>
           <a:prstGeom prst="rect">
             <a:avLst/>
@@ -4052,128 +4506,38 @@
               </a:spcAft>
             </a:pPr>
             <a:r>
-              <a:rPr sz="1400" b="1" i="0" spc="240">
-                <a:solidFill>
-                  <a:srgbClr val="35D0C7"/>
-                </a:solidFill>
-                <a:latin typeface="Calibri"/>
-              </a:rPr>
-              <a:t>GRACIAS</a:t>
-            </a:r>
-          </a:p>
-        </p:txBody>
-      </p:sp>
-      <p:sp>
-        <p:nvSpPr>
-          <p:cNvPr id="5" name="TextBox 4"/>
-          <p:cNvSpPr txBox="1"/>
-          <p:nvPr/>
-        </p:nvSpPr>
-        <p:spPr>
-          <a:xfrm>
-            <a:off x="777240" y="2697480"/>
-            <a:ext cx="9601200" cy="1097280"/>
-          </a:xfrm>
-          <a:prstGeom prst="rect">
-            <a:avLst/>
-          </a:prstGeom>
-          <a:noFill/>
-        </p:spPr>
-        <p:txBody>
-          <a:bodyPr wrap="square" anchor="t" lIns="0" rIns="0" tIns="0" bIns="0">
-            <a:spAutoFit/>
-          </a:bodyPr>
-          <a:lstStyle/>
+              <a:rPr sz="1500" b="1" i="0">
+                <a:solidFill>
+                  <a:srgbClr val="F6F5FB"/>
+                </a:solidFill>
+                <a:latin typeface="Calibri"/>
+              </a:rPr>
+              <a:t>Estefanía Pakarati</a:t>
+            </a:r>
+          </a:p>
           <a:p>
             <a:pPr algn="l">
               <a:spcBef>
-                <a:spcPts val="0"/>
-              </a:spcBef>
-              <a:spcAft>
-                <a:spcPts val="0"/>
-              </a:spcAft>
-            </a:pPr>
-            <a:r>
-              <a:rPr sz="5400" b="1" i="0">
-                <a:solidFill>
-                  <a:srgbClr val="F4F6FB"/>
-                </a:solidFill>
-                <a:latin typeface="Calibri"/>
-              </a:rPr>
-              <a:t>¿Preguntas?</a:t>
-            </a:r>
-          </a:p>
-        </p:txBody>
-      </p:sp>
-      <p:sp>
-        <p:nvSpPr>
-          <p:cNvPr id="6" name="Rectangle 5"/>
-          <p:cNvSpPr/>
-          <p:nvPr/>
-        </p:nvSpPr>
-        <p:spPr>
-          <a:xfrm>
-            <a:off x="822960" y="3977639"/>
-            <a:ext cx="2194560" cy="25400"/>
-          </a:xfrm>
-          <a:prstGeom prst="rect">
-            <a:avLst/>
-          </a:prstGeom>
-          <a:solidFill>
-            <a:srgbClr val="FF7A33"/>
-          </a:solidFill>
-          <a:ln>
-            <a:noFill/>
-          </a:ln>
-          <a:effectLst/>
-        </p:spPr>
-        <p:style>
-          <a:lnRef idx="1">
-            <a:schemeClr val="accent1"/>
-          </a:lnRef>
-          <a:fillRef idx="3">
-            <a:schemeClr val="accent1"/>
-          </a:fillRef>
-          <a:effectRef idx="2">
-            <a:schemeClr val="accent1"/>
-          </a:effectRef>
-          <a:fontRef idx="minor">
-            <a:schemeClr val="lt1"/>
-          </a:fontRef>
-        </p:style>
-        <p:txBody>
-          <a:bodyPr rtlCol="0" anchor="ctr"/>
-          <a:lstStyle/>
-          <a:p>
-            <a:pPr algn="ctr"/>
-          </a:p>
-        </p:txBody>
-      </p:sp>
-      <p:sp>
-        <p:nvSpPr>
-          <p:cNvPr id="7" name="TextBox 6"/>
-          <p:cNvSpPr txBox="1"/>
-          <p:nvPr/>
-        </p:nvSpPr>
-        <p:spPr>
-          <a:xfrm>
-            <a:off x="822960" y="4206240"/>
-            <a:ext cx="9144000" cy="1463040"/>
-          </a:xfrm>
-          <a:prstGeom prst="rect">
-            <a:avLst/>
-          </a:prstGeom>
-          <a:noFill/>
-        </p:spPr>
-        <p:txBody>
-          <a:bodyPr wrap="square" anchor="t" lIns="0" rIns="0" tIns="0" bIns="0">
-            <a:spAutoFit/>
-          </a:bodyPr>
-          <a:lstStyle/>
+                <a:spcPts val="600"/>
+              </a:spcBef>
+              <a:spcAft>
+                <a:spcPts val="0"/>
+              </a:spcAft>
+            </a:pPr>
+            <a:r>
+              <a:rPr sz="1500" b="1" i="0">
+                <a:solidFill>
+                  <a:srgbClr val="F6F5FB"/>
+                </a:solidFill>
+                <a:latin typeface="Calibri"/>
+              </a:rPr>
+              <a:t>Emmanuel Norambuena  ·  eanorambuena@uc.cl</a:t>
+            </a:r>
+          </a:p>
           <a:p>
             <a:pPr algn="l">
               <a:spcBef>
-                <a:spcPts val="0"/>
+                <a:spcPts val="600"/>
               </a:spcBef>
               <a:spcAft>
                 <a:spcPts val="0"/>
@@ -4182,54 +4546,16 @@
             <a:r>
               <a:rPr sz="1500" b="1" i="0">
                 <a:solidFill>
-                  <a:srgbClr val="F4F6FB"/>
-                </a:solidFill>
-                <a:latin typeface="Calibri"/>
-              </a:rPr>
-              <a:t>Estefanía Pakarati</a:t>
+                  <a:srgbClr val="F6F5FB"/>
+                </a:solidFill>
+                <a:latin typeface="Calibri"/>
+              </a:rPr>
+              <a:t>Matías Harrison</a:t>
             </a:r>
           </a:p>
           <a:p>
             <a:pPr algn="l">
               <a:spcBef>
-                <a:spcPts val="600"/>
-              </a:spcBef>
-              <a:spcAft>
-                <a:spcPts val="0"/>
-              </a:spcAft>
-            </a:pPr>
-            <a:r>
-              <a:rPr sz="1500" b="1" i="0">
-                <a:solidFill>
-                  <a:srgbClr val="F4F6FB"/>
-                </a:solidFill>
-                <a:latin typeface="Calibri"/>
-              </a:rPr>
-              <a:t>Emmanuel Norambuena  ·  eanorambuena@uc.cl</a:t>
-            </a:r>
-          </a:p>
-          <a:p>
-            <a:pPr algn="l">
-              <a:spcBef>
-                <a:spcPts val="600"/>
-              </a:spcBef>
-              <a:spcAft>
-                <a:spcPts val="0"/>
-              </a:spcAft>
-            </a:pPr>
-            <a:r>
-              <a:rPr sz="1500" b="1" i="0">
-                <a:solidFill>
-                  <a:srgbClr val="F4F6FB"/>
-                </a:solidFill>
-                <a:latin typeface="Calibri"/>
-              </a:rPr>
-              <a:t>Matías Harrison</a:t>
-            </a:r>
-          </a:p>
-          <a:p>
-            <a:pPr algn="l">
-              <a:spcBef>
                 <a:spcPts val="1800"/>
               </a:spcBef>
               <a:spcAft>
@@ -4239,7 +4565,7 @@
             <a:r>
               <a:rPr sz="1300" b="0" i="0">
                 <a:solidFill>
-                  <a:srgbClr val="A9B4C9"/>
+                  <a:srgbClr val="ACA8C4"/>
                 </a:solidFill>
                 <a:latin typeface="Calibri"/>
               </a:rPr>
@@ -4262,7 +4588,7 @@
     <p:bg>
       <p:bgPr>
         <a:solidFill>
-          <a:srgbClr val="0B1220"/>
+          <a:srgbClr val="080812"/>
         </a:solidFill>
         <a:effectLst/>
       </p:bgPr>
@@ -4276,7 +4602,139 @@
       <p:grpSpPr/>
       <p:sp>
         <p:nvSpPr>
-          <p:cNvPr id="2" name="Rectangle 1"/>
+          <p:cNvPr id="2" name="Oval 1"/>
+          <p:cNvSpPr/>
+          <p:nvPr/>
+        </p:nvSpPr>
+        <p:spPr>
+          <a:xfrm>
+            <a:off x="9539935" y="-2651760"/>
+            <a:ext cx="4206240" cy="4206240"/>
+          </a:xfrm>
+          <a:prstGeom prst="ellipse">
+            <a:avLst/>
+          </a:prstGeom>
+          <a:gradFill flip="none" rotWithShape="1">
+            <a:gsLst>
+              <a:gs pos="0">
+                <a:srgbClr val="3B9EF6">
+                  <a:alpha val="22000"/>
+                </a:srgbClr>
+              </a:gs>
+              <a:gs pos="55000">
+                <a:srgbClr val="3B9EF6">
+                  <a:alpha val="9000"/>
+                </a:srgbClr>
+              </a:gs>
+              <a:gs pos="100000">
+                <a:srgbClr val="3B9EF6">
+                  <a:alpha val="0"/>
+                </a:srgbClr>
+              </a:gs>
+            </a:gsLst>
+            <a:path path="circle">
+              <a:fillToRect l="50000" t="50000" r="50000" b="50000"/>
+            </a:path>
+          </a:gradFill>
+          <a:ln>
+            <a:noFill/>
+          </a:ln>
+          <a:effectLst/>
+          <a:effectLst>
+            <a:softEdge rad="1005840"/>
+          </a:effectLst>
+        </p:spPr>
+        <p:style>
+          <a:lnRef idx="1">
+            <a:schemeClr val="accent1"/>
+          </a:lnRef>
+          <a:fillRef idx="3">
+            <a:schemeClr val="accent1"/>
+          </a:fillRef>
+          <a:effectRef idx="2">
+            <a:schemeClr val="accent1"/>
+          </a:effectRef>
+          <a:fontRef idx="minor">
+            <a:schemeClr val="lt1"/>
+          </a:fontRef>
+        </p:style>
+        <p:txBody>
+          <a:bodyPr rtlCol="0" anchor="ctr"/>
+          <a:lstStyle/>
+          <a:p>
+            <a:pPr algn="ctr"/>
+          </a:p>
+        </p:txBody>
+      </p:sp>
+      <p:sp>
+        <p:nvSpPr>
+          <p:cNvPr id="3" name="Oval 2"/>
+          <p:cNvSpPr/>
+          <p:nvPr/>
+        </p:nvSpPr>
+        <p:spPr>
+          <a:xfrm>
+            <a:off x="10637215" y="5486400"/>
+            <a:ext cx="3840480" cy="3840480"/>
+          </a:xfrm>
+          <a:prstGeom prst="ellipse">
+            <a:avLst/>
+          </a:prstGeom>
+          <a:gradFill flip="none" rotWithShape="1">
+            <a:gsLst>
+              <a:gs pos="0">
+                <a:srgbClr val="8B5CF6">
+                  <a:alpha val="18000"/>
+                </a:srgbClr>
+              </a:gs>
+              <a:gs pos="55000">
+                <a:srgbClr val="8B5CF6">
+                  <a:alpha val="7000"/>
+                </a:srgbClr>
+              </a:gs>
+              <a:gs pos="100000">
+                <a:srgbClr val="8B5CF6">
+                  <a:alpha val="0"/>
+                </a:srgbClr>
+              </a:gs>
+            </a:gsLst>
+            <a:path path="circle">
+              <a:fillToRect l="50000" t="50000" r="50000" b="50000"/>
+            </a:path>
+          </a:gradFill>
+          <a:ln>
+            <a:noFill/>
+          </a:ln>
+          <a:effectLst/>
+          <a:effectLst>
+            <a:softEdge rad="1005840"/>
+          </a:effectLst>
+        </p:spPr>
+        <p:style>
+          <a:lnRef idx="1">
+            <a:schemeClr val="accent1"/>
+          </a:lnRef>
+          <a:fillRef idx="3">
+            <a:schemeClr val="accent1"/>
+          </a:fillRef>
+          <a:effectRef idx="2">
+            <a:schemeClr val="accent1"/>
+          </a:effectRef>
+          <a:fontRef idx="minor">
+            <a:schemeClr val="lt1"/>
+          </a:fontRef>
+        </p:style>
+        <p:txBody>
+          <a:bodyPr rtlCol="0" anchor="ctr"/>
+          <a:lstStyle/>
+          <a:p>
+            <a:pPr algn="ctr"/>
+          </a:p>
+        </p:txBody>
+      </p:sp>
+      <p:sp>
+        <p:nvSpPr>
+          <p:cNvPr id="4" name="Rectangle 3"/>
           <p:cNvSpPr/>
           <p:nvPr/>
         </p:nvSpPr>
@@ -4289,7 +4747,7 @@
             <a:avLst/>
           </a:prstGeom>
           <a:solidFill>
-            <a:srgbClr val="FF7A33"/>
+            <a:srgbClr val="8B5CF6"/>
           </a:solidFill>
           <a:ln>
             <a:noFill/>
@@ -4320,7 +4778,7 @@
       </p:sp>
       <p:sp>
         <p:nvSpPr>
-          <p:cNvPr id="3" name="TextBox 2"/>
+          <p:cNvPr id="5" name="TextBox 4"/>
           <p:cNvSpPr txBox="1"/>
           <p:nvPr/>
         </p:nvSpPr>
@@ -4351,7 +4809,7 @@
             <a:r>
               <a:rPr sz="1300" b="1" i="0" spc="220">
                 <a:solidFill>
-                  <a:srgbClr val="35D0C7"/>
+                  <a:srgbClr val="3B9EF6"/>
                 </a:solidFill>
                 <a:latin typeface="Calibri"/>
               </a:rPr>
@@ -4362,7 +4820,7 @@
       </p:sp>
       <p:sp>
         <p:nvSpPr>
-          <p:cNvPr id="4" name="TextBox 3"/>
+          <p:cNvPr id="6" name="TextBox 5"/>
           <p:cNvSpPr txBox="1"/>
           <p:nvPr/>
         </p:nvSpPr>
@@ -4396,7 +4854,7 @@
             <a:r>
               <a:rPr sz="3400" b="1" i="0">
                 <a:solidFill>
-                  <a:srgbClr val="F4F6FB"/>
+                  <a:srgbClr val="F6F5FB"/>
                 </a:solidFill>
                 <a:latin typeface="Calibri"/>
               </a:rPr>
@@ -4408,7 +4866,7 @@
       </p:sp>
       <p:sp>
         <p:nvSpPr>
-          <p:cNvPr id="5" name="TextBox 4"/>
+          <p:cNvPr id="7" name="TextBox 6"/>
           <p:cNvSpPr txBox="1"/>
           <p:nvPr/>
         </p:nvSpPr>
@@ -4439,7 +4897,7 @@
             <a:r>
               <a:rPr sz="1100" b="0" i="0" spc="100">
                 <a:solidFill>
-                  <a:srgbClr val="A9B4C9"/>
+                  <a:srgbClr val="ACA8C4"/>
                 </a:solidFill>
                 <a:latin typeface="Calibri"/>
               </a:rPr>
@@ -4450,7 +4908,7 @@
       </p:sp>
       <p:sp>
         <p:nvSpPr>
-          <p:cNvPr id="6" name="TextBox 5"/>
+          <p:cNvPr id="8" name="TextBox 7"/>
           <p:cNvSpPr txBox="1"/>
           <p:nvPr/>
         </p:nvSpPr>
@@ -4481,7 +4939,7 @@
             <a:r>
               <a:rPr sz="1100" b="0" i="0" spc="100">
                 <a:solidFill>
-                  <a:srgbClr val="A9B4C9"/>
+                  <a:srgbClr val="ACA8C4"/>
                 </a:solidFill>
                 <a:latin typeface="Calibri"/>
               </a:rPr>
@@ -4492,7 +4950,7 @@
       </p:sp>
       <p:sp>
         <p:nvSpPr>
-          <p:cNvPr id="7" name="Rounded Rectangle 6"/>
+          <p:cNvPr id="9" name="Rounded Rectangle 8"/>
           <p:cNvSpPr/>
           <p:nvPr/>
         </p:nvSpPr>
@@ -4507,11 +4965,11 @@
             </a:avLst>
           </a:prstGeom>
           <a:solidFill>
-            <a:srgbClr val="111B2E"/>
+            <a:srgbClr val="131222"/>
           </a:solidFill>
           <a:ln w="12700">
             <a:solidFill>
-              <a:srgbClr val="27334A"/>
+              <a:srgbClr val="2A273E"/>
             </a:solidFill>
           </a:ln>
           <a:effectLst/>
@@ -4540,7 +4998,7 @@
       </p:sp>
       <p:sp>
         <p:nvSpPr>
-          <p:cNvPr id="8" name="Rectangle 7"/>
+          <p:cNvPr id="10" name="Rectangle 9"/>
           <p:cNvSpPr/>
           <p:nvPr/>
         </p:nvSpPr>
@@ -4553,7 +5011,7 @@
             <a:avLst/>
           </a:prstGeom>
           <a:solidFill>
-            <a:srgbClr val="35D0C7"/>
+            <a:srgbClr val="3B9EF6"/>
           </a:solidFill>
           <a:ln>
             <a:noFill/>
@@ -4584,7 +5042,7 @@
       </p:sp>
       <p:sp>
         <p:nvSpPr>
-          <p:cNvPr id="9" name="TextBox 8"/>
+          <p:cNvPr id="11" name="TextBox 10"/>
           <p:cNvSpPr txBox="1"/>
           <p:nvPr/>
         </p:nvSpPr>
@@ -4618,7 +5076,7 @@
             <a:r>
               <a:rPr sz="1900" b="1" i="0">
                 <a:solidFill>
-                  <a:srgbClr val="F4F6FB"/>
+                  <a:srgbClr val="F6F5FB"/>
                 </a:solidFill>
                 <a:latin typeface="Calibri"/>
               </a:rPr>
@@ -4629,7 +5087,7 @@
       </p:sp>
       <p:sp>
         <p:nvSpPr>
-          <p:cNvPr id="10" name="TextBox 9"/>
+          <p:cNvPr id="12" name="TextBox 11"/>
           <p:cNvSpPr txBox="1"/>
           <p:nvPr/>
         </p:nvSpPr>
@@ -4663,7 +5121,7 @@
             <a:r>
               <a:rPr sz="1450" b="0" i="0">
                 <a:solidFill>
-                  <a:srgbClr val="A9B4C9"/>
+                  <a:srgbClr val="ACA8C4"/>
                 </a:solidFill>
                 <a:latin typeface="Calibri"/>
               </a:rPr>
@@ -4674,7 +5132,7 @@
       </p:sp>
       <p:sp>
         <p:nvSpPr>
-          <p:cNvPr id="11" name="Rounded Rectangle 10"/>
+          <p:cNvPr id="13" name="Rounded Rectangle 12"/>
           <p:cNvSpPr/>
           <p:nvPr/>
         </p:nvSpPr>
@@ -4689,11 +5147,11 @@
             </a:avLst>
           </a:prstGeom>
           <a:solidFill>
-            <a:srgbClr val="111B2E"/>
+            <a:srgbClr val="131222"/>
           </a:solidFill>
           <a:ln w="12700">
             <a:solidFill>
-              <a:srgbClr val="27334A"/>
+              <a:srgbClr val="2A273E"/>
             </a:solidFill>
           </a:ln>
           <a:effectLst/>
@@ -4722,7 +5180,7 @@
       </p:sp>
       <p:sp>
         <p:nvSpPr>
-          <p:cNvPr id="12" name="Rectangle 11"/>
+          <p:cNvPr id="14" name="Rectangle 13"/>
           <p:cNvSpPr/>
           <p:nvPr/>
         </p:nvSpPr>
@@ -4735,7 +5193,7 @@
             <a:avLst/>
           </a:prstGeom>
           <a:solidFill>
-            <a:srgbClr val="FF7A33"/>
+            <a:srgbClr val="8B5CF6"/>
           </a:solidFill>
           <a:ln>
             <a:noFill/>
@@ -4766,7 +5224,7 @@
       </p:sp>
       <p:sp>
         <p:nvSpPr>
-          <p:cNvPr id="13" name="TextBox 12"/>
+          <p:cNvPr id="15" name="TextBox 14"/>
           <p:cNvSpPr txBox="1"/>
           <p:nvPr/>
         </p:nvSpPr>
@@ -4800,7 +5258,7 @@
             <a:r>
               <a:rPr sz="1900" b="1" i="0">
                 <a:solidFill>
-                  <a:srgbClr val="F4F6FB"/>
+                  <a:srgbClr val="F6F5FB"/>
                 </a:solidFill>
                 <a:latin typeface="Calibri"/>
               </a:rPr>
@@ -4811,7 +5269,7 @@
       </p:sp>
       <p:sp>
         <p:nvSpPr>
-          <p:cNvPr id="14" name="TextBox 13"/>
+          <p:cNvPr id="16" name="TextBox 15"/>
           <p:cNvSpPr txBox="1"/>
           <p:nvPr/>
         </p:nvSpPr>
@@ -4845,7 +5303,7 @@
             <a:r>
               <a:rPr sz="1450" b="0" i="0">
                 <a:solidFill>
-                  <a:srgbClr val="A9B4C9"/>
+                  <a:srgbClr val="ACA8C4"/>
                 </a:solidFill>
                 <a:latin typeface="Calibri"/>
               </a:rPr>
@@ -4856,7 +5314,7 @@
       </p:sp>
       <p:sp>
         <p:nvSpPr>
-          <p:cNvPr id="15" name="Rounded Rectangle 14"/>
+          <p:cNvPr id="17" name="Rounded Rectangle 16"/>
           <p:cNvSpPr/>
           <p:nvPr/>
         </p:nvSpPr>
@@ -4871,11 +5329,11 @@
             </a:avLst>
           </a:prstGeom>
           <a:solidFill>
-            <a:srgbClr val="111B2E"/>
+            <a:srgbClr val="131222"/>
           </a:solidFill>
           <a:ln w="12700">
             <a:solidFill>
-              <a:srgbClr val="27334A"/>
+              <a:srgbClr val="2A273E"/>
             </a:solidFill>
           </a:ln>
           <a:effectLst/>
@@ -4904,7 +5362,7 @@
       </p:sp>
       <p:sp>
         <p:nvSpPr>
-          <p:cNvPr id="16" name="Rectangle 15"/>
+          <p:cNvPr id="18" name="Rectangle 17"/>
           <p:cNvSpPr/>
           <p:nvPr/>
         </p:nvSpPr>
@@ -4917,7 +5375,7 @@
             <a:avLst/>
           </a:prstGeom>
           <a:solidFill>
-            <a:srgbClr val="35D0C7"/>
+            <a:srgbClr val="3B9EF6"/>
           </a:solidFill>
           <a:ln>
             <a:noFill/>
@@ -4948,7 +5406,7 @@
       </p:sp>
       <p:sp>
         <p:nvSpPr>
-          <p:cNvPr id="17" name="TextBox 16"/>
+          <p:cNvPr id="19" name="TextBox 18"/>
           <p:cNvSpPr txBox="1"/>
           <p:nvPr/>
         </p:nvSpPr>
@@ -4982,7 +5440,7 @@
             <a:r>
               <a:rPr sz="1900" b="1" i="0">
                 <a:solidFill>
-                  <a:srgbClr val="F4F6FB"/>
+                  <a:srgbClr val="F6F5FB"/>
                 </a:solidFill>
                 <a:latin typeface="Calibri"/>
               </a:rPr>
@@ -4993,7 +5451,7 @@
       </p:sp>
       <p:sp>
         <p:nvSpPr>
-          <p:cNvPr id="18" name="TextBox 17"/>
+          <p:cNvPr id="20" name="TextBox 19"/>
           <p:cNvSpPr txBox="1"/>
           <p:nvPr/>
         </p:nvSpPr>
@@ -5027,7 +5485,7 @@
             <a:r>
               <a:rPr sz="1450" b="0" i="0">
                 <a:solidFill>
-                  <a:srgbClr val="A9B4C9"/>
+                  <a:srgbClr val="ACA8C4"/>
                 </a:solidFill>
                 <a:latin typeface="Calibri"/>
               </a:rPr>
@@ -5050,7 +5508,7 @@
     <p:bg>
       <p:bgPr>
         <a:solidFill>
-          <a:srgbClr val="0B1220"/>
+          <a:srgbClr val="080812"/>
         </a:solidFill>
         <a:effectLst/>
       </p:bgPr>
@@ -5064,7 +5522,139 @@
       <p:grpSpPr/>
       <p:sp>
         <p:nvSpPr>
-          <p:cNvPr id="2" name="Rectangle 1"/>
+          <p:cNvPr id="2" name="Oval 1"/>
+          <p:cNvSpPr/>
+          <p:nvPr/>
+        </p:nvSpPr>
+        <p:spPr>
+          <a:xfrm>
+            <a:off x="9539935" y="-2651760"/>
+            <a:ext cx="4206240" cy="4206240"/>
+          </a:xfrm>
+          <a:prstGeom prst="ellipse">
+            <a:avLst/>
+          </a:prstGeom>
+          <a:gradFill flip="none" rotWithShape="1">
+            <a:gsLst>
+              <a:gs pos="0">
+                <a:srgbClr val="3B9EF6">
+                  <a:alpha val="22000"/>
+                </a:srgbClr>
+              </a:gs>
+              <a:gs pos="55000">
+                <a:srgbClr val="3B9EF6">
+                  <a:alpha val="9000"/>
+                </a:srgbClr>
+              </a:gs>
+              <a:gs pos="100000">
+                <a:srgbClr val="3B9EF6">
+                  <a:alpha val="0"/>
+                </a:srgbClr>
+              </a:gs>
+            </a:gsLst>
+            <a:path path="circle">
+              <a:fillToRect l="50000" t="50000" r="50000" b="50000"/>
+            </a:path>
+          </a:gradFill>
+          <a:ln>
+            <a:noFill/>
+          </a:ln>
+          <a:effectLst/>
+          <a:effectLst>
+            <a:softEdge rad="1005840"/>
+          </a:effectLst>
+        </p:spPr>
+        <p:style>
+          <a:lnRef idx="1">
+            <a:schemeClr val="accent1"/>
+          </a:lnRef>
+          <a:fillRef idx="3">
+            <a:schemeClr val="accent1"/>
+          </a:fillRef>
+          <a:effectRef idx="2">
+            <a:schemeClr val="accent1"/>
+          </a:effectRef>
+          <a:fontRef idx="minor">
+            <a:schemeClr val="lt1"/>
+          </a:fontRef>
+        </p:style>
+        <p:txBody>
+          <a:bodyPr rtlCol="0" anchor="ctr"/>
+          <a:lstStyle/>
+          <a:p>
+            <a:pPr algn="ctr"/>
+          </a:p>
+        </p:txBody>
+      </p:sp>
+      <p:sp>
+        <p:nvSpPr>
+          <p:cNvPr id="3" name="Oval 2"/>
+          <p:cNvSpPr/>
+          <p:nvPr/>
+        </p:nvSpPr>
+        <p:spPr>
+          <a:xfrm>
+            <a:off x="10637215" y="5486400"/>
+            <a:ext cx="3840480" cy="3840480"/>
+          </a:xfrm>
+          <a:prstGeom prst="ellipse">
+            <a:avLst/>
+          </a:prstGeom>
+          <a:gradFill flip="none" rotWithShape="1">
+            <a:gsLst>
+              <a:gs pos="0">
+                <a:srgbClr val="8B5CF6">
+                  <a:alpha val="18000"/>
+                </a:srgbClr>
+              </a:gs>
+              <a:gs pos="55000">
+                <a:srgbClr val="8B5CF6">
+                  <a:alpha val="7000"/>
+                </a:srgbClr>
+              </a:gs>
+              <a:gs pos="100000">
+                <a:srgbClr val="8B5CF6">
+                  <a:alpha val="0"/>
+                </a:srgbClr>
+              </a:gs>
+            </a:gsLst>
+            <a:path path="circle">
+              <a:fillToRect l="50000" t="50000" r="50000" b="50000"/>
+            </a:path>
+          </a:gradFill>
+          <a:ln>
+            <a:noFill/>
+          </a:ln>
+          <a:effectLst/>
+          <a:effectLst>
+            <a:softEdge rad="1005840"/>
+          </a:effectLst>
+        </p:spPr>
+        <p:style>
+          <a:lnRef idx="1">
+            <a:schemeClr val="accent1"/>
+          </a:lnRef>
+          <a:fillRef idx="3">
+            <a:schemeClr val="accent1"/>
+          </a:fillRef>
+          <a:effectRef idx="2">
+            <a:schemeClr val="accent1"/>
+          </a:effectRef>
+          <a:fontRef idx="minor">
+            <a:schemeClr val="lt1"/>
+          </a:fontRef>
+        </p:style>
+        <p:txBody>
+          <a:bodyPr rtlCol="0" anchor="ctr"/>
+          <a:lstStyle/>
+          <a:p>
+            <a:pPr algn="ctr"/>
+          </a:p>
+        </p:txBody>
+      </p:sp>
+      <p:sp>
+        <p:nvSpPr>
+          <p:cNvPr id="4" name="Rectangle 3"/>
           <p:cNvSpPr/>
           <p:nvPr/>
         </p:nvSpPr>
@@ -5077,7 +5667,7 @@
             <a:avLst/>
           </a:prstGeom>
           <a:solidFill>
-            <a:srgbClr val="FF7A33"/>
+            <a:srgbClr val="8B5CF6"/>
           </a:solidFill>
           <a:ln>
             <a:noFill/>
@@ -5108,7 +5698,7 @@
       </p:sp>
       <p:sp>
         <p:nvSpPr>
-          <p:cNvPr id="3" name="TextBox 2"/>
+          <p:cNvPr id="5" name="TextBox 4"/>
           <p:cNvSpPr txBox="1"/>
           <p:nvPr/>
         </p:nvSpPr>
@@ -5139,7 +5729,7 @@
             <a:r>
               <a:rPr sz="1300" b="1" i="0" spc="220">
                 <a:solidFill>
-                  <a:srgbClr val="35D0C7"/>
+                  <a:srgbClr val="3B9EF6"/>
                 </a:solidFill>
                 <a:latin typeface="Calibri"/>
               </a:rPr>
@@ -5150,7 +5740,7 @@
       </p:sp>
       <p:sp>
         <p:nvSpPr>
-          <p:cNvPr id="4" name="TextBox 3"/>
+          <p:cNvPr id="6" name="TextBox 5"/>
           <p:cNvSpPr txBox="1"/>
           <p:nvPr/>
         </p:nvSpPr>
@@ -5184,7 +5774,7 @@
             <a:r>
               <a:rPr sz="3400" b="1" i="0">
                 <a:solidFill>
-                  <a:srgbClr val="F4F6FB"/>
+                  <a:srgbClr val="F6F5FB"/>
                 </a:solidFill>
                 <a:latin typeface="Calibri"/>
               </a:rPr>
@@ -5195,7 +5785,7 @@
       </p:sp>
       <p:sp>
         <p:nvSpPr>
-          <p:cNvPr id="5" name="TextBox 4"/>
+          <p:cNvPr id="7" name="TextBox 6"/>
           <p:cNvSpPr txBox="1"/>
           <p:nvPr/>
         </p:nvSpPr>
@@ -5226,7 +5816,7 @@
             <a:r>
               <a:rPr sz="1100" b="0" i="0" spc="100">
                 <a:solidFill>
-                  <a:srgbClr val="A9B4C9"/>
+                  <a:srgbClr val="ACA8C4"/>
                 </a:solidFill>
                 <a:latin typeface="Calibri"/>
               </a:rPr>
@@ -5237,7 +5827,7 @@
       </p:sp>
       <p:sp>
         <p:nvSpPr>
-          <p:cNvPr id="6" name="TextBox 5"/>
+          <p:cNvPr id="8" name="TextBox 7"/>
           <p:cNvSpPr txBox="1"/>
           <p:nvPr/>
         </p:nvSpPr>
@@ -5268,7 +5858,7 @@
             <a:r>
               <a:rPr sz="1100" b="0" i="0" spc="100">
                 <a:solidFill>
-                  <a:srgbClr val="A9B4C9"/>
+                  <a:srgbClr val="ACA8C4"/>
                 </a:solidFill>
                 <a:latin typeface="Calibri"/>
               </a:rPr>
@@ -5279,7 +5869,7 @@
       </p:sp>
       <p:sp>
         <p:nvSpPr>
-          <p:cNvPr id="7" name="Rounded Rectangle 6"/>
+          <p:cNvPr id="9" name="Rounded Rectangle 8"/>
           <p:cNvSpPr/>
           <p:nvPr/>
         </p:nvSpPr>
@@ -5294,11 +5884,11 @@
             </a:avLst>
           </a:prstGeom>
           <a:solidFill>
-            <a:srgbClr val="111B2E"/>
+            <a:srgbClr val="131222"/>
           </a:solidFill>
           <a:ln w="12700">
             <a:solidFill>
-              <a:srgbClr val="27334A"/>
+              <a:srgbClr val="2A273E"/>
             </a:solidFill>
           </a:ln>
           <a:effectLst/>
@@ -5327,7 +5917,7 @@
       </p:sp>
       <p:sp>
         <p:nvSpPr>
-          <p:cNvPr id="8" name="Rounded Rectangle 7"/>
+          <p:cNvPr id="10" name="Rounded Rectangle 9"/>
           <p:cNvSpPr/>
           <p:nvPr/>
         </p:nvSpPr>
@@ -5346,7 +5936,7 @@
           </a:solidFill>
           <a:ln w="12700">
             <a:solidFill>
-              <a:srgbClr val="35D0C7"/>
+              <a:srgbClr val="3B9EF6"/>
             </a:solidFill>
           </a:ln>
           <a:effectLst/>
@@ -5375,7 +5965,7 @@
       </p:sp>
       <p:sp>
         <p:nvSpPr>
-          <p:cNvPr id="9" name="TextBox 8"/>
+          <p:cNvPr id="11" name="TextBox 10"/>
           <p:cNvSpPr txBox="1"/>
           <p:nvPr/>
         </p:nvSpPr>
@@ -5406,7 +5996,7 @@
             <a:r>
               <a:rPr sz="1500" b="1" i="0" spc="150">
                 <a:solidFill>
-                  <a:srgbClr val="A9B4C9"/>
+                  <a:srgbClr val="ACA8C4"/>
                 </a:solidFill>
                 <a:latin typeface="Calibri"/>
               </a:rPr>
@@ -5417,7 +6007,7 @@
       </p:sp>
       <p:sp>
         <p:nvSpPr>
-          <p:cNvPr id="10" name="TextBox 9"/>
+          <p:cNvPr id="12" name="TextBox 11"/>
           <p:cNvSpPr txBox="1"/>
           <p:nvPr/>
         </p:nvSpPr>
@@ -5448,7 +6038,7 @@
                 <a:spcPts val="1400"/>
               </a:spcAft>
               <a:buClr>
-                <a:srgbClr val="A9B4C9"/>
+                <a:srgbClr val="ACA8C4"/>
               </a:buClr>
               <a:buFont typeface="Calibri"/>
               <a:buChar char="—"/>
@@ -5456,7 +6046,7 @@
             <a:r>
               <a:rPr sz="1600" b="0" i="0">
                 <a:solidFill>
-                  <a:srgbClr val="F4F6FB"/>
+                  <a:srgbClr val="F6F5FB"/>
                 </a:solidFill>
                 <a:latin typeface="Calibri"/>
               </a:rPr>
@@ -5475,7 +6065,7 @@
                 <a:spcPts val="1400"/>
               </a:spcAft>
               <a:buClr>
-                <a:srgbClr val="A9B4C9"/>
+                <a:srgbClr val="ACA8C4"/>
               </a:buClr>
               <a:buFont typeface="Calibri"/>
               <a:buChar char="—"/>
@@ -5483,7 +6073,7 @@
             <a:r>
               <a:rPr sz="1600" b="0" i="0">
                 <a:solidFill>
-                  <a:srgbClr val="F4F6FB"/>
+                  <a:srgbClr val="F6F5FB"/>
                 </a:solidFill>
                 <a:latin typeface="Calibri"/>
               </a:rPr>
@@ -5502,7 +6092,7 @@
                 <a:spcPts val="1400"/>
               </a:spcAft>
               <a:buClr>
-                <a:srgbClr val="A9B4C9"/>
+                <a:srgbClr val="ACA8C4"/>
               </a:buClr>
               <a:buFont typeface="Calibri"/>
               <a:buChar char="—"/>
@@ -5510,7 +6100,7 @@
             <a:r>
               <a:rPr sz="1600" b="0" i="0">
                 <a:solidFill>
-                  <a:srgbClr val="F4F6FB"/>
+                  <a:srgbClr val="F6F5FB"/>
                 </a:solidFill>
                 <a:latin typeface="Calibri"/>
               </a:rPr>
@@ -5529,7 +6119,7 @@
                 <a:spcPts val="1400"/>
               </a:spcAft>
               <a:buClr>
-                <a:srgbClr val="A9B4C9"/>
+                <a:srgbClr val="ACA8C4"/>
               </a:buClr>
               <a:buFont typeface="Calibri"/>
               <a:buChar char="—"/>
@@ -5537,7 +6127,7 @@
             <a:r>
               <a:rPr sz="1600" b="0" i="0">
                 <a:solidFill>
-                  <a:srgbClr val="F4F6FB"/>
+                  <a:srgbClr val="F6F5FB"/>
                 </a:solidFill>
                 <a:latin typeface="Calibri"/>
               </a:rPr>
@@ -5548,7 +6138,7 @@
       </p:sp>
       <p:sp>
         <p:nvSpPr>
-          <p:cNvPr id="11" name="TextBox 10"/>
+          <p:cNvPr id="13" name="TextBox 12"/>
           <p:cNvSpPr txBox="1"/>
           <p:nvPr/>
         </p:nvSpPr>
@@ -5579,7 +6169,7 @@
             <a:r>
               <a:rPr sz="1500" b="1" i="0" spc="150">
                 <a:solidFill>
-                  <a:srgbClr val="35D0C7"/>
+                  <a:srgbClr val="3B9EF6"/>
                 </a:solidFill>
                 <a:latin typeface="Calibri"/>
               </a:rPr>
@@ -5590,7 +6180,7 @@
       </p:sp>
       <p:sp>
         <p:nvSpPr>
-          <p:cNvPr id="12" name="TextBox 11"/>
+          <p:cNvPr id="14" name="TextBox 13"/>
           <p:cNvSpPr txBox="1"/>
           <p:nvPr/>
         </p:nvSpPr>
@@ -5621,7 +6211,7 @@
                 <a:spcPts val="1400"/>
               </a:spcAft>
               <a:buClr>
-                <a:srgbClr val="FF7A33"/>
+                <a:srgbClr val="8B5CF6"/>
               </a:buClr>
               <a:buFont typeface="Calibri"/>
               <a:buChar char="—"/>
@@ -5629,7 +6219,7 @@
             <a:r>
               <a:rPr sz="1600" b="0" i="0">
                 <a:solidFill>
-                  <a:srgbClr val="F4F6FB"/>
+                  <a:srgbClr val="F6F5FB"/>
                 </a:solidFill>
                 <a:latin typeface="Calibri"/>
               </a:rPr>
@@ -5648,7 +6238,7 @@
                 <a:spcPts val="1400"/>
               </a:spcAft>
               <a:buClr>
-                <a:srgbClr val="FF7A33"/>
+                <a:srgbClr val="8B5CF6"/>
               </a:buClr>
               <a:buFont typeface="Calibri"/>
               <a:buChar char="—"/>
@@ -5656,7 +6246,7 @@
             <a:r>
               <a:rPr sz="1600" b="0" i="0">
                 <a:solidFill>
-                  <a:srgbClr val="F4F6FB"/>
+                  <a:srgbClr val="F6F5FB"/>
                 </a:solidFill>
                 <a:latin typeface="Calibri"/>
               </a:rPr>
@@ -5675,7 +6265,7 @@
                 <a:spcPts val="1400"/>
               </a:spcAft>
               <a:buClr>
-                <a:srgbClr val="FF7A33"/>
+                <a:srgbClr val="8B5CF6"/>
               </a:buClr>
               <a:buFont typeface="Calibri"/>
               <a:buChar char="—"/>
@@ -5683,7 +6273,7 @@
             <a:r>
               <a:rPr sz="1600" b="0" i="0">
                 <a:solidFill>
-                  <a:srgbClr val="F4F6FB"/>
+                  <a:srgbClr val="F6F5FB"/>
                 </a:solidFill>
                 <a:latin typeface="Calibri"/>
               </a:rPr>
@@ -5702,7 +6292,7 @@
                 <a:spcPts val="1400"/>
               </a:spcAft>
               <a:buClr>
-                <a:srgbClr val="FF7A33"/>
+                <a:srgbClr val="8B5CF6"/>
               </a:buClr>
               <a:buFont typeface="Calibri"/>
               <a:buChar char="—"/>
@@ -5710,7 +6300,7 @@
             <a:r>
               <a:rPr sz="1600" b="0" i="0">
                 <a:solidFill>
-                  <a:srgbClr val="F4F6FB"/>
+                  <a:srgbClr val="F6F5FB"/>
                 </a:solidFill>
                 <a:latin typeface="Calibri"/>
               </a:rPr>
@@ -5733,7 +6323,7 @@
     <p:bg>
       <p:bgPr>
         <a:solidFill>
-          <a:srgbClr val="0B1220"/>
+          <a:srgbClr val="080812"/>
         </a:solidFill>
         <a:effectLst/>
       </p:bgPr>
@@ -5747,7 +6337,139 @@
       <p:grpSpPr/>
       <p:sp>
         <p:nvSpPr>
-          <p:cNvPr id="2" name="Rectangle 1"/>
+          <p:cNvPr id="2" name="Oval 1"/>
+          <p:cNvSpPr/>
+          <p:nvPr/>
+        </p:nvSpPr>
+        <p:spPr>
+          <a:xfrm>
+            <a:off x="9539935" y="-2651760"/>
+            <a:ext cx="4206240" cy="4206240"/>
+          </a:xfrm>
+          <a:prstGeom prst="ellipse">
+            <a:avLst/>
+          </a:prstGeom>
+          <a:gradFill flip="none" rotWithShape="1">
+            <a:gsLst>
+              <a:gs pos="0">
+                <a:srgbClr val="3B9EF6">
+                  <a:alpha val="22000"/>
+                </a:srgbClr>
+              </a:gs>
+              <a:gs pos="55000">
+                <a:srgbClr val="3B9EF6">
+                  <a:alpha val="9000"/>
+                </a:srgbClr>
+              </a:gs>
+              <a:gs pos="100000">
+                <a:srgbClr val="3B9EF6">
+                  <a:alpha val="0"/>
+                </a:srgbClr>
+              </a:gs>
+            </a:gsLst>
+            <a:path path="circle">
+              <a:fillToRect l="50000" t="50000" r="50000" b="50000"/>
+            </a:path>
+          </a:gradFill>
+          <a:ln>
+            <a:noFill/>
+          </a:ln>
+          <a:effectLst/>
+          <a:effectLst>
+            <a:softEdge rad="1005840"/>
+          </a:effectLst>
+        </p:spPr>
+        <p:style>
+          <a:lnRef idx="1">
+            <a:schemeClr val="accent1"/>
+          </a:lnRef>
+          <a:fillRef idx="3">
+            <a:schemeClr val="accent1"/>
+          </a:fillRef>
+          <a:effectRef idx="2">
+            <a:schemeClr val="accent1"/>
+          </a:effectRef>
+          <a:fontRef idx="minor">
+            <a:schemeClr val="lt1"/>
+          </a:fontRef>
+        </p:style>
+        <p:txBody>
+          <a:bodyPr rtlCol="0" anchor="ctr"/>
+          <a:lstStyle/>
+          <a:p>
+            <a:pPr algn="ctr"/>
+          </a:p>
+        </p:txBody>
+      </p:sp>
+      <p:sp>
+        <p:nvSpPr>
+          <p:cNvPr id="3" name="Oval 2"/>
+          <p:cNvSpPr/>
+          <p:nvPr/>
+        </p:nvSpPr>
+        <p:spPr>
+          <a:xfrm>
+            <a:off x="10637215" y="5486400"/>
+            <a:ext cx="3840480" cy="3840480"/>
+          </a:xfrm>
+          <a:prstGeom prst="ellipse">
+            <a:avLst/>
+          </a:prstGeom>
+          <a:gradFill flip="none" rotWithShape="1">
+            <a:gsLst>
+              <a:gs pos="0">
+                <a:srgbClr val="8B5CF6">
+                  <a:alpha val="18000"/>
+                </a:srgbClr>
+              </a:gs>
+              <a:gs pos="55000">
+                <a:srgbClr val="8B5CF6">
+                  <a:alpha val="7000"/>
+                </a:srgbClr>
+              </a:gs>
+              <a:gs pos="100000">
+                <a:srgbClr val="8B5CF6">
+                  <a:alpha val="0"/>
+                </a:srgbClr>
+              </a:gs>
+            </a:gsLst>
+            <a:path path="circle">
+              <a:fillToRect l="50000" t="50000" r="50000" b="50000"/>
+            </a:path>
+          </a:gradFill>
+          <a:ln>
+            <a:noFill/>
+          </a:ln>
+          <a:effectLst/>
+          <a:effectLst>
+            <a:softEdge rad="1005840"/>
+          </a:effectLst>
+        </p:spPr>
+        <p:style>
+          <a:lnRef idx="1">
+            <a:schemeClr val="accent1"/>
+          </a:lnRef>
+          <a:fillRef idx="3">
+            <a:schemeClr val="accent1"/>
+          </a:fillRef>
+          <a:effectRef idx="2">
+            <a:schemeClr val="accent1"/>
+          </a:effectRef>
+          <a:fontRef idx="minor">
+            <a:schemeClr val="lt1"/>
+          </a:fontRef>
+        </p:style>
+        <p:txBody>
+          <a:bodyPr rtlCol="0" anchor="ctr"/>
+          <a:lstStyle/>
+          <a:p>
+            <a:pPr algn="ctr"/>
+          </a:p>
+        </p:txBody>
+      </p:sp>
+      <p:sp>
+        <p:nvSpPr>
+          <p:cNvPr id="4" name="Rectangle 3"/>
           <p:cNvSpPr/>
           <p:nvPr/>
         </p:nvSpPr>
@@ -5760,7 +6482,7 @@
             <a:avLst/>
           </a:prstGeom>
           <a:solidFill>
-            <a:srgbClr val="FF7A33"/>
+            <a:srgbClr val="8B5CF6"/>
           </a:solidFill>
           <a:ln>
             <a:noFill/>
@@ -5791,7 +6513,7 @@
       </p:sp>
       <p:sp>
         <p:nvSpPr>
-          <p:cNvPr id="3" name="TextBox 2"/>
+          <p:cNvPr id="5" name="TextBox 4"/>
           <p:cNvSpPr txBox="1"/>
           <p:nvPr/>
         </p:nvSpPr>
@@ -5822,7 +6544,7 @@
             <a:r>
               <a:rPr sz="1300" b="1" i="0" spc="220">
                 <a:solidFill>
-                  <a:srgbClr val="35D0C7"/>
+                  <a:srgbClr val="3B9EF6"/>
                 </a:solidFill>
                 <a:latin typeface="Calibri"/>
               </a:rPr>
@@ -5833,7 +6555,7 @@
       </p:sp>
       <p:sp>
         <p:nvSpPr>
-          <p:cNvPr id="4" name="TextBox 3"/>
+          <p:cNvPr id="6" name="TextBox 5"/>
           <p:cNvSpPr txBox="1"/>
           <p:nvPr/>
         </p:nvSpPr>
@@ -5867,7 +6589,7 @@
             <a:r>
               <a:rPr sz="3400" b="1" i="0">
                 <a:solidFill>
-                  <a:srgbClr val="F4F6FB"/>
+                  <a:srgbClr val="F6F5FB"/>
                 </a:solidFill>
                 <a:latin typeface="Calibri"/>
               </a:rPr>
@@ -5879,7 +6601,7 @@
       </p:sp>
       <p:sp>
         <p:nvSpPr>
-          <p:cNvPr id="5" name="TextBox 4"/>
+          <p:cNvPr id="7" name="TextBox 6"/>
           <p:cNvSpPr txBox="1"/>
           <p:nvPr/>
         </p:nvSpPr>
@@ -5910,7 +6632,7 @@
             <a:r>
               <a:rPr sz="1100" b="0" i="0" spc="100">
                 <a:solidFill>
-                  <a:srgbClr val="A9B4C9"/>
+                  <a:srgbClr val="ACA8C4"/>
                 </a:solidFill>
                 <a:latin typeface="Calibri"/>
               </a:rPr>
@@ -5921,7 +6643,7 @@
       </p:sp>
       <p:sp>
         <p:nvSpPr>
-          <p:cNvPr id="6" name="TextBox 5"/>
+          <p:cNvPr id="8" name="TextBox 7"/>
           <p:cNvSpPr txBox="1"/>
           <p:nvPr/>
         </p:nvSpPr>
@@ -5952,7 +6674,7 @@
             <a:r>
               <a:rPr sz="1100" b="0" i="0" spc="100">
                 <a:solidFill>
-                  <a:srgbClr val="A9B4C9"/>
+                  <a:srgbClr val="ACA8C4"/>
                 </a:solidFill>
                 <a:latin typeface="Calibri"/>
               </a:rPr>
@@ -5963,7 +6685,7 @@
       </p:sp>
       <p:sp>
         <p:nvSpPr>
-          <p:cNvPr id="7" name="Oval 6"/>
+          <p:cNvPr id="9" name="Oval 8"/>
           <p:cNvSpPr/>
           <p:nvPr/>
         </p:nvSpPr>
@@ -5976,11 +6698,11 @@
             <a:avLst/>
           </a:prstGeom>
           <a:solidFill>
-            <a:srgbClr val="111B2E"/>
+            <a:srgbClr val="131222"/>
           </a:solidFill>
           <a:ln w="19050">
             <a:solidFill>
-              <a:srgbClr val="35D0C7"/>
+              <a:srgbClr val="3B9EF6"/>
             </a:solidFill>
           </a:ln>
           <a:effectLst/>
@@ -6009,7 +6731,7 @@
       </p:sp>
       <p:sp>
         <p:nvSpPr>
-          <p:cNvPr id="8" name="TextBox 7"/>
+          <p:cNvPr id="10" name="TextBox 9"/>
           <p:cNvSpPr txBox="1"/>
           <p:nvPr/>
         </p:nvSpPr>
@@ -6040,7 +6762,7 @@
             <a:r>
               <a:rPr sz="1800" b="1" i="0">
                 <a:solidFill>
-                  <a:srgbClr val="35D0C7"/>
+                  <a:srgbClr val="3B9EF6"/>
                 </a:solidFill>
                 <a:latin typeface="Calibri"/>
               </a:rPr>
@@ -6051,7 +6773,7 @@
       </p:sp>
       <p:sp>
         <p:nvSpPr>
-          <p:cNvPr id="9" name="TextBox 8"/>
+          <p:cNvPr id="11" name="TextBox 10"/>
           <p:cNvSpPr txBox="1"/>
           <p:nvPr/>
         </p:nvSpPr>
@@ -6082,7 +6804,7 @@
             <a:r>
               <a:rPr sz="1900" b="1" i="0">
                 <a:solidFill>
-                  <a:srgbClr val="F4F6FB"/>
+                  <a:srgbClr val="F6F5FB"/>
                 </a:solidFill>
                 <a:latin typeface="Calibri"/>
               </a:rPr>
@@ -6093,7 +6815,7 @@
       </p:sp>
       <p:sp>
         <p:nvSpPr>
-          <p:cNvPr id="10" name="TextBox 9"/>
+          <p:cNvPr id="12" name="TextBox 11"/>
           <p:cNvSpPr txBox="1"/>
           <p:nvPr/>
         </p:nvSpPr>
@@ -6127,7 +6849,7 @@
             <a:r>
               <a:rPr sz="1450" b="0" i="0">
                 <a:solidFill>
-                  <a:srgbClr val="A9B4C9"/>
+                  <a:srgbClr val="ACA8C4"/>
                 </a:solidFill>
                 <a:latin typeface="Calibri"/>
               </a:rPr>
@@ -6138,7 +6860,7 @@
       </p:sp>
       <p:sp>
         <p:nvSpPr>
-          <p:cNvPr id="11" name="Oval 10"/>
+          <p:cNvPr id="13" name="Oval 12"/>
           <p:cNvSpPr/>
           <p:nvPr/>
         </p:nvSpPr>
@@ -6151,11 +6873,11 @@
             <a:avLst/>
           </a:prstGeom>
           <a:solidFill>
-            <a:srgbClr val="111B2E"/>
+            <a:srgbClr val="131222"/>
           </a:solidFill>
           <a:ln w="19050">
             <a:solidFill>
-              <a:srgbClr val="35D0C7"/>
+              <a:srgbClr val="3B9EF6"/>
             </a:solidFill>
           </a:ln>
           <a:effectLst/>
@@ -6184,7 +6906,7 @@
       </p:sp>
       <p:sp>
         <p:nvSpPr>
-          <p:cNvPr id="12" name="TextBox 11"/>
+          <p:cNvPr id="14" name="TextBox 13"/>
           <p:cNvSpPr txBox="1"/>
           <p:nvPr/>
         </p:nvSpPr>
@@ -6215,7 +6937,7 @@
             <a:r>
               <a:rPr sz="1800" b="1" i="0">
                 <a:solidFill>
-                  <a:srgbClr val="35D0C7"/>
+                  <a:srgbClr val="3B9EF6"/>
                 </a:solidFill>
                 <a:latin typeface="Calibri"/>
               </a:rPr>
@@ -6226,7 +6948,7 @@
       </p:sp>
       <p:sp>
         <p:nvSpPr>
-          <p:cNvPr id="13" name="TextBox 12"/>
+          <p:cNvPr id="15" name="TextBox 14"/>
           <p:cNvSpPr txBox="1"/>
           <p:nvPr/>
         </p:nvSpPr>
@@ -6257,7 +6979,7 @@
             <a:r>
               <a:rPr sz="1900" b="1" i="0">
                 <a:solidFill>
-                  <a:srgbClr val="F4F6FB"/>
+                  <a:srgbClr val="F6F5FB"/>
                 </a:solidFill>
                 <a:latin typeface="Calibri"/>
               </a:rPr>
@@ -6268,7 +6990,7 @@
       </p:sp>
       <p:sp>
         <p:nvSpPr>
-          <p:cNvPr id="14" name="TextBox 13"/>
+          <p:cNvPr id="16" name="TextBox 15"/>
           <p:cNvSpPr txBox="1"/>
           <p:nvPr/>
         </p:nvSpPr>
@@ -6302,7 +7024,7 @@
             <a:r>
               <a:rPr sz="1450" b="0" i="0">
                 <a:solidFill>
-                  <a:srgbClr val="A9B4C9"/>
+                  <a:srgbClr val="ACA8C4"/>
                 </a:solidFill>
                 <a:latin typeface="Calibri"/>
               </a:rPr>
@@ -6313,7 +7035,7 @@
       </p:sp>
       <p:sp>
         <p:nvSpPr>
-          <p:cNvPr id="15" name="Rounded Rectangle 14"/>
+          <p:cNvPr id="17" name="Rounded Rectangle 16"/>
           <p:cNvSpPr/>
           <p:nvPr/>
         </p:nvSpPr>
@@ -6332,7 +7054,7 @@
           </a:solidFill>
           <a:ln w="12700">
             <a:solidFill>
-              <a:srgbClr val="FF7A33"/>
+              <a:srgbClr val="8B5CF6"/>
             </a:solidFill>
           </a:ln>
           <a:effectLst/>
@@ -6361,7 +7083,7 @@
       </p:sp>
       <p:sp>
         <p:nvSpPr>
-          <p:cNvPr id="16" name="TextBox 15"/>
+          <p:cNvPr id="18" name="TextBox 17"/>
           <p:cNvSpPr txBox="1"/>
           <p:nvPr/>
         </p:nvSpPr>
@@ -6392,7 +7114,7 @@
             <a:r>
               <a:rPr sz="1200" b="1" i="0" spc="180">
                 <a:solidFill>
-                  <a:srgbClr val="FF7A33"/>
+                  <a:srgbClr val="8B5CF6"/>
                 </a:solidFill>
                 <a:latin typeface="Calibri"/>
               </a:rPr>
@@ -6414,7 +7136,7 @@
             <a:r>
               <a:rPr sz="1550" b="0" i="0">
                 <a:solidFill>
-                  <a:srgbClr val="F4F6FB"/>
+                  <a:srgbClr val="F6F5FB"/>
                 </a:solidFill>
                 <a:latin typeface="Calibri"/>
               </a:rPr>
@@ -6437,7 +7159,7 @@
     <p:bg>
       <p:bgPr>
         <a:solidFill>
-          <a:srgbClr val="0B1220"/>
+          <a:srgbClr val="080812"/>
         </a:solidFill>
         <a:effectLst/>
       </p:bgPr>
@@ -6451,7 +7173,139 @@
       <p:grpSpPr/>
       <p:sp>
         <p:nvSpPr>
-          <p:cNvPr id="2" name="Rectangle 1"/>
+          <p:cNvPr id="2" name="Oval 1"/>
+          <p:cNvSpPr/>
+          <p:nvPr/>
+        </p:nvSpPr>
+        <p:spPr>
+          <a:xfrm>
+            <a:off x="9539935" y="-2651760"/>
+            <a:ext cx="4206240" cy="4206240"/>
+          </a:xfrm>
+          <a:prstGeom prst="ellipse">
+            <a:avLst/>
+          </a:prstGeom>
+          <a:gradFill flip="none" rotWithShape="1">
+            <a:gsLst>
+              <a:gs pos="0">
+                <a:srgbClr val="3B9EF6">
+                  <a:alpha val="22000"/>
+                </a:srgbClr>
+              </a:gs>
+              <a:gs pos="55000">
+                <a:srgbClr val="3B9EF6">
+                  <a:alpha val="9000"/>
+                </a:srgbClr>
+              </a:gs>
+              <a:gs pos="100000">
+                <a:srgbClr val="3B9EF6">
+                  <a:alpha val="0"/>
+                </a:srgbClr>
+              </a:gs>
+            </a:gsLst>
+            <a:path path="circle">
+              <a:fillToRect l="50000" t="50000" r="50000" b="50000"/>
+            </a:path>
+          </a:gradFill>
+          <a:ln>
+            <a:noFill/>
+          </a:ln>
+          <a:effectLst/>
+          <a:effectLst>
+            <a:softEdge rad="1005840"/>
+          </a:effectLst>
+        </p:spPr>
+        <p:style>
+          <a:lnRef idx="1">
+            <a:schemeClr val="accent1"/>
+          </a:lnRef>
+          <a:fillRef idx="3">
+            <a:schemeClr val="accent1"/>
+          </a:fillRef>
+          <a:effectRef idx="2">
+            <a:schemeClr val="accent1"/>
+          </a:effectRef>
+          <a:fontRef idx="minor">
+            <a:schemeClr val="lt1"/>
+          </a:fontRef>
+        </p:style>
+        <p:txBody>
+          <a:bodyPr rtlCol="0" anchor="ctr"/>
+          <a:lstStyle/>
+          <a:p>
+            <a:pPr algn="ctr"/>
+          </a:p>
+        </p:txBody>
+      </p:sp>
+      <p:sp>
+        <p:nvSpPr>
+          <p:cNvPr id="3" name="Oval 2"/>
+          <p:cNvSpPr/>
+          <p:nvPr/>
+        </p:nvSpPr>
+        <p:spPr>
+          <a:xfrm>
+            <a:off x="10637215" y="5486400"/>
+            <a:ext cx="3840480" cy="3840480"/>
+          </a:xfrm>
+          <a:prstGeom prst="ellipse">
+            <a:avLst/>
+          </a:prstGeom>
+          <a:gradFill flip="none" rotWithShape="1">
+            <a:gsLst>
+              <a:gs pos="0">
+                <a:srgbClr val="8B5CF6">
+                  <a:alpha val="18000"/>
+                </a:srgbClr>
+              </a:gs>
+              <a:gs pos="55000">
+                <a:srgbClr val="8B5CF6">
+                  <a:alpha val="7000"/>
+                </a:srgbClr>
+              </a:gs>
+              <a:gs pos="100000">
+                <a:srgbClr val="8B5CF6">
+                  <a:alpha val="0"/>
+                </a:srgbClr>
+              </a:gs>
+            </a:gsLst>
+            <a:path path="circle">
+              <a:fillToRect l="50000" t="50000" r="50000" b="50000"/>
+            </a:path>
+          </a:gradFill>
+          <a:ln>
+            <a:noFill/>
+          </a:ln>
+          <a:effectLst/>
+          <a:effectLst>
+            <a:softEdge rad="1005840"/>
+          </a:effectLst>
+        </p:spPr>
+        <p:style>
+          <a:lnRef idx="1">
+            <a:schemeClr val="accent1"/>
+          </a:lnRef>
+          <a:fillRef idx="3">
+            <a:schemeClr val="accent1"/>
+          </a:fillRef>
+          <a:effectRef idx="2">
+            <a:schemeClr val="accent1"/>
+          </a:effectRef>
+          <a:fontRef idx="minor">
+            <a:schemeClr val="lt1"/>
+          </a:fontRef>
+        </p:style>
+        <p:txBody>
+          <a:bodyPr rtlCol="0" anchor="ctr"/>
+          <a:lstStyle/>
+          <a:p>
+            <a:pPr algn="ctr"/>
+          </a:p>
+        </p:txBody>
+      </p:sp>
+      <p:sp>
+        <p:nvSpPr>
+          <p:cNvPr id="4" name="Rectangle 3"/>
           <p:cNvSpPr/>
           <p:nvPr/>
         </p:nvSpPr>
@@ -6464,7 +7318,7 @@
             <a:avLst/>
           </a:prstGeom>
           <a:solidFill>
-            <a:srgbClr val="FF7A33"/>
+            <a:srgbClr val="8B5CF6"/>
           </a:solidFill>
           <a:ln>
             <a:noFill/>
@@ -6495,7 +7349,7 @@
       </p:sp>
       <p:sp>
         <p:nvSpPr>
-          <p:cNvPr id="3" name="TextBox 2"/>
+          <p:cNvPr id="5" name="TextBox 4"/>
           <p:cNvSpPr txBox="1"/>
           <p:nvPr/>
         </p:nvSpPr>
@@ -6526,7 +7380,7 @@
             <a:r>
               <a:rPr sz="1300" b="1" i="0" spc="220">
                 <a:solidFill>
-                  <a:srgbClr val="35D0C7"/>
+                  <a:srgbClr val="3B9EF6"/>
                 </a:solidFill>
                 <a:latin typeface="Calibri"/>
               </a:rPr>
@@ -6537,7 +7391,7 @@
       </p:sp>
       <p:sp>
         <p:nvSpPr>
-          <p:cNvPr id="4" name="TextBox 3"/>
+          <p:cNvPr id="6" name="TextBox 5"/>
           <p:cNvSpPr txBox="1"/>
           <p:nvPr/>
         </p:nvSpPr>
@@ -6571,7 +7425,7 @@
             <a:r>
               <a:rPr sz="3400" b="1" i="0">
                 <a:solidFill>
-                  <a:srgbClr val="F4F6FB"/>
+                  <a:srgbClr val="F6F5FB"/>
                 </a:solidFill>
                 <a:latin typeface="Calibri"/>
               </a:rPr>
@@ -6583,7 +7437,7 @@
       </p:sp>
       <p:sp>
         <p:nvSpPr>
-          <p:cNvPr id="5" name="TextBox 4"/>
+          <p:cNvPr id="7" name="TextBox 6"/>
           <p:cNvSpPr txBox="1"/>
           <p:nvPr/>
         </p:nvSpPr>
@@ -6614,7 +7468,7 @@
             <a:r>
               <a:rPr sz="1100" b="0" i="0" spc="100">
                 <a:solidFill>
-                  <a:srgbClr val="A9B4C9"/>
+                  <a:srgbClr val="ACA8C4"/>
                 </a:solidFill>
                 <a:latin typeface="Calibri"/>
               </a:rPr>
@@ -6625,7 +7479,7 @@
       </p:sp>
       <p:sp>
         <p:nvSpPr>
-          <p:cNvPr id="6" name="TextBox 5"/>
+          <p:cNvPr id="8" name="TextBox 7"/>
           <p:cNvSpPr txBox="1"/>
           <p:nvPr/>
         </p:nvSpPr>
@@ -6656,7 +7510,7 @@
             <a:r>
               <a:rPr sz="1100" b="0" i="0" spc="100">
                 <a:solidFill>
-                  <a:srgbClr val="A9B4C9"/>
+                  <a:srgbClr val="ACA8C4"/>
                 </a:solidFill>
                 <a:latin typeface="Calibri"/>
               </a:rPr>
@@ -6667,7 +7521,7 @@
       </p:sp>
       <p:sp>
         <p:nvSpPr>
-          <p:cNvPr id="7" name="Rounded Rectangle 6"/>
+          <p:cNvPr id="9" name="Rounded Rectangle 8"/>
           <p:cNvSpPr/>
           <p:nvPr/>
         </p:nvSpPr>
@@ -6682,11 +7536,11 @@
             </a:avLst>
           </a:prstGeom>
           <a:solidFill>
-            <a:srgbClr val="111B2E"/>
+            <a:srgbClr val="131222"/>
           </a:solidFill>
           <a:ln w="12700">
             <a:solidFill>
-              <a:srgbClr val="27334A"/>
+              <a:srgbClr val="2A273E"/>
             </a:solidFill>
           </a:ln>
           <a:effectLst/>
@@ -6715,7 +7569,7 @@
       </p:sp>
       <p:sp>
         <p:nvSpPr>
-          <p:cNvPr id="8" name="Oval 7"/>
+          <p:cNvPr id="10" name="Oval 9"/>
           <p:cNvSpPr/>
           <p:nvPr/>
         </p:nvSpPr>
@@ -6728,7 +7582,7 @@
             <a:avLst/>
           </a:prstGeom>
           <a:solidFill>
-            <a:srgbClr val="35D0C7"/>
+            <a:srgbClr val="3B9EF6"/>
           </a:solidFill>
           <a:ln>
             <a:noFill/>
@@ -6759,7 +7613,7 @@
       </p:sp>
       <p:sp>
         <p:nvSpPr>
-          <p:cNvPr id="9" name="TextBox 8"/>
+          <p:cNvPr id="11" name="TextBox 10"/>
           <p:cNvSpPr txBox="1"/>
           <p:nvPr/>
         </p:nvSpPr>
@@ -6790,7 +7644,7 @@
             <a:r>
               <a:rPr sz="1600" b="1" i="0">
                 <a:solidFill>
-                  <a:srgbClr val="0B1220"/>
+                  <a:srgbClr val="080812"/>
                 </a:solidFill>
                 <a:latin typeface="Calibri"/>
               </a:rPr>
@@ -6801,7 +7655,7 @@
       </p:sp>
       <p:sp>
         <p:nvSpPr>
-          <p:cNvPr id="10" name="TextBox 9"/>
+          <p:cNvPr id="12" name="TextBox 11"/>
           <p:cNvSpPr txBox="1"/>
           <p:nvPr/>
         </p:nvSpPr>
@@ -6835,7 +7689,7 @@
             <a:r>
               <a:rPr sz="1800" b="1" i="0">
                 <a:solidFill>
-                  <a:srgbClr val="F4F6FB"/>
+                  <a:srgbClr val="F6F5FB"/>
                 </a:solidFill>
                 <a:latin typeface="Calibri"/>
               </a:rPr>
@@ -6846,7 +7700,7 @@
       </p:sp>
       <p:sp>
         <p:nvSpPr>
-          <p:cNvPr id="11" name="TextBox 10"/>
+          <p:cNvPr id="13" name="TextBox 12"/>
           <p:cNvSpPr txBox="1"/>
           <p:nvPr/>
         </p:nvSpPr>
@@ -6877,7 +7731,7 @@
             <a:r>
               <a:rPr sz="1250" b="0" i="1">
                 <a:solidFill>
-                  <a:srgbClr val="FF7A33"/>
+                  <a:srgbClr val="8B5CF6"/>
                 </a:solidFill>
                 <a:latin typeface="Calibri"/>
               </a:rPr>
@@ -6888,7 +7742,7 @@
       </p:sp>
       <p:sp>
         <p:nvSpPr>
-          <p:cNvPr id="12" name="TextBox 11"/>
+          <p:cNvPr id="14" name="TextBox 13"/>
           <p:cNvSpPr txBox="1"/>
           <p:nvPr/>
         </p:nvSpPr>
@@ -6922,7 +7776,7 @@
             <a:r>
               <a:rPr sz="1350" b="0" i="0">
                 <a:solidFill>
-                  <a:srgbClr val="A9B4C9"/>
+                  <a:srgbClr val="ACA8C4"/>
                 </a:solidFill>
                 <a:latin typeface="Calibri"/>
               </a:rPr>
@@ -6933,7 +7787,7 @@
       </p:sp>
       <p:sp>
         <p:nvSpPr>
-          <p:cNvPr id="13" name="Rounded Rectangle 12"/>
+          <p:cNvPr id="15" name="Rounded Rectangle 14"/>
           <p:cNvSpPr/>
           <p:nvPr/>
         </p:nvSpPr>
@@ -6948,11 +7802,11 @@
             </a:avLst>
           </a:prstGeom>
           <a:solidFill>
-            <a:srgbClr val="111B2E"/>
+            <a:srgbClr val="131222"/>
           </a:solidFill>
           <a:ln w="12700">
             <a:solidFill>
-              <a:srgbClr val="27334A"/>
+              <a:srgbClr val="2A273E"/>
             </a:solidFill>
           </a:ln>
           <a:effectLst/>
@@ -6981,7 +7835,7 @@
       </p:sp>
       <p:sp>
         <p:nvSpPr>
-          <p:cNvPr id="14" name="Oval 13"/>
+          <p:cNvPr id="16" name="Oval 15"/>
           <p:cNvSpPr/>
           <p:nvPr/>
         </p:nvSpPr>
@@ -6994,7 +7848,7 @@
             <a:avLst/>
           </a:prstGeom>
           <a:solidFill>
-            <a:srgbClr val="35D0C7"/>
+            <a:srgbClr val="3B9EF6"/>
           </a:solidFill>
           <a:ln>
             <a:noFill/>
@@ -7025,7 +7879,7 @@
       </p:sp>
       <p:sp>
         <p:nvSpPr>
-          <p:cNvPr id="15" name="TextBox 14"/>
+          <p:cNvPr id="17" name="TextBox 16"/>
           <p:cNvSpPr txBox="1"/>
           <p:nvPr/>
         </p:nvSpPr>
@@ -7056,7 +7910,7 @@
             <a:r>
               <a:rPr sz="1600" b="1" i="0">
                 <a:solidFill>
-                  <a:srgbClr val="0B1220"/>
+                  <a:srgbClr val="080812"/>
                 </a:solidFill>
                 <a:latin typeface="Calibri"/>
               </a:rPr>
@@ -7067,7 +7921,7 @@
       </p:sp>
       <p:sp>
         <p:nvSpPr>
-          <p:cNvPr id="16" name="TextBox 15"/>
+          <p:cNvPr id="18" name="TextBox 17"/>
           <p:cNvSpPr txBox="1"/>
           <p:nvPr/>
         </p:nvSpPr>
@@ -7101,7 +7955,7 @@
             <a:r>
               <a:rPr sz="1800" b="1" i="0">
                 <a:solidFill>
-                  <a:srgbClr val="F4F6FB"/>
+                  <a:srgbClr val="F6F5FB"/>
                 </a:solidFill>
                 <a:latin typeface="Calibri"/>
               </a:rPr>
@@ -7112,7 +7966,7 @@
       </p:sp>
       <p:sp>
         <p:nvSpPr>
-          <p:cNvPr id="17" name="TextBox 16"/>
+          <p:cNvPr id="19" name="TextBox 18"/>
           <p:cNvSpPr txBox="1"/>
           <p:nvPr/>
         </p:nvSpPr>
@@ -7143,7 +7997,7 @@
             <a:r>
               <a:rPr sz="1250" b="0" i="1">
                 <a:solidFill>
-                  <a:srgbClr val="FF7A33"/>
+                  <a:srgbClr val="8B5CF6"/>
                 </a:solidFill>
                 <a:latin typeface="Calibri"/>
               </a:rPr>
@@ -7154,7 +8008,7 @@
       </p:sp>
       <p:sp>
         <p:nvSpPr>
-          <p:cNvPr id="18" name="TextBox 17"/>
+          <p:cNvPr id="20" name="TextBox 19"/>
           <p:cNvSpPr txBox="1"/>
           <p:nvPr/>
         </p:nvSpPr>
@@ -7188,7 +8042,7 @@
             <a:r>
               <a:rPr sz="1350" b="0" i="0">
                 <a:solidFill>
-                  <a:srgbClr val="A9B4C9"/>
+                  <a:srgbClr val="ACA8C4"/>
                 </a:solidFill>
                 <a:latin typeface="Calibri"/>
               </a:rPr>
@@ -7199,7 +8053,7 @@
       </p:sp>
       <p:sp>
         <p:nvSpPr>
-          <p:cNvPr id="19" name="Rounded Rectangle 18"/>
+          <p:cNvPr id="21" name="Rounded Rectangle 20"/>
           <p:cNvSpPr/>
           <p:nvPr/>
         </p:nvSpPr>
@@ -7214,11 +8068,11 @@
             </a:avLst>
           </a:prstGeom>
           <a:solidFill>
-            <a:srgbClr val="111B2E"/>
+            <a:srgbClr val="131222"/>
           </a:solidFill>
           <a:ln w="12700">
             <a:solidFill>
-              <a:srgbClr val="27334A"/>
+              <a:srgbClr val="2A273E"/>
             </a:solidFill>
           </a:ln>
           <a:effectLst/>
@@ -7247,7 +8101,7 @@
       </p:sp>
       <p:sp>
         <p:nvSpPr>
-          <p:cNvPr id="20" name="Oval 19"/>
+          <p:cNvPr id="22" name="Oval 21"/>
           <p:cNvSpPr/>
           <p:nvPr/>
         </p:nvSpPr>
@@ -7260,7 +8114,7 @@
             <a:avLst/>
           </a:prstGeom>
           <a:solidFill>
-            <a:srgbClr val="35D0C7"/>
+            <a:srgbClr val="3B9EF6"/>
           </a:solidFill>
           <a:ln>
             <a:noFill/>
@@ -7291,7 +8145,7 @@
       </p:sp>
       <p:sp>
         <p:nvSpPr>
-          <p:cNvPr id="21" name="TextBox 20"/>
+          <p:cNvPr id="23" name="TextBox 22"/>
           <p:cNvSpPr txBox="1"/>
           <p:nvPr/>
         </p:nvSpPr>
@@ -7322,7 +8176,7 @@
             <a:r>
               <a:rPr sz="1600" b="1" i="0">
                 <a:solidFill>
-                  <a:srgbClr val="0B1220"/>
+                  <a:srgbClr val="080812"/>
                 </a:solidFill>
                 <a:latin typeface="Calibri"/>
               </a:rPr>
@@ -7333,7 +8187,7 @@
       </p:sp>
       <p:sp>
         <p:nvSpPr>
-          <p:cNvPr id="22" name="TextBox 21"/>
+          <p:cNvPr id="24" name="TextBox 23"/>
           <p:cNvSpPr txBox="1"/>
           <p:nvPr/>
         </p:nvSpPr>
@@ -7367,7 +8221,7 @@
             <a:r>
               <a:rPr sz="1800" b="1" i="0">
                 <a:solidFill>
-                  <a:srgbClr val="F4F6FB"/>
+                  <a:srgbClr val="F6F5FB"/>
                 </a:solidFill>
                 <a:latin typeface="Calibri"/>
               </a:rPr>
@@ -7378,7 +8232,7 @@
       </p:sp>
       <p:sp>
         <p:nvSpPr>
-          <p:cNvPr id="23" name="TextBox 22"/>
+          <p:cNvPr id="25" name="TextBox 24"/>
           <p:cNvSpPr txBox="1"/>
           <p:nvPr/>
         </p:nvSpPr>
@@ -7409,7 +8263,7 @@
             <a:r>
               <a:rPr sz="1250" b="0" i="1">
                 <a:solidFill>
-                  <a:srgbClr val="FF7A33"/>
+                  <a:srgbClr val="8B5CF6"/>
                 </a:solidFill>
                 <a:latin typeface="Calibri"/>
               </a:rPr>
@@ -7420,7 +8274,7 @@
       </p:sp>
       <p:sp>
         <p:nvSpPr>
-          <p:cNvPr id="24" name="TextBox 23"/>
+          <p:cNvPr id="26" name="TextBox 25"/>
           <p:cNvSpPr txBox="1"/>
           <p:nvPr/>
         </p:nvSpPr>
@@ -7454,7 +8308,7 @@
             <a:r>
               <a:rPr sz="1350" b="0" i="0">
                 <a:solidFill>
-                  <a:srgbClr val="A9B4C9"/>
+                  <a:srgbClr val="ACA8C4"/>
                 </a:solidFill>
                 <a:latin typeface="Calibri"/>
               </a:rPr>
@@ -7465,7 +8319,7 @@
       </p:sp>
       <p:sp>
         <p:nvSpPr>
-          <p:cNvPr id="25" name="TextBox 24"/>
+          <p:cNvPr id="27" name="TextBox 26"/>
           <p:cNvSpPr txBox="1"/>
           <p:nvPr/>
         </p:nvSpPr>
@@ -7496,7 +8350,7 @@
             <a:r>
               <a:rPr sz="1250" b="0" i="1">
                 <a:solidFill>
-                  <a:srgbClr val="A9B4C9"/>
+                  <a:srgbClr val="ACA8C4"/>
                 </a:solidFill>
                 <a:latin typeface="Calibri"/>
               </a:rPr>
@@ -7519,7 +8373,7 @@
     <p:bg>
       <p:bgPr>
         <a:solidFill>
-          <a:srgbClr val="0B1220"/>
+          <a:srgbClr val="080812"/>
         </a:solidFill>
         <a:effectLst/>
       </p:bgPr>
@@ -7533,7 +8387,139 @@
       <p:grpSpPr/>
       <p:sp>
         <p:nvSpPr>
-          <p:cNvPr id="2" name="Rectangle 1"/>
+          <p:cNvPr id="2" name="Oval 1"/>
+          <p:cNvSpPr/>
+          <p:nvPr/>
+        </p:nvSpPr>
+        <p:spPr>
+          <a:xfrm>
+            <a:off x="9539935" y="-2651760"/>
+            <a:ext cx="4206240" cy="4206240"/>
+          </a:xfrm>
+          <a:prstGeom prst="ellipse">
+            <a:avLst/>
+          </a:prstGeom>
+          <a:gradFill flip="none" rotWithShape="1">
+            <a:gsLst>
+              <a:gs pos="0">
+                <a:srgbClr val="3B9EF6">
+                  <a:alpha val="22000"/>
+                </a:srgbClr>
+              </a:gs>
+              <a:gs pos="55000">
+                <a:srgbClr val="3B9EF6">
+                  <a:alpha val="9000"/>
+                </a:srgbClr>
+              </a:gs>
+              <a:gs pos="100000">
+                <a:srgbClr val="3B9EF6">
+                  <a:alpha val="0"/>
+                </a:srgbClr>
+              </a:gs>
+            </a:gsLst>
+            <a:path path="circle">
+              <a:fillToRect l="50000" t="50000" r="50000" b="50000"/>
+            </a:path>
+          </a:gradFill>
+          <a:ln>
+            <a:noFill/>
+          </a:ln>
+          <a:effectLst/>
+          <a:effectLst>
+            <a:softEdge rad="1005840"/>
+          </a:effectLst>
+        </p:spPr>
+        <p:style>
+          <a:lnRef idx="1">
+            <a:schemeClr val="accent1"/>
+          </a:lnRef>
+          <a:fillRef idx="3">
+            <a:schemeClr val="accent1"/>
+          </a:fillRef>
+          <a:effectRef idx="2">
+            <a:schemeClr val="accent1"/>
+          </a:effectRef>
+          <a:fontRef idx="minor">
+            <a:schemeClr val="lt1"/>
+          </a:fontRef>
+        </p:style>
+        <p:txBody>
+          <a:bodyPr rtlCol="0" anchor="ctr"/>
+          <a:lstStyle/>
+          <a:p>
+            <a:pPr algn="ctr"/>
+          </a:p>
+        </p:txBody>
+      </p:sp>
+      <p:sp>
+        <p:nvSpPr>
+          <p:cNvPr id="3" name="Oval 2"/>
+          <p:cNvSpPr/>
+          <p:nvPr/>
+        </p:nvSpPr>
+        <p:spPr>
+          <a:xfrm>
+            <a:off x="10637215" y="5486400"/>
+            <a:ext cx="3840480" cy="3840480"/>
+          </a:xfrm>
+          <a:prstGeom prst="ellipse">
+            <a:avLst/>
+          </a:prstGeom>
+          <a:gradFill flip="none" rotWithShape="1">
+            <a:gsLst>
+              <a:gs pos="0">
+                <a:srgbClr val="8B5CF6">
+                  <a:alpha val="18000"/>
+                </a:srgbClr>
+              </a:gs>
+              <a:gs pos="55000">
+                <a:srgbClr val="8B5CF6">
+                  <a:alpha val="7000"/>
+                </a:srgbClr>
+              </a:gs>
+              <a:gs pos="100000">
+                <a:srgbClr val="8B5CF6">
+                  <a:alpha val="0"/>
+                </a:srgbClr>
+              </a:gs>
+            </a:gsLst>
+            <a:path path="circle">
+              <a:fillToRect l="50000" t="50000" r="50000" b="50000"/>
+            </a:path>
+          </a:gradFill>
+          <a:ln>
+            <a:noFill/>
+          </a:ln>
+          <a:effectLst/>
+          <a:effectLst>
+            <a:softEdge rad="1005840"/>
+          </a:effectLst>
+        </p:spPr>
+        <p:style>
+          <a:lnRef idx="1">
+            <a:schemeClr val="accent1"/>
+          </a:lnRef>
+          <a:fillRef idx="3">
+            <a:schemeClr val="accent1"/>
+          </a:fillRef>
+          <a:effectRef idx="2">
+            <a:schemeClr val="accent1"/>
+          </a:effectRef>
+          <a:fontRef idx="minor">
+            <a:schemeClr val="lt1"/>
+          </a:fontRef>
+        </p:style>
+        <p:txBody>
+          <a:bodyPr rtlCol="0" anchor="ctr"/>
+          <a:lstStyle/>
+          <a:p>
+            <a:pPr algn="ctr"/>
+          </a:p>
+        </p:txBody>
+      </p:sp>
+      <p:sp>
+        <p:nvSpPr>
+          <p:cNvPr id="4" name="Rectangle 3"/>
           <p:cNvSpPr/>
           <p:nvPr/>
         </p:nvSpPr>
@@ -7546,7 +8532,7 @@
             <a:avLst/>
           </a:prstGeom>
           <a:solidFill>
-            <a:srgbClr val="FF7A33"/>
+            <a:srgbClr val="8B5CF6"/>
           </a:solidFill>
           <a:ln>
             <a:noFill/>
@@ -7577,7 +8563,7 @@
       </p:sp>
       <p:sp>
         <p:nvSpPr>
-          <p:cNvPr id="3" name="TextBox 2"/>
+          <p:cNvPr id="5" name="TextBox 4"/>
           <p:cNvSpPr txBox="1"/>
           <p:nvPr/>
         </p:nvSpPr>
@@ -7608,7 +8594,7 @@
             <a:r>
               <a:rPr sz="1300" b="1" i="0" spc="220">
                 <a:solidFill>
-                  <a:srgbClr val="35D0C7"/>
+                  <a:srgbClr val="3B9EF6"/>
                 </a:solidFill>
                 <a:latin typeface="Calibri"/>
               </a:rPr>
@@ -7619,7 +8605,7 @@
       </p:sp>
       <p:sp>
         <p:nvSpPr>
-          <p:cNvPr id="4" name="TextBox 3"/>
+          <p:cNvPr id="6" name="TextBox 5"/>
           <p:cNvSpPr txBox="1"/>
           <p:nvPr/>
         </p:nvSpPr>
@@ -7653,7 +8639,7 @@
             <a:r>
               <a:rPr sz="3400" b="1" i="0">
                 <a:solidFill>
-                  <a:srgbClr val="F4F6FB"/>
+                  <a:srgbClr val="F6F5FB"/>
                 </a:solidFill>
                 <a:latin typeface="Calibri"/>
               </a:rPr>
@@ -7664,7 +8650,7 @@
       </p:sp>
       <p:sp>
         <p:nvSpPr>
-          <p:cNvPr id="5" name="TextBox 4"/>
+          <p:cNvPr id="7" name="TextBox 6"/>
           <p:cNvSpPr txBox="1"/>
           <p:nvPr/>
         </p:nvSpPr>
@@ -7695,7 +8681,7 @@
             <a:r>
               <a:rPr sz="1100" b="0" i="0" spc="100">
                 <a:solidFill>
-                  <a:srgbClr val="A9B4C9"/>
+                  <a:srgbClr val="ACA8C4"/>
                 </a:solidFill>
                 <a:latin typeface="Calibri"/>
               </a:rPr>
@@ -7706,7 +8692,7 @@
       </p:sp>
       <p:sp>
         <p:nvSpPr>
-          <p:cNvPr id="6" name="TextBox 5"/>
+          <p:cNvPr id="8" name="TextBox 7"/>
           <p:cNvSpPr txBox="1"/>
           <p:nvPr/>
         </p:nvSpPr>
@@ -7737,7 +8723,7 @@
             <a:r>
               <a:rPr sz="1100" b="0" i="0" spc="100">
                 <a:solidFill>
-                  <a:srgbClr val="A9B4C9"/>
+                  <a:srgbClr val="ACA8C4"/>
                 </a:solidFill>
                 <a:latin typeface="Calibri"/>
               </a:rPr>
@@ -7748,7 +8734,7 @@
       </p:sp>
       <p:sp>
         <p:nvSpPr>
-          <p:cNvPr id="7" name="Rounded Rectangle 6"/>
+          <p:cNvPr id="9" name="Rounded Rectangle 8"/>
           <p:cNvSpPr/>
           <p:nvPr/>
         </p:nvSpPr>
@@ -7763,11 +8749,11 @@
             </a:avLst>
           </a:prstGeom>
           <a:solidFill>
-            <a:srgbClr val="111B2E"/>
+            <a:srgbClr val="131222"/>
           </a:solidFill>
           <a:ln w="12700">
             <a:solidFill>
-              <a:srgbClr val="35D0C7"/>
+              <a:srgbClr val="3B9EF6"/>
             </a:solidFill>
           </a:ln>
           <a:effectLst/>
@@ -7796,7 +8782,7 @@
       </p:sp>
       <p:sp>
         <p:nvSpPr>
-          <p:cNvPr id="8" name="TextBox 7"/>
+          <p:cNvPr id="10" name="TextBox 9"/>
           <p:cNvSpPr txBox="1"/>
           <p:nvPr/>
         </p:nvSpPr>
@@ -7827,7 +8813,7 @@
             <a:r>
               <a:rPr sz="1600" b="1" i="0">
                 <a:solidFill>
-                  <a:srgbClr val="F4F6FB"/>
+                  <a:srgbClr val="F6F5FB"/>
                 </a:solidFill>
                 <a:latin typeface="Calibri"/>
               </a:rPr>
@@ -7838,7 +8824,7 @@
       </p:sp>
       <p:sp>
         <p:nvSpPr>
-          <p:cNvPr id="9" name="TextBox 8"/>
+          <p:cNvPr id="11" name="TextBox 10"/>
           <p:cNvSpPr txBox="1"/>
           <p:nvPr/>
         </p:nvSpPr>
@@ -7869,7 +8855,7 @@
             <a:r>
               <a:rPr sz="1200" b="0" i="0">
                 <a:solidFill>
-                  <a:srgbClr val="A9B4C9"/>
+                  <a:srgbClr val="ACA8C4"/>
                 </a:solidFill>
                 <a:latin typeface="Calibri"/>
               </a:rPr>
@@ -7880,7 +8866,7 @@
       </p:sp>
       <p:cxnSp>
         <p:nvCxnSpPr>
-          <p:cNvPr id="10" name="Connector 9"/>
+          <p:cNvPr id="12" name="Connector 11"/>
           <p:cNvCxnSpPr/>
           <p:nvPr/>
         </p:nvCxnSpPr>
@@ -7894,7 +8880,7 @@
           </a:prstGeom>
           <a:ln w="25400">
             <a:solidFill>
-              <a:srgbClr val="A9B4C9"/>
+              <a:srgbClr val="ACA8C4"/>
             </a:solidFill>
             <a:tailEnd type="triangle" w="med" len="med"/>
           </a:ln>
@@ -7916,7 +8902,7 @@
       </p:cxnSp>
       <p:sp>
         <p:nvSpPr>
-          <p:cNvPr id="11" name="Rounded Rectangle 10"/>
+          <p:cNvPr id="13" name="Rounded Rectangle 12"/>
           <p:cNvSpPr/>
           <p:nvPr/>
         </p:nvSpPr>
@@ -7931,11 +8917,11 @@
             </a:avLst>
           </a:prstGeom>
           <a:solidFill>
-            <a:srgbClr val="111B2E"/>
+            <a:srgbClr val="131222"/>
           </a:solidFill>
           <a:ln w="12700">
             <a:solidFill>
-              <a:srgbClr val="FF7A33"/>
+              <a:srgbClr val="8B5CF6"/>
             </a:solidFill>
           </a:ln>
           <a:effectLst/>
@@ -7964,7 +8950,7 @@
       </p:sp>
       <p:sp>
         <p:nvSpPr>
-          <p:cNvPr id="12" name="TextBox 11"/>
+          <p:cNvPr id="14" name="TextBox 13"/>
           <p:cNvSpPr txBox="1"/>
           <p:nvPr/>
         </p:nvSpPr>
@@ -7995,7 +8981,7 @@
             <a:r>
               <a:rPr sz="1600" b="1" i="0">
                 <a:solidFill>
-                  <a:srgbClr val="F4F6FB"/>
+                  <a:srgbClr val="F6F5FB"/>
                 </a:solidFill>
                 <a:latin typeface="Calibri"/>
               </a:rPr>
@@ -8006,7 +8992,7 @@
       </p:sp>
       <p:sp>
         <p:nvSpPr>
-          <p:cNvPr id="13" name="TextBox 12"/>
+          <p:cNvPr id="15" name="TextBox 14"/>
           <p:cNvSpPr txBox="1"/>
           <p:nvPr/>
         </p:nvSpPr>
@@ -8037,7 +9023,7 @@
             <a:r>
               <a:rPr sz="1200" b="0" i="0">
                 <a:solidFill>
-                  <a:srgbClr val="A9B4C9"/>
+                  <a:srgbClr val="ACA8C4"/>
                 </a:solidFill>
                 <a:latin typeface="Calibri"/>
               </a:rPr>
@@ -8048,7 +9034,7 @@
       </p:sp>
       <p:cxnSp>
         <p:nvCxnSpPr>
-          <p:cNvPr id="14" name="Connector 13"/>
+          <p:cNvPr id="16" name="Connector 15"/>
           <p:cNvCxnSpPr/>
           <p:nvPr/>
         </p:nvCxnSpPr>
@@ -8062,7 +9048,7 @@
           </a:prstGeom>
           <a:ln w="25400">
             <a:solidFill>
-              <a:srgbClr val="A9B4C9"/>
+              <a:srgbClr val="ACA8C4"/>
             </a:solidFill>
             <a:tailEnd type="triangle" w="med" len="med"/>
           </a:ln>
@@ -8084,7 +9070,7 @@
       </p:cxnSp>
       <p:sp>
         <p:nvSpPr>
-          <p:cNvPr id="15" name="Rounded Rectangle 14"/>
+          <p:cNvPr id="17" name="Rounded Rectangle 16"/>
           <p:cNvSpPr/>
           <p:nvPr/>
         </p:nvSpPr>
@@ -8099,11 +9085,11 @@
             </a:avLst>
           </a:prstGeom>
           <a:solidFill>
-            <a:srgbClr val="111B2E"/>
+            <a:srgbClr val="131222"/>
           </a:solidFill>
           <a:ln w="12700">
             <a:solidFill>
-              <a:srgbClr val="35D0C7"/>
+              <a:srgbClr val="3B9EF6"/>
             </a:solidFill>
           </a:ln>
           <a:effectLst/>
@@ -8132,7 +9118,7 @@
       </p:sp>
       <p:sp>
         <p:nvSpPr>
-          <p:cNvPr id="16" name="TextBox 15"/>
+          <p:cNvPr id="18" name="TextBox 17"/>
           <p:cNvSpPr txBox="1"/>
           <p:nvPr/>
         </p:nvSpPr>
@@ -8163,7 +9149,7 @@
             <a:r>
               <a:rPr sz="1600" b="1" i="0">
                 <a:solidFill>
-                  <a:srgbClr val="F4F6FB"/>
+                  <a:srgbClr val="F6F5FB"/>
                 </a:solidFill>
                 <a:latin typeface="Calibri"/>
               </a:rPr>
@@ -8174,7 +9160,7 @@
       </p:sp>
       <p:sp>
         <p:nvSpPr>
-          <p:cNvPr id="17" name="TextBox 16"/>
+          <p:cNvPr id="19" name="TextBox 18"/>
           <p:cNvSpPr txBox="1"/>
           <p:nvPr/>
         </p:nvSpPr>
@@ -8205,7 +9191,7 @@
             <a:r>
               <a:rPr sz="1200" b="0" i="0">
                 <a:solidFill>
-                  <a:srgbClr val="A9B4C9"/>
+                  <a:srgbClr val="ACA8C4"/>
                 </a:solidFill>
                 <a:latin typeface="Calibri"/>
               </a:rPr>
@@ -8216,7 +9202,7 @@
       </p:sp>
       <p:cxnSp>
         <p:nvCxnSpPr>
-          <p:cNvPr id="18" name="Connector 17"/>
+          <p:cNvPr id="20" name="Connector 19"/>
           <p:cNvCxnSpPr/>
           <p:nvPr/>
         </p:nvCxnSpPr>
@@ -8230,7 +9216,7 @@
           </a:prstGeom>
           <a:ln w="25400">
             <a:solidFill>
-              <a:srgbClr val="A9B4C9"/>
+              <a:srgbClr val="ACA8C4"/>
             </a:solidFill>
             <a:tailEnd type="triangle" w="med" len="med"/>
           </a:ln>
@@ -8252,7 +9238,7 @@
       </p:cxnSp>
       <p:sp>
         <p:nvSpPr>
-          <p:cNvPr id="19" name="Rounded Rectangle 18"/>
+          <p:cNvPr id="21" name="Rounded Rectangle 20"/>
           <p:cNvSpPr/>
           <p:nvPr/>
         </p:nvSpPr>
@@ -8267,11 +9253,11 @@
             </a:avLst>
           </a:prstGeom>
           <a:solidFill>
-            <a:srgbClr val="111B2E"/>
+            <a:srgbClr val="131222"/>
           </a:solidFill>
           <a:ln w="12700">
             <a:solidFill>
-              <a:srgbClr val="FF7A33"/>
+              <a:srgbClr val="8B5CF6"/>
             </a:solidFill>
           </a:ln>
           <a:effectLst/>
@@ -8300,7 +9286,7 @@
       </p:sp>
       <p:sp>
         <p:nvSpPr>
-          <p:cNvPr id="20" name="TextBox 19"/>
+          <p:cNvPr id="22" name="TextBox 21"/>
           <p:cNvSpPr txBox="1"/>
           <p:nvPr/>
         </p:nvSpPr>
@@ -8331,7 +9317,7 @@
             <a:r>
               <a:rPr sz="1600" b="1" i="0">
                 <a:solidFill>
-                  <a:srgbClr val="F4F6FB"/>
+                  <a:srgbClr val="F6F5FB"/>
                 </a:solidFill>
                 <a:latin typeface="Calibri"/>
               </a:rPr>
@@ -8342,7 +9328,7 @@
       </p:sp>
       <p:sp>
         <p:nvSpPr>
-          <p:cNvPr id="21" name="TextBox 20"/>
+          <p:cNvPr id="23" name="TextBox 22"/>
           <p:cNvSpPr txBox="1"/>
           <p:nvPr/>
         </p:nvSpPr>
@@ -8373,7 +9359,7 @@
             <a:r>
               <a:rPr sz="1200" b="0" i="0">
                 <a:solidFill>
-                  <a:srgbClr val="A9B4C9"/>
+                  <a:srgbClr val="ACA8C4"/>
                 </a:solidFill>
                 <a:latin typeface="Calibri"/>
               </a:rPr>
@@ -8384,7 +9370,7 @@
       </p:sp>
       <p:cxnSp>
         <p:nvCxnSpPr>
-          <p:cNvPr id="22" name="Connector 21"/>
+          <p:cNvPr id="24" name="Connector 23"/>
           <p:cNvCxnSpPr/>
           <p:nvPr/>
         </p:nvCxnSpPr>
@@ -8398,7 +9384,7 @@
           </a:prstGeom>
           <a:ln w="22225">
             <a:solidFill>
-              <a:srgbClr val="35D0C7"/>
+              <a:srgbClr val="3B9EF6"/>
             </a:solidFill>
             <a:tailEnd type="triangle" w="med" len="med"/>
           </a:ln>
@@ -8420,7 +9406,7 @@
       </p:cxnSp>
       <p:cxnSp>
         <p:nvCxnSpPr>
-          <p:cNvPr id="23" name="Connector 22"/>
+          <p:cNvPr id="25" name="Connector 24"/>
           <p:cNvCxnSpPr/>
           <p:nvPr/>
         </p:nvCxnSpPr>
@@ -8434,7 +9420,7 @@
           </a:prstGeom>
           <a:ln w="22225">
             <a:solidFill>
-              <a:srgbClr val="35D0C7"/>
+              <a:srgbClr val="3B9EF6"/>
             </a:solidFill>
             <a:tailEnd type="triangle" w="med" len="med"/>
           </a:ln>
@@ -8456,7 +9442,7 @@
       </p:cxnSp>
       <p:cxnSp>
         <p:nvCxnSpPr>
-          <p:cNvPr id="24" name="Connector 23"/>
+          <p:cNvPr id="26" name="Connector 25"/>
           <p:cNvCxnSpPr/>
           <p:nvPr/>
         </p:nvCxnSpPr>
@@ -8470,7 +9456,7 @@
           </a:prstGeom>
           <a:ln w="22225">
             <a:solidFill>
-              <a:srgbClr val="35D0C7"/>
+              <a:srgbClr val="3B9EF6"/>
             </a:solidFill>
             <a:tailEnd type="triangle" w="med" len="med"/>
           </a:ln>
@@ -8492,7 +9478,7 @@
       </p:cxnSp>
       <p:sp>
         <p:nvSpPr>
-          <p:cNvPr id="25" name="TextBox 24"/>
+          <p:cNvPr id="27" name="TextBox 26"/>
           <p:cNvSpPr txBox="1"/>
           <p:nvPr/>
         </p:nvSpPr>
@@ -8523,7 +9509,7 @@
             <a:r>
               <a:rPr sz="1250" b="0" i="1">
                 <a:solidFill>
-                  <a:srgbClr val="35D0C7"/>
+                  <a:srgbClr val="3B9EF6"/>
                 </a:solidFill>
                 <a:latin typeface="Calibri"/>
               </a:rPr>
@@ -8534,7 +9520,7 @@
       </p:sp>
       <p:sp>
         <p:nvSpPr>
-          <p:cNvPr id="26" name="TextBox 25"/>
+          <p:cNvPr id="28" name="TextBox 27"/>
           <p:cNvSpPr txBox="1"/>
           <p:nvPr/>
         </p:nvSpPr>
@@ -8568,7 +9554,7 @@
             <a:r>
               <a:rPr sz="1500" b="0" i="0">
                 <a:solidFill>
-                  <a:srgbClr val="A9B4C9"/>
+                  <a:srgbClr val="ACA8C4"/>
                 </a:solidFill>
                 <a:latin typeface="Calibri"/>
               </a:rPr>
@@ -8591,7 +9577,7 @@
     <p:bg>
       <p:bgPr>
         <a:solidFill>
-          <a:srgbClr val="0B1220"/>
+          <a:srgbClr val="080812"/>
         </a:solidFill>
         <a:effectLst/>
       </p:bgPr>
@@ -8605,7 +9591,139 @@
       <p:grpSpPr/>
       <p:sp>
         <p:nvSpPr>
-          <p:cNvPr id="2" name="Rectangle 1"/>
+          <p:cNvPr id="2" name="Oval 1"/>
+          <p:cNvSpPr/>
+          <p:nvPr/>
+        </p:nvSpPr>
+        <p:spPr>
+          <a:xfrm>
+            <a:off x="9539935" y="-2651760"/>
+            <a:ext cx="4206240" cy="4206240"/>
+          </a:xfrm>
+          <a:prstGeom prst="ellipse">
+            <a:avLst/>
+          </a:prstGeom>
+          <a:gradFill flip="none" rotWithShape="1">
+            <a:gsLst>
+              <a:gs pos="0">
+                <a:srgbClr val="3B9EF6">
+                  <a:alpha val="22000"/>
+                </a:srgbClr>
+              </a:gs>
+              <a:gs pos="55000">
+                <a:srgbClr val="3B9EF6">
+                  <a:alpha val="9000"/>
+                </a:srgbClr>
+              </a:gs>
+              <a:gs pos="100000">
+                <a:srgbClr val="3B9EF6">
+                  <a:alpha val="0"/>
+                </a:srgbClr>
+              </a:gs>
+            </a:gsLst>
+            <a:path path="circle">
+              <a:fillToRect l="50000" t="50000" r="50000" b="50000"/>
+            </a:path>
+          </a:gradFill>
+          <a:ln>
+            <a:noFill/>
+          </a:ln>
+          <a:effectLst/>
+          <a:effectLst>
+            <a:softEdge rad="1005840"/>
+          </a:effectLst>
+        </p:spPr>
+        <p:style>
+          <a:lnRef idx="1">
+            <a:schemeClr val="accent1"/>
+          </a:lnRef>
+          <a:fillRef idx="3">
+            <a:schemeClr val="accent1"/>
+          </a:fillRef>
+          <a:effectRef idx="2">
+            <a:schemeClr val="accent1"/>
+          </a:effectRef>
+          <a:fontRef idx="minor">
+            <a:schemeClr val="lt1"/>
+          </a:fontRef>
+        </p:style>
+        <p:txBody>
+          <a:bodyPr rtlCol="0" anchor="ctr"/>
+          <a:lstStyle/>
+          <a:p>
+            <a:pPr algn="ctr"/>
+          </a:p>
+        </p:txBody>
+      </p:sp>
+      <p:sp>
+        <p:nvSpPr>
+          <p:cNvPr id="3" name="Oval 2"/>
+          <p:cNvSpPr/>
+          <p:nvPr/>
+        </p:nvSpPr>
+        <p:spPr>
+          <a:xfrm>
+            <a:off x="10637215" y="5486400"/>
+            <a:ext cx="3840480" cy="3840480"/>
+          </a:xfrm>
+          <a:prstGeom prst="ellipse">
+            <a:avLst/>
+          </a:prstGeom>
+          <a:gradFill flip="none" rotWithShape="1">
+            <a:gsLst>
+              <a:gs pos="0">
+                <a:srgbClr val="8B5CF6">
+                  <a:alpha val="18000"/>
+                </a:srgbClr>
+              </a:gs>
+              <a:gs pos="55000">
+                <a:srgbClr val="8B5CF6">
+                  <a:alpha val="7000"/>
+                </a:srgbClr>
+              </a:gs>
+              <a:gs pos="100000">
+                <a:srgbClr val="8B5CF6">
+                  <a:alpha val="0"/>
+                </a:srgbClr>
+              </a:gs>
+            </a:gsLst>
+            <a:path path="circle">
+              <a:fillToRect l="50000" t="50000" r="50000" b="50000"/>
+            </a:path>
+          </a:gradFill>
+          <a:ln>
+            <a:noFill/>
+          </a:ln>
+          <a:effectLst/>
+          <a:effectLst>
+            <a:softEdge rad="1005840"/>
+          </a:effectLst>
+        </p:spPr>
+        <p:style>
+          <a:lnRef idx="1">
+            <a:schemeClr val="accent1"/>
+          </a:lnRef>
+          <a:fillRef idx="3">
+            <a:schemeClr val="accent1"/>
+          </a:fillRef>
+          <a:effectRef idx="2">
+            <a:schemeClr val="accent1"/>
+          </a:effectRef>
+          <a:fontRef idx="minor">
+            <a:schemeClr val="lt1"/>
+          </a:fontRef>
+        </p:style>
+        <p:txBody>
+          <a:bodyPr rtlCol="0" anchor="ctr"/>
+          <a:lstStyle/>
+          <a:p>
+            <a:pPr algn="ctr"/>
+          </a:p>
+        </p:txBody>
+      </p:sp>
+      <p:sp>
+        <p:nvSpPr>
+          <p:cNvPr id="4" name="Rectangle 3"/>
           <p:cNvSpPr/>
           <p:nvPr/>
         </p:nvSpPr>
@@ -8618,7 +9736,7 @@
             <a:avLst/>
           </a:prstGeom>
           <a:solidFill>
-            <a:srgbClr val="FF7A33"/>
+            <a:srgbClr val="8B5CF6"/>
           </a:solidFill>
           <a:ln>
             <a:noFill/>
@@ -8649,7 +9767,7 @@
       </p:sp>
       <p:sp>
         <p:nvSpPr>
-          <p:cNvPr id="3" name="TextBox 2"/>
+          <p:cNvPr id="5" name="TextBox 4"/>
           <p:cNvSpPr txBox="1"/>
           <p:nvPr/>
         </p:nvSpPr>
@@ -8680,7 +9798,7 @@
             <a:r>
               <a:rPr sz="1300" b="1" i="0" spc="220">
                 <a:solidFill>
-                  <a:srgbClr val="35D0C7"/>
+                  <a:srgbClr val="3B9EF6"/>
                 </a:solidFill>
                 <a:latin typeface="Calibri"/>
               </a:rPr>
@@ -8691,7 +9809,7 @@
       </p:sp>
       <p:sp>
         <p:nvSpPr>
-          <p:cNvPr id="4" name="TextBox 3"/>
+          <p:cNvPr id="6" name="TextBox 5"/>
           <p:cNvSpPr txBox="1"/>
           <p:nvPr/>
         </p:nvSpPr>
@@ -8725,7 +9843,7 @@
             <a:r>
               <a:rPr sz="3400" b="1" i="0">
                 <a:solidFill>
-                  <a:srgbClr val="F4F6FB"/>
+                  <a:srgbClr val="F6F5FB"/>
                 </a:solidFill>
                 <a:latin typeface="Calibri"/>
               </a:rPr>
@@ -8736,7 +9854,7 @@
       </p:sp>
       <p:sp>
         <p:nvSpPr>
-          <p:cNvPr id="5" name="TextBox 4"/>
+          <p:cNvPr id="7" name="TextBox 6"/>
           <p:cNvSpPr txBox="1"/>
           <p:nvPr/>
         </p:nvSpPr>
@@ -8767,7 +9885,7 @@
             <a:r>
               <a:rPr sz="1100" b="0" i="0" spc="100">
                 <a:solidFill>
-                  <a:srgbClr val="A9B4C9"/>
+                  <a:srgbClr val="ACA8C4"/>
                 </a:solidFill>
                 <a:latin typeface="Calibri"/>
               </a:rPr>
@@ -8778,7 +9896,7 @@
       </p:sp>
       <p:sp>
         <p:nvSpPr>
-          <p:cNvPr id="6" name="TextBox 5"/>
+          <p:cNvPr id="8" name="TextBox 7"/>
           <p:cNvSpPr txBox="1"/>
           <p:nvPr/>
         </p:nvSpPr>
@@ -8809,7 +9927,7 @@
             <a:r>
               <a:rPr sz="1100" b="0" i="0" spc="100">
                 <a:solidFill>
-                  <a:srgbClr val="A9B4C9"/>
+                  <a:srgbClr val="ACA8C4"/>
                 </a:solidFill>
                 <a:latin typeface="Calibri"/>
               </a:rPr>
@@ -8820,7 +9938,7 @@
       </p:sp>
       <p:sp>
         <p:nvSpPr>
-          <p:cNvPr id="7" name="Rounded Rectangle 6"/>
+          <p:cNvPr id="9" name="Rounded Rectangle 8"/>
           <p:cNvSpPr/>
           <p:nvPr/>
         </p:nvSpPr>
@@ -8835,11 +9953,11 @@
             </a:avLst>
           </a:prstGeom>
           <a:solidFill>
-            <a:srgbClr val="111B2E"/>
+            <a:srgbClr val="131222"/>
           </a:solidFill>
           <a:ln w="12700">
             <a:solidFill>
-              <a:srgbClr val="27334A"/>
+              <a:srgbClr val="2A273E"/>
             </a:solidFill>
           </a:ln>
           <a:effectLst/>
@@ -8868,7 +9986,7 @@
       </p:sp>
       <p:sp>
         <p:nvSpPr>
-          <p:cNvPr id="8" name="Rounded Rectangle 7"/>
+          <p:cNvPr id="10" name="Rounded Rectangle 9"/>
           <p:cNvSpPr/>
           <p:nvPr/>
         </p:nvSpPr>
@@ -8883,7 +10001,7 @@
             </a:avLst>
           </a:prstGeom>
           <a:solidFill>
-            <a:srgbClr val="FF7A33"/>
+            <a:srgbClr val="8B5CF6"/>
           </a:solidFill>
           <a:ln>
             <a:noFill/>
@@ -8914,7 +10032,7 @@
       </p:sp>
       <p:sp>
         <p:nvSpPr>
-          <p:cNvPr id="9" name="TextBox 8"/>
+          <p:cNvPr id="11" name="TextBox 10"/>
           <p:cNvSpPr txBox="1"/>
           <p:nvPr/>
         </p:nvSpPr>
@@ -8945,7 +10063,7 @@
             <a:r>
               <a:rPr sz="1500" b="1" i="0">
                 <a:solidFill>
-                  <a:srgbClr val="0B1220"/>
+                  <a:srgbClr val="080812"/>
                 </a:solidFill>
                 <a:latin typeface="Calibri"/>
               </a:rPr>
@@ -8956,7 +10074,7 @@
       </p:sp>
       <p:sp>
         <p:nvSpPr>
-          <p:cNvPr id="10" name="TextBox 9"/>
+          <p:cNvPr id="12" name="TextBox 11"/>
           <p:cNvSpPr txBox="1"/>
           <p:nvPr/>
         </p:nvSpPr>
@@ -8990,7 +10108,7 @@
             <a:r>
               <a:rPr sz="1850" b="1" i="0">
                 <a:solidFill>
-                  <a:srgbClr val="F4F6FB"/>
+                  <a:srgbClr val="F6F5FB"/>
                 </a:solidFill>
                 <a:latin typeface="Calibri"/>
               </a:rPr>
@@ -9001,7 +10119,7 @@
       </p:sp>
       <p:sp>
         <p:nvSpPr>
-          <p:cNvPr id="11" name="TextBox 10"/>
+          <p:cNvPr id="13" name="TextBox 12"/>
           <p:cNvSpPr txBox="1"/>
           <p:nvPr/>
         </p:nvSpPr>
@@ -9035,7 +10153,7 @@
             <a:r>
               <a:rPr sz="1400" b="0" i="0">
                 <a:solidFill>
-                  <a:srgbClr val="A9B4C9"/>
+                  <a:srgbClr val="ACA8C4"/>
                 </a:solidFill>
                 <a:latin typeface="Calibri"/>
               </a:rPr>
@@ -9046,7 +10164,7 @@
       </p:sp>
       <p:sp>
         <p:nvSpPr>
-          <p:cNvPr id="12" name="Rounded Rectangle 11"/>
+          <p:cNvPr id="14" name="Rounded Rectangle 13"/>
           <p:cNvSpPr/>
           <p:nvPr/>
         </p:nvSpPr>
@@ -9061,11 +10179,11 @@
             </a:avLst>
           </a:prstGeom>
           <a:solidFill>
-            <a:srgbClr val="111B2E"/>
+            <a:srgbClr val="131222"/>
           </a:solidFill>
           <a:ln w="12700">
             <a:solidFill>
-              <a:srgbClr val="27334A"/>
+              <a:srgbClr val="2A273E"/>
             </a:solidFill>
           </a:ln>
           <a:effectLst/>
@@ -9094,7 +10212,7 @@
       </p:sp>
       <p:sp>
         <p:nvSpPr>
-          <p:cNvPr id="13" name="Rounded Rectangle 12"/>
+          <p:cNvPr id="15" name="Rounded Rectangle 14"/>
           <p:cNvSpPr/>
           <p:nvPr/>
         </p:nvSpPr>
@@ -9109,7 +10227,7 @@
             </a:avLst>
           </a:prstGeom>
           <a:solidFill>
-            <a:srgbClr val="35D0C7"/>
+            <a:srgbClr val="3B9EF6"/>
           </a:solidFill>
           <a:ln>
             <a:noFill/>
@@ -9140,7 +10258,7 @@
       </p:sp>
       <p:sp>
         <p:nvSpPr>
-          <p:cNvPr id="14" name="TextBox 13"/>
+          <p:cNvPr id="16" name="TextBox 15"/>
           <p:cNvSpPr txBox="1"/>
           <p:nvPr/>
         </p:nvSpPr>
@@ -9171,7 +10289,7 @@
             <a:r>
               <a:rPr sz="1500" b="1" i="0">
                 <a:solidFill>
-                  <a:srgbClr val="0B1220"/>
+                  <a:srgbClr val="080812"/>
                 </a:solidFill>
                 <a:latin typeface="Calibri"/>
               </a:rPr>
@@ -9182,7 +10300,7 @@
       </p:sp>
       <p:sp>
         <p:nvSpPr>
-          <p:cNvPr id="15" name="TextBox 14"/>
+          <p:cNvPr id="17" name="TextBox 16"/>
           <p:cNvSpPr txBox="1"/>
           <p:nvPr/>
         </p:nvSpPr>
@@ -9216,7 +10334,7 @@
             <a:r>
               <a:rPr sz="1850" b="1" i="0">
                 <a:solidFill>
-                  <a:srgbClr val="F4F6FB"/>
+                  <a:srgbClr val="F6F5FB"/>
                 </a:solidFill>
                 <a:latin typeface="Calibri"/>
               </a:rPr>
@@ -9227,7 +10345,7 @@
       </p:sp>
       <p:sp>
         <p:nvSpPr>
-          <p:cNvPr id="16" name="TextBox 15"/>
+          <p:cNvPr id="18" name="TextBox 17"/>
           <p:cNvSpPr txBox="1"/>
           <p:nvPr/>
         </p:nvSpPr>
@@ -9261,7 +10379,7 @@
             <a:r>
               <a:rPr sz="1400" b="0" i="0">
                 <a:solidFill>
-                  <a:srgbClr val="A9B4C9"/>
+                  <a:srgbClr val="ACA8C4"/>
                 </a:solidFill>
                 <a:latin typeface="Calibri"/>
               </a:rPr>
@@ -9272,7 +10390,7 @@
       </p:sp>
       <p:sp>
         <p:nvSpPr>
-          <p:cNvPr id="17" name="Rounded Rectangle 16"/>
+          <p:cNvPr id="19" name="Rounded Rectangle 18"/>
           <p:cNvSpPr/>
           <p:nvPr/>
         </p:nvSpPr>
@@ -9287,11 +10405,11 @@
             </a:avLst>
           </a:prstGeom>
           <a:solidFill>
-            <a:srgbClr val="111B2E"/>
+            <a:srgbClr val="131222"/>
           </a:solidFill>
           <a:ln w="12700">
             <a:solidFill>
-              <a:srgbClr val="27334A"/>
+              <a:srgbClr val="2A273E"/>
             </a:solidFill>
           </a:ln>
           <a:effectLst/>
@@ -9320,7 +10438,7 @@
       </p:sp>
       <p:sp>
         <p:nvSpPr>
-          <p:cNvPr id="18" name="Rounded Rectangle 17"/>
+          <p:cNvPr id="20" name="Rounded Rectangle 19"/>
           <p:cNvSpPr/>
           <p:nvPr/>
         </p:nvSpPr>
@@ -9335,7 +10453,7 @@
             </a:avLst>
           </a:prstGeom>
           <a:solidFill>
-            <a:srgbClr val="FF7A33"/>
+            <a:srgbClr val="8B5CF6"/>
           </a:solidFill>
           <a:ln>
             <a:noFill/>
@@ -9366,7 +10484,7 @@
       </p:sp>
       <p:sp>
         <p:nvSpPr>
-          <p:cNvPr id="19" name="TextBox 18"/>
+          <p:cNvPr id="21" name="TextBox 20"/>
           <p:cNvSpPr txBox="1"/>
           <p:nvPr/>
         </p:nvSpPr>
@@ -9397,7 +10515,7 @@
             <a:r>
               <a:rPr sz="1500" b="1" i="0">
                 <a:solidFill>
-                  <a:srgbClr val="0B1220"/>
+                  <a:srgbClr val="080812"/>
                 </a:solidFill>
                 <a:latin typeface="Calibri"/>
               </a:rPr>
@@ -9408,7 +10526,7 @@
       </p:sp>
       <p:sp>
         <p:nvSpPr>
-          <p:cNvPr id="20" name="TextBox 19"/>
+          <p:cNvPr id="22" name="TextBox 21"/>
           <p:cNvSpPr txBox="1"/>
           <p:nvPr/>
         </p:nvSpPr>
@@ -9442,7 +10560,7 @@
             <a:r>
               <a:rPr sz="1850" b="1" i="0">
                 <a:solidFill>
-                  <a:srgbClr val="F4F6FB"/>
+                  <a:srgbClr val="F6F5FB"/>
                 </a:solidFill>
                 <a:latin typeface="Calibri"/>
               </a:rPr>
@@ -9453,7 +10571,7 @@
       </p:sp>
       <p:sp>
         <p:nvSpPr>
-          <p:cNvPr id="21" name="TextBox 20"/>
+          <p:cNvPr id="23" name="TextBox 22"/>
           <p:cNvSpPr txBox="1"/>
           <p:nvPr/>
         </p:nvSpPr>
@@ -9487,7 +10605,7 @@
             <a:r>
               <a:rPr sz="1400" b="0" i="0">
                 <a:solidFill>
-                  <a:srgbClr val="A9B4C9"/>
+                  <a:srgbClr val="ACA8C4"/>
                 </a:solidFill>
                 <a:latin typeface="Calibri"/>
               </a:rPr>
@@ -9510,7 +10628,7 @@
     <p:bg>
       <p:bgPr>
         <a:solidFill>
-          <a:srgbClr val="0B1220"/>
+          <a:srgbClr val="080812"/>
         </a:solidFill>
         <a:effectLst/>
       </p:bgPr>
@@ -9524,7 +10642,139 @@
       <p:grpSpPr/>
       <p:sp>
         <p:nvSpPr>
-          <p:cNvPr id="2" name="Rectangle 1"/>
+          <p:cNvPr id="2" name="Oval 1"/>
+          <p:cNvSpPr/>
+          <p:nvPr/>
+        </p:nvSpPr>
+        <p:spPr>
+          <a:xfrm>
+            <a:off x="9539935" y="-2651760"/>
+            <a:ext cx="4206240" cy="4206240"/>
+          </a:xfrm>
+          <a:prstGeom prst="ellipse">
+            <a:avLst/>
+          </a:prstGeom>
+          <a:gradFill flip="none" rotWithShape="1">
+            <a:gsLst>
+              <a:gs pos="0">
+                <a:srgbClr val="3B9EF6">
+                  <a:alpha val="22000"/>
+                </a:srgbClr>
+              </a:gs>
+              <a:gs pos="55000">
+                <a:srgbClr val="3B9EF6">
+                  <a:alpha val="9000"/>
+                </a:srgbClr>
+              </a:gs>
+              <a:gs pos="100000">
+                <a:srgbClr val="3B9EF6">
+                  <a:alpha val="0"/>
+                </a:srgbClr>
+              </a:gs>
+            </a:gsLst>
+            <a:path path="circle">
+              <a:fillToRect l="50000" t="50000" r="50000" b="50000"/>
+            </a:path>
+          </a:gradFill>
+          <a:ln>
+            <a:noFill/>
+          </a:ln>
+          <a:effectLst/>
+          <a:effectLst>
+            <a:softEdge rad="1005840"/>
+          </a:effectLst>
+        </p:spPr>
+        <p:style>
+          <a:lnRef idx="1">
+            <a:schemeClr val="accent1"/>
+          </a:lnRef>
+          <a:fillRef idx="3">
+            <a:schemeClr val="accent1"/>
+          </a:fillRef>
+          <a:effectRef idx="2">
+            <a:schemeClr val="accent1"/>
+          </a:effectRef>
+          <a:fontRef idx="minor">
+            <a:schemeClr val="lt1"/>
+          </a:fontRef>
+        </p:style>
+        <p:txBody>
+          <a:bodyPr rtlCol="0" anchor="ctr"/>
+          <a:lstStyle/>
+          <a:p>
+            <a:pPr algn="ctr"/>
+          </a:p>
+        </p:txBody>
+      </p:sp>
+      <p:sp>
+        <p:nvSpPr>
+          <p:cNvPr id="3" name="Oval 2"/>
+          <p:cNvSpPr/>
+          <p:nvPr/>
+        </p:nvSpPr>
+        <p:spPr>
+          <a:xfrm>
+            <a:off x="10637215" y="5486400"/>
+            <a:ext cx="3840480" cy="3840480"/>
+          </a:xfrm>
+          <a:prstGeom prst="ellipse">
+            <a:avLst/>
+          </a:prstGeom>
+          <a:gradFill flip="none" rotWithShape="1">
+            <a:gsLst>
+              <a:gs pos="0">
+                <a:srgbClr val="8B5CF6">
+                  <a:alpha val="18000"/>
+                </a:srgbClr>
+              </a:gs>
+              <a:gs pos="55000">
+                <a:srgbClr val="8B5CF6">
+                  <a:alpha val="7000"/>
+                </a:srgbClr>
+              </a:gs>
+              <a:gs pos="100000">
+                <a:srgbClr val="8B5CF6">
+                  <a:alpha val="0"/>
+                </a:srgbClr>
+              </a:gs>
+            </a:gsLst>
+            <a:path path="circle">
+              <a:fillToRect l="50000" t="50000" r="50000" b="50000"/>
+            </a:path>
+          </a:gradFill>
+          <a:ln>
+            <a:noFill/>
+          </a:ln>
+          <a:effectLst/>
+          <a:effectLst>
+            <a:softEdge rad="1005840"/>
+          </a:effectLst>
+        </p:spPr>
+        <p:style>
+          <a:lnRef idx="1">
+            <a:schemeClr val="accent1"/>
+          </a:lnRef>
+          <a:fillRef idx="3">
+            <a:schemeClr val="accent1"/>
+          </a:fillRef>
+          <a:effectRef idx="2">
+            <a:schemeClr val="accent1"/>
+          </a:effectRef>
+          <a:fontRef idx="minor">
+            <a:schemeClr val="lt1"/>
+          </a:fontRef>
+        </p:style>
+        <p:txBody>
+          <a:bodyPr rtlCol="0" anchor="ctr"/>
+          <a:lstStyle/>
+          <a:p>
+            <a:pPr algn="ctr"/>
+          </a:p>
+        </p:txBody>
+      </p:sp>
+      <p:sp>
+        <p:nvSpPr>
+          <p:cNvPr id="4" name="Rectangle 3"/>
           <p:cNvSpPr/>
           <p:nvPr/>
         </p:nvSpPr>
@@ -9537,7 +10787,7 @@
             <a:avLst/>
           </a:prstGeom>
           <a:solidFill>
-            <a:srgbClr val="FF7A33"/>
+            <a:srgbClr val="8B5CF6"/>
           </a:solidFill>
           <a:ln>
             <a:noFill/>
@@ -9568,7 +10818,7 @@
       </p:sp>
       <p:sp>
         <p:nvSpPr>
-          <p:cNvPr id="3" name="TextBox 2"/>
+          <p:cNvPr id="5" name="TextBox 4"/>
           <p:cNvSpPr txBox="1"/>
           <p:nvPr/>
         </p:nvSpPr>
@@ -9599,7 +10849,7 @@
             <a:r>
               <a:rPr sz="1300" b="1" i="0" spc="220">
                 <a:solidFill>
-                  <a:srgbClr val="35D0C7"/>
+                  <a:srgbClr val="3B9EF6"/>
                 </a:solidFill>
                 <a:latin typeface="Calibri"/>
               </a:rPr>
@@ -9610,7 +10860,7 @@
       </p:sp>
       <p:sp>
         <p:nvSpPr>
-          <p:cNvPr id="4" name="TextBox 3"/>
+          <p:cNvPr id="6" name="TextBox 5"/>
           <p:cNvSpPr txBox="1"/>
           <p:nvPr/>
         </p:nvSpPr>
@@ -9644,7 +10894,7 @@
             <a:r>
               <a:rPr sz="3400" b="1" i="0">
                 <a:solidFill>
-                  <a:srgbClr val="F4F6FB"/>
+                  <a:srgbClr val="F6F5FB"/>
                 </a:solidFill>
                 <a:latin typeface="Calibri"/>
               </a:rPr>
@@ -9655,7 +10905,7 @@
       </p:sp>
       <p:sp>
         <p:nvSpPr>
-          <p:cNvPr id="5" name="TextBox 4"/>
+          <p:cNvPr id="7" name="TextBox 6"/>
           <p:cNvSpPr txBox="1"/>
           <p:nvPr/>
         </p:nvSpPr>
@@ -9686,7 +10936,7 @@
             <a:r>
               <a:rPr sz="1100" b="0" i="0" spc="100">
                 <a:solidFill>
-                  <a:srgbClr val="A9B4C9"/>
+                  <a:srgbClr val="ACA8C4"/>
                 </a:solidFill>
                 <a:latin typeface="Calibri"/>
               </a:rPr>
@@ -9697,7 +10947,7 @@
       </p:sp>
       <p:sp>
         <p:nvSpPr>
-          <p:cNvPr id="6" name="TextBox 5"/>
+          <p:cNvPr id="8" name="TextBox 7"/>
           <p:cNvSpPr txBox="1"/>
           <p:nvPr/>
         </p:nvSpPr>
@@ -9728,7 +10978,7 @@
             <a:r>
               <a:rPr sz="1100" b="0" i="0" spc="100">
                 <a:solidFill>
-                  <a:srgbClr val="A9B4C9"/>
+                  <a:srgbClr val="ACA8C4"/>
                 </a:solidFill>
                 <a:latin typeface="Calibri"/>
               </a:rPr>
@@ -9739,7 +10989,7 @@
       </p:sp>
       <p:sp>
         <p:nvSpPr>
-          <p:cNvPr id="7" name="Rounded Rectangle 6"/>
+          <p:cNvPr id="9" name="Rounded Rectangle 8"/>
           <p:cNvSpPr/>
           <p:nvPr/>
         </p:nvSpPr>
@@ -9754,11 +11004,11 @@
             </a:avLst>
           </a:prstGeom>
           <a:solidFill>
-            <a:srgbClr val="111B2E"/>
+            <a:srgbClr val="131222"/>
           </a:solidFill>
           <a:ln w="12700">
             <a:solidFill>
-              <a:srgbClr val="27334A"/>
+              <a:srgbClr val="2A273E"/>
             </a:solidFill>
           </a:ln>
           <a:effectLst/>
@@ -9787,7 +11037,7 @@
       </p:sp>
       <p:sp>
         <p:nvSpPr>
-          <p:cNvPr id="8" name="TextBox 7"/>
+          <p:cNvPr id="10" name="TextBox 9"/>
           <p:cNvSpPr txBox="1"/>
           <p:nvPr/>
         </p:nvSpPr>
@@ -9818,7 +11068,7 @@
             <a:r>
               <a:rPr sz="1350" b="1" i="0" spc="120">
                 <a:solidFill>
-                  <a:srgbClr val="35D0C7"/>
+                  <a:srgbClr val="3B9EF6"/>
                 </a:solidFill>
                 <a:latin typeface="Calibri"/>
               </a:rPr>
@@ -9829,7 +11079,7 @@
       </p:sp>
       <p:sp>
         <p:nvSpPr>
-          <p:cNvPr id="9" name="TextBox 8"/>
+          <p:cNvPr id="11" name="TextBox 10"/>
           <p:cNvSpPr txBox="1"/>
           <p:nvPr/>
         </p:nvSpPr>
@@ -9863,7 +11113,7 @@
             <a:r>
               <a:rPr sz="1400" b="0" i="0">
                 <a:solidFill>
-                  <a:srgbClr val="A9B4C9"/>
+                  <a:srgbClr val="ACA8C4"/>
                 </a:solidFill>
                 <a:latin typeface="Calibri"/>
               </a:rPr>
@@ -9874,7 +11124,7 @@
       </p:sp>
       <p:sp>
         <p:nvSpPr>
-          <p:cNvPr id="10" name="Rounded Rectangle 9"/>
+          <p:cNvPr id="12" name="Rounded Rectangle 11"/>
           <p:cNvSpPr/>
           <p:nvPr/>
         </p:nvSpPr>
@@ -9889,11 +11139,11 @@
             </a:avLst>
           </a:prstGeom>
           <a:solidFill>
-            <a:srgbClr val="111B2E"/>
+            <a:srgbClr val="131222"/>
           </a:solidFill>
           <a:ln w="12700">
             <a:solidFill>
-              <a:srgbClr val="27334A"/>
+              <a:srgbClr val="2A273E"/>
             </a:solidFill>
           </a:ln>
           <a:effectLst/>
@@ -9922,7 +11172,7 @@
       </p:sp>
       <p:sp>
         <p:nvSpPr>
-          <p:cNvPr id="11" name="TextBox 10"/>
+          <p:cNvPr id="13" name="TextBox 12"/>
           <p:cNvSpPr txBox="1"/>
           <p:nvPr/>
         </p:nvSpPr>
@@ -9953,7 +11203,7 @@
             <a:r>
               <a:rPr sz="1350" b="1" i="0" spc="120">
                 <a:solidFill>
-                  <a:srgbClr val="FF7A33"/>
+                  <a:srgbClr val="8B5CF6"/>
                 </a:solidFill>
                 <a:latin typeface="Calibri"/>
               </a:rPr>
@@ -9964,7 +11214,7 @@
       </p:sp>
       <p:sp>
         <p:nvSpPr>
-          <p:cNvPr id="12" name="TextBox 11"/>
+          <p:cNvPr id="14" name="TextBox 13"/>
           <p:cNvSpPr txBox="1"/>
           <p:nvPr/>
         </p:nvSpPr>
@@ -9998,7 +11248,7 @@
             <a:r>
               <a:rPr sz="1400" b="0" i="0">
                 <a:solidFill>
-                  <a:srgbClr val="A9B4C9"/>
+                  <a:srgbClr val="ACA8C4"/>
                 </a:solidFill>
                 <a:latin typeface="Calibri"/>
               </a:rPr>
@@ -10009,7 +11259,7 @@
       </p:sp>
       <p:sp>
         <p:nvSpPr>
-          <p:cNvPr id="13" name="Rounded Rectangle 12"/>
+          <p:cNvPr id="15" name="Rounded Rectangle 14"/>
           <p:cNvSpPr/>
           <p:nvPr/>
         </p:nvSpPr>
@@ -10028,7 +11278,7 @@
           </a:solidFill>
           <a:ln w="12700">
             <a:solidFill>
-              <a:srgbClr val="35D0C7"/>
+              <a:srgbClr val="3B9EF6"/>
             </a:solidFill>
           </a:ln>
           <a:effectLst/>
@@ -10057,7 +11307,7 @@
       </p:sp>
       <p:sp>
         <p:nvSpPr>
-          <p:cNvPr id="14" name="TextBox 13"/>
+          <p:cNvPr id="16" name="TextBox 15"/>
           <p:cNvSpPr txBox="1"/>
           <p:nvPr/>
         </p:nvSpPr>
@@ -10088,7 +11338,7 @@
             <a:r>
               <a:rPr sz="1250" b="1" i="0" spc="120">
                 <a:solidFill>
-                  <a:srgbClr val="35D0C7"/>
+                  <a:srgbClr val="3B9EF6"/>
                 </a:solidFill>
                 <a:latin typeface="Calibri"/>
               </a:rPr>
@@ -10099,7 +11349,7 @@
       </p:sp>
       <p:sp>
         <p:nvSpPr>
-          <p:cNvPr id="15" name="TextBox 14"/>
+          <p:cNvPr id="17" name="TextBox 16"/>
           <p:cNvSpPr txBox="1"/>
           <p:nvPr/>
         </p:nvSpPr>
@@ -10133,7 +11383,7 @@
             <a:r>
               <a:rPr sz="1300" b="0" i="0">
                 <a:solidFill>
-                  <a:srgbClr val="F4F6FB"/>
+                  <a:srgbClr val="F6F5FB"/>
                 </a:solidFill>
                 <a:latin typeface="Calibri"/>
               </a:rPr>
@@ -10144,7 +11394,7 @@
       </p:sp>
       <p:sp>
         <p:nvSpPr>
-          <p:cNvPr id="16" name="Rounded Rectangle 15"/>
+          <p:cNvPr id="18" name="Rounded Rectangle 17"/>
           <p:cNvSpPr/>
           <p:nvPr/>
         </p:nvSpPr>
@@ -10163,7 +11413,7 @@
           </a:solidFill>
           <a:ln w="12700">
             <a:solidFill>
-              <a:srgbClr val="FF7A33"/>
+              <a:srgbClr val="8B5CF6"/>
             </a:solidFill>
           </a:ln>
           <a:effectLst/>
@@ -10192,7 +11442,7 @@
       </p:sp>
       <p:sp>
         <p:nvSpPr>
-          <p:cNvPr id="17" name="TextBox 16"/>
+          <p:cNvPr id="19" name="TextBox 18"/>
           <p:cNvSpPr txBox="1"/>
           <p:nvPr/>
         </p:nvSpPr>
@@ -10223,7 +11473,7 @@
             <a:r>
               <a:rPr sz="1250" b="1" i="0" spc="120">
                 <a:solidFill>
-                  <a:srgbClr val="FF7A33"/>
+                  <a:srgbClr val="8B5CF6"/>
                 </a:solidFill>
                 <a:latin typeface="Calibri"/>
               </a:rPr>
@@ -10234,7 +11484,7 @@
       </p:sp>
       <p:sp>
         <p:nvSpPr>
-          <p:cNvPr id="18" name="TextBox 17"/>
+          <p:cNvPr id="20" name="TextBox 19"/>
           <p:cNvSpPr txBox="1"/>
           <p:nvPr/>
         </p:nvSpPr>
@@ -10268,7 +11518,7 @@
             <a:r>
               <a:rPr sz="1300" b="0" i="0">
                 <a:solidFill>
-                  <a:srgbClr val="F4F6FB"/>
+                  <a:srgbClr val="F6F5FB"/>
                 </a:solidFill>
                 <a:latin typeface="Calibri"/>
               </a:rPr>
@@ -10291,7 +11541,7 @@
     <p:bg>
       <p:bgPr>
         <a:solidFill>
-          <a:srgbClr val="0B1220"/>
+          <a:srgbClr val="080812"/>
         </a:solidFill>
         <a:effectLst/>
       </p:bgPr>
@@ -10305,7 +11555,139 @@
       <p:grpSpPr/>
       <p:sp>
         <p:nvSpPr>
-          <p:cNvPr id="2" name="Rectangle 1"/>
+          <p:cNvPr id="2" name="Oval 1"/>
+          <p:cNvSpPr/>
+          <p:nvPr/>
+        </p:nvSpPr>
+        <p:spPr>
+          <a:xfrm>
+            <a:off x="9539935" y="-2651760"/>
+            <a:ext cx="4206240" cy="4206240"/>
+          </a:xfrm>
+          <a:prstGeom prst="ellipse">
+            <a:avLst/>
+          </a:prstGeom>
+          <a:gradFill flip="none" rotWithShape="1">
+            <a:gsLst>
+              <a:gs pos="0">
+                <a:srgbClr val="3B9EF6">
+                  <a:alpha val="22000"/>
+                </a:srgbClr>
+              </a:gs>
+              <a:gs pos="55000">
+                <a:srgbClr val="3B9EF6">
+                  <a:alpha val="9000"/>
+                </a:srgbClr>
+              </a:gs>
+              <a:gs pos="100000">
+                <a:srgbClr val="3B9EF6">
+                  <a:alpha val="0"/>
+                </a:srgbClr>
+              </a:gs>
+            </a:gsLst>
+            <a:path path="circle">
+              <a:fillToRect l="50000" t="50000" r="50000" b="50000"/>
+            </a:path>
+          </a:gradFill>
+          <a:ln>
+            <a:noFill/>
+          </a:ln>
+          <a:effectLst/>
+          <a:effectLst>
+            <a:softEdge rad="1005840"/>
+          </a:effectLst>
+        </p:spPr>
+        <p:style>
+          <a:lnRef idx="1">
+            <a:schemeClr val="accent1"/>
+          </a:lnRef>
+          <a:fillRef idx="3">
+            <a:schemeClr val="accent1"/>
+          </a:fillRef>
+          <a:effectRef idx="2">
+            <a:schemeClr val="accent1"/>
+          </a:effectRef>
+          <a:fontRef idx="minor">
+            <a:schemeClr val="lt1"/>
+          </a:fontRef>
+        </p:style>
+        <p:txBody>
+          <a:bodyPr rtlCol="0" anchor="ctr"/>
+          <a:lstStyle/>
+          <a:p>
+            <a:pPr algn="ctr"/>
+          </a:p>
+        </p:txBody>
+      </p:sp>
+      <p:sp>
+        <p:nvSpPr>
+          <p:cNvPr id="3" name="Oval 2"/>
+          <p:cNvSpPr/>
+          <p:nvPr/>
+        </p:nvSpPr>
+        <p:spPr>
+          <a:xfrm>
+            <a:off x="10637215" y="5486400"/>
+            <a:ext cx="3840480" cy="3840480"/>
+          </a:xfrm>
+          <a:prstGeom prst="ellipse">
+            <a:avLst/>
+          </a:prstGeom>
+          <a:gradFill flip="none" rotWithShape="1">
+            <a:gsLst>
+              <a:gs pos="0">
+                <a:srgbClr val="8B5CF6">
+                  <a:alpha val="18000"/>
+                </a:srgbClr>
+              </a:gs>
+              <a:gs pos="55000">
+                <a:srgbClr val="8B5CF6">
+                  <a:alpha val="7000"/>
+                </a:srgbClr>
+              </a:gs>
+              <a:gs pos="100000">
+                <a:srgbClr val="8B5CF6">
+                  <a:alpha val="0"/>
+                </a:srgbClr>
+              </a:gs>
+            </a:gsLst>
+            <a:path path="circle">
+              <a:fillToRect l="50000" t="50000" r="50000" b="50000"/>
+            </a:path>
+          </a:gradFill>
+          <a:ln>
+            <a:noFill/>
+          </a:ln>
+          <a:effectLst/>
+          <a:effectLst>
+            <a:softEdge rad="1005840"/>
+          </a:effectLst>
+        </p:spPr>
+        <p:style>
+          <a:lnRef idx="1">
+            <a:schemeClr val="accent1"/>
+          </a:lnRef>
+          <a:fillRef idx="3">
+            <a:schemeClr val="accent1"/>
+          </a:fillRef>
+          <a:effectRef idx="2">
+            <a:schemeClr val="accent1"/>
+          </a:effectRef>
+          <a:fontRef idx="minor">
+            <a:schemeClr val="lt1"/>
+          </a:fontRef>
+        </p:style>
+        <p:txBody>
+          <a:bodyPr rtlCol="0" anchor="ctr"/>
+          <a:lstStyle/>
+          <a:p>
+            <a:pPr algn="ctr"/>
+          </a:p>
+        </p:txBody>
+      </p:sp>
+      <p:sp>
+        <p:nvSpPr>
+          <p:cNvPr id="4" name="Rectangle 3"/>
           <p:cNvSpPr/>
           <p:nvPr/>
         </p:nvSpPr>
@@ -10318,7 +11700,7 @@
             <a:avLst/>
           </a:prstGeom>
           <a:solidFill>
-            <a:srgbClr val="FF7A33"/>
+            <a:srgbClr val="8B5CF6"/>
           </a:solidFill>
           <a:ln>
             <a:noFill/>
@@ -10349,7 +11731,7 @@
       </p:sp>
       <p:sp>
         <p:nvSpPr>
-          <p:cNvPr id="3" name="TextBox 2"/>
+          <p:cNvPr id="5" name="TextBox 4"/>
           <p:cNvSpPr txBox="1"/>
           <p:nvPr/>
         </p:nvSpPr>
@@ -10380,7 +11762,7 @@
             <a:r>
               <a:rPr sz="1300" b="1" i="0" spc="220">
                 <a:solidFill>
-                  <a:srgbClr val="35D0C7"/>
+                  <a:srgbClr val="3B9EF6"/>
                 </a:solidFill>
                 <a:latin typeface="Calibri"/>
               </a:rPr>
@@ -10391,7 +11773,7 @@
       </p:sp>
       <p:sp>
         <p:nvSpPr>
-          <p:cNvPr id="4" name="TextBox 3"/>
+          <p:cNvPr id="6" name="TextBox 5"/>
           <p:cNvSpPr txBox="1"/>
           <p:nvPr/>
         </p:nvSpPr>
@@ -10425,7 +11807,7 @@
             <a:r>
               <a:rPr sz="3400" b="1" i="0">
                 <a:solidFill>
-                  <a:srgbClr val="F4F6FB"/>
+                  <a:srgbClr val="F6F5FB"/>
                 </a:solidFill>
                 <a:latin typeface="Calibri"/>
               </a:rPr>
@@ -10436,7 +11818,7 @@
       </p:sp>
       <p:sp>
         <p:nvSpPr>
-          <p:cNvPr id="5" name="TextBox 4"/>
+          <p:cNvPr id="7" name="TextBox 6"/>
           <p:cNvSpPr txBox="1"/>
           <p:nvPr/>
         </p:nvSpPr>
@@ -10467,7 +11849,7 @@
             <a:r>
               <a:rPr sz="1100" b="0" i="0" spc="100">
                 <a:solidFill>
-                  <a:srgbClr val="A9B4C9"/>
+                  <a:srgbClr val="ACA8C4"/>
                 </a:solidFill>
                 <a:latin typeface="Calibri"/>
               </a:rPr>
@@ -10478,7 +11860,7 @@
       </p:sp>
       <p:sp>
         <p:nvSpPr>
-          <p:cNvPr id="6" name="TextBox 5"/>
+          <p:cNvPr id="8" name="TextBox 7"/>
           <p:cNvSpPr txBox="1"/>
           <p:nvPr/>
         </p:nvSpPr>
@@ -10509,7 +11891,7 @@
             <a:r>
               <a:rPr sz="1100" b="0" i="0" spc="100">
                 <a:solidFill>
-                  <a:srgbClr val="A9B4C9"/>
+                  <a:srgbClr val="ACA8C4"/>
                 </a:solidFill>
                 <a:latin typeface="Calibri"/>
               </a:rPr>
@@ -10520,7 +11902,7 @@
       </p:sp>
       <p:sp>
         <p:nvSpPr>
-          <p:cNvPr id="7" name="Rectangle 6"/>
+          <p:cNvPr id="9" name="Rectangle 8"/>
           <p:cNvSpPr/>
           <p:nvPr/>
         </p:nvSpPr>
@@ -10533,7 +11915,7 @@
             <a:avLst/>
           </a:prstGeom>
           <a:solidFill>
-            <a:srgbClr val="27334A"/>
+            <a:srgbClr val="2A273E"/>
           </a:solidFill>
           <a:ln>
             <a:noFill/>
@@ -10564,7 +11946,7 @@
       </p:sp>
       <p:sp>
         <p:nvSpPr>
-          <p:cNvPr id="8" name="Oval 7"/>
+          <p:cNvPr id="10" name="Oval 9"/>
           <p:cNvSpPr/>
           <p:nvPr/>
         </p:nvSpPr>
@@ -10577,7 +11959,7 @@
             <a:avLst/>
           </a:prstGeom>
           <a:solidFill>
-            <a:srgbClr val="FF7A33"/>
+            <a:srgbClr val="8B5CF6"/>
           </a:solidFill>
           <a:ln>
             <a:noFill/>
@@ -10608,7 +11990,7 @@
       </p:sp>
       <p:sp>
         <p:nvSpPr>
-          <p:cNvPr id="9" name="TextBox 8"/>
+          <p:cNvPr id="11" name="TextBox 10"/>
           <p:cNvSpPr txBox="1"/>
           <p:nvPr/>
         </p:nvSpPr>
@@ -10639,7 +12021,7 @@
             <a:r>
               <a:rPr sz="1200" b="1" i="0" spc="120">
                 <a:solidFill>
-                  <a:srgbClr val="FF7A33"/>
+                  <a:srgbClr val="8B5CF6"/>
                 </a:solidFill>
                 <a:latin typeface="Calibri"/>
               </a:rPr>
@@ -10661,7 +12043,7 @@
             <a:r>
               <a:rPr sz="1350" b="0" i="0">
                 <a:solidFill>
-                  <a:srgbClr val="F4F6FB"/>
+                  <a:srgbClr val="F6F5FB"/>
                 </a:solidFill>
                 <a:latin typeface="Calibri"/>
               </a:rPr>
@@ -10672,7 +12054,7 @@
       </p:sp>
       <p:sp>
         <p:nvSpPr>
-          <p:cNvPr id="10" name="TextBox 9"/>
+          <p:cNvPr id="12" name="TextBox 11"/>
           <p:cNvSpPr txBox="1"/>
           <p:nvPr/>
         </p:nvSpPr>
@@ -10703,7 +12085,7 @@
             <a:r>
               <a:rPr sz="1200" b="0" i="0">
                 <a:solidFill>
-                  <a:srgbClr val="A9B4C9"/>
+                  <a:srgbClr val="ACA8C4"/>
                 </a:solidFill>
                 <a:latin typeface="Calibri"/>
               </a:rPr>
@@ -10714,7 +12096,7 @@
       </p:sp>
       <p:sp>
         <p:nvSpPr>
-          <p:cNvPr id="11" name="Oval 10"/>
+          <p:cNvPr id="13" name="Oval 12"/>
           <p:cNvSpPr/>
           <p:nvPr/>
         </p:nvSpPr>
@@ -10727,7 +12109,7 @@
             <a:avLst/>
           </a:prstGeom>
           <a:solidFill>
-            <a:srgbClr val="A9B4C9"/>
+            <a:srgbClr val="ACA8C4"/>
           </a:solidFill>
           <a:ln>
             <a:noFill/>
@@ -10758,7 +12140,7 @@
       </p:sp>
       <p:sp>
         <p:nvSpPr>
-          <p:cNvPr id="12" name="TextBox 11"/>
+          <p:cNvPr id="14" name="TextBox 13"/>
           <p:cNvSpPr txBox="1"/>
           <p:nvPr/>
         </p:nvSpPr>
@@ -10789,7 +12171,7 @@
             <a:r>
               <a:rPr sz="1200" b="0" i="0">
                 <a:solidFill>
-                  <a:srgbClr val="A9B4C9"/>
+                  <a:srgbClr val="ACA8C4"/>
                 </a:solidFill>
                 <a:latin typeface="Calibri"/>
               </a:rPr>
@@ -10800,7 +12182,7 @@
       </p:sp>
       <p:sp>
         <p:nvSpPr>
-          <p:cNvPr id="13" name="TextBox 12"/>
+          <p:cNvPr id="15" name="TextBox 14"/>
           <p:cNvSpPr txBox="1"/>
           <p:nvPr/>
         </p:nvSpPr>
@@ -10834,7 +12216,7 @@
             <a:r>
               <a:rPr sz="1300" b="0" i="0">
                 <a:solidFill>
-                  <a:srgbClr val="A9B4C9"/>
+                  <a:srgbClr val="ACA8C4"/>
                 </a:solidFill>
                 <a:latin typeface="Calibri"/>
               </a:rPr>
@@ -10845,7 +12227,7 @@
       </p:sp>
       <p:sp>
         <p:nvSpPr>
-          <p:cNvPr id="14" name="Oval 13"/>
+          <p:cNvPr id="16" name="Oval 15"/>
           <p:cNvSpPr/>
           <p:nvPr/>
         </p:nvSpPr>
@@ -10858,7 +12240,7 @@
             <a:avLst/>
           </a:prstGeom>
           <a:solidFill>
-            <a:srgbClr val="35D0C7"/>
+            <a:srgbClr val="3B9EF6"/>
           </a:solidFill>
           <a:ln>
             <a:noFill/>
@@ -10889,7 +12271,7 @@
       </p:sp>
       <p:sp>
         <p:nvSpPr>
-          <p:cNvPr id="15" name="TextBox 14"/>
+          <p:cNvPr id="17" name="TextBox 16"/>
           <p:cNvSpPr txBox="1"/>
           <p:nvPr/>
         </p:nvSpPr>
@@ -10920,7 +12302,7 @@
             <a:r>
               <a:rPr sz="1200" b="1" i="0" spc="120">
                 <a:solidFill>
-                  <a:srgbClr val="35D0C7"/>
+                  <a:srgbClr val="3B9EF6"/>
                 </a:solidFill>
                 <a:latin typeface="Calibri"/>
               </a:rPr>
@@ -10942,7 +12324,7 @@
             <a:r>
               <a:rPr sz="1350" b="0" i="0">
                 <a:solidFill>
-                  <a:srgbClr val="F4F6FB"/>
+                  <a:srgbClr val="F6F5FB"/>
                 </a:solidFill>
                 <a:latin typeface="Calibri"/>
               </a:rPr>
@@ -10953,7 +12335,7 @@
       </p:sp>
       <p:sp>
         <p:nvSpPr>
-          <p:cNvPr id="16" name="TextBox 15"/>
+          <p:cNvPr id="18" name="TextBox 17"/>
           <p:cNvSpPr txBox="1"/>
           <p:nvPr/>
         </p:nvSpPr>
@@ -10984,7 +12366,7 @@
             <a:r>
               <a:rPr sz="1200" b="0" i="0">
                 <a:solidFill>
-                  <a:srgbClr val="A9B4C9"/>
+                  <a:srgbClr val="ACA8C4"/>
                 </a:solidFill>
                 <a:latin typeface="Calibri"/>
               </a:rPr>
@@ -10995,7 +12377,7 @@
       </p:sp>
       <p:sp>
         <p:nvSpPr>
-          <p:cNvPr id="17" name="Oval 16"/>
+          <p:cNvPr id="19" name="Oval 18"/>
           <p:cNvSpPr/>
           <p:nvPr/>
         </p:nvSpPr>
@@ -11008,7 +12390,7 @@
             <a:avLst/>
           </a:prstGeom>
           <a:solidFill>
-            <a:srgbClr val="A9B4C9"/>
+            <a:srgbClr val="ACA8C4"/>
           </a:solidFill>
           <a:ln>
             <a:noFill/>
@@ -11039,7 +12421,7 @@
       </p:sp>
       <p:sp>
         <p:nvSpPr>
-          <p:cNvPr id="18" name="TextBox 17"/>
+          <p:cNvPr id="20" name="TextBox 19"/>
           <p:cNvSpPr txBox="1"/>
           <p:nvPr/>
         </p:nvSpPr>
@@ -11070,7 +12452,7 @@
             <a:r>
               <a:rPr sz="1200" b="0" i="0">
                 <a:solidFill>
-                  <a:srgbClr val="A9B4C9"/>
+                  <a:srgbClr val="ACA8C4"/>
                 </a:solidFill>
                 <a:latin typeface="Calibri"/>
               </a:rPr>
@@ -11081,7 +12463,7 @@
       </p:sp>
       <p:sp>
         <p:nvSpPr>
-          <p:cNvPr id="19" name="TextBox 18"/>
+          <p:cNvPr id="21" name="TextBox 20"/>
           <p:cNvSpPr txBox="1"/>
           <p:nvPr/>
         </p:nvSpPr>
@@ -11115,7 +12497,7 @@
             <a:r>
               <a:rPr sz="1300" b="0" i="0">
                 <a:solidFill>
-                  <a:srgbClr val="A9B4C9"/>
+                  <a:srgbClr val="ACA8C4"/>
                 </a:solidFill>
                 <a:latin typeface="Calibri"/>
               </a:rPr>
@@ -11126,7 +12508,7 @@
       </p:sp>
       <p:sp>
         <p:nvSpPr>
-          <p:cNvPr id="20" name="Oval 19"/>
+          <p:cNvPr id="22" name="Oval 21"/>
           <p:cNvSpPr/>
           <p:nvPr/>
         </p:nvSpPr>
@@ -11139,7 +12521,7 @@
             <a:avLst/>
           </a:prstGeom>
           <a:solidFill>
-            <a:srgbClr val="A9B4C9"/>
+            <a:srgbClr val="ACA8C4"/>
           </a:solidFill>
           <a:ln>
             <a:noFill/>
@@ -11170,7 +12552,7 @@
       </p:sp>
       <p:sp>
         <p:nvSpPr>
-          <p:cNvPr id="21" name="TextBox 20"/>
+          <p:cNvPr id="23" name="TextBox 22"/>
           <p:cNvSpPr txBox="1"/>
           <p:nvPr/>
         </p:nvSpPr>
@@ -11204,7 +12586,7 @@
             <a:r>
               <a:rPr sz="1300" b="0" i="0">
                 <a:solidFill>
-                  <a:srgbClr val="A9B4C9"/>
+                  <a:srgbClr val="ACA8C4"/>
                 </a:solidFill>
                 <a:latin typeface="Calibri"/>
               </a:rPr>
@@ -11215,7 +12597,7 @@
       </p:sp>
       <p:sp>
         <p:nvSpPr>
-          <p:cNvPr id="22" name="TextBox 21"/>
+          <p:cNvPr id="24" name="TextBox 23"/>
           <p:cNvSpPr txBox="1"/>
           <p:nvPr/>
         </p:nvSpPr>
@@ -11246,7 +12628,7 @@
             <a:r>
               <a:rPr sz="1200" b="0" i="0">
                 <a:solidFill>
-                  <a:srgbClr val="A9B4C9"/>
+                  <a:srgbClr val="ACA8C4"/>
                 </a:solidFill>
                 <a:latin typeface="Calibri"/>
               </a:rPr>
@@ -11257,7 +12639,7 @@
       </p:sp>
       <p:sp>
         <p:nvSpPr>
-          <p:cNvPr id="23" name="Oval 22"/>
+          <p:cNvPr id="25" name="Oval 24"/>
           <p:cNvSpPr/>
           <p:nvPr/>
         </p:nvSpPr>
@@ -11270,7 +12652,7 @@
             <a:avLst/>
           </a:prstGeom>
           <a:solidFill>
-            <a:srgbClr val="FF7A33"/>
+            <a:srgbClr val="8B5CF6"/>
           </a:solidFill>
           <a:ln>
             <a:noFill/>
@@ -11301,7 +12683,7 @@
       </p:sp>
       <p:sp>
         <p:nvSpPr>
-          <p:cNvPr id="24" name="TextBox 23"/>
+          <p:cNvPr id="26" name="TextBox 25"/>
           <p:cNvSpPr txBox="1"/>
           <p:nvPr/>
         </p:nvSpPr>
@@ -11332,7 +12714,7 @@
             <a:r>
               <a:rPr sz="1200" b="0" i="0">
                 <a:solidFill>
-                  <a:srgbClr val="A9B4C9"/>
+                  <a:srgbClr val="ACA8C4"/>
                 </a:solidFill>
                 <a:latin typeface="Calibri"/>
               </a:rPr>
@@ -11343,7 +12725,7 @@
       </p:sp>
       <p:sp>
         <p:nvSpPr>
-          <p:cNvPr id="25" name="TextBox 24"/>
+          <p:cNvPr id="27" name="TextBox 26"/>
           <p:cNvSpPr txBox="1"/>
           <p:nvPr/>
         </p:nvSpPr>
@@ -11374,7 +12756,7 @@
             <a:r>
               <a:rPr sz="1200" b="1" i="0" spc="120">
                 <a:solidFill>
-                  <a:srgbClr val="FF7A33"/>
+                  <a:srgbClr val="8B5CF6"/>
                 </a:solidFill>
                 <a:latin typeface="Calibri"/>
               </a:rPr>
@@ -11396,7 +12778,7 @@
             <a:r>
               <a:rPr sz="1350" b="0" i="0">
                 <a:solidFill>
-                  <a:srgbClr val="F4F6FB"/>
+                  <a:srgbClr val="F6F5FB"/>
                 </a:solidFill>
                 <a:latin typeface="Calibri"/>
               </a:rPr>
@@ -11407,7 +12789,7 @@
       </p:sp>
       <p:sp>
         <p:nvSpPr>
-          <p:cNvPr id="26" name="TextBox 25"/>
+          <p:cNvPr id="28" name="TextBox 27"/>
           <p:cNvSpPr txBox="1"/>
           <p:nvPr/>
         </p:nvSpPr>
@@ -11438,7 +12820,7 @@
             <a:r>
               <a:rPr sz="1300" b="0" i="1">
                 <a:solidFill>
-                  <a:srgbClr val="A9B4C9"/>
+                  <a:srgbClr val="ACA8C4"/>
                 </a:solidFill>
                 <a:latin typeface="Calibri"/>
               </a:rPr>

--- a/presentation/hito1-vrcar.pptx
+++ b/presentation/hito1-vrcar.pptx
@@ -3144,7 +3144,6 @@
           <a:ln>
             <a:noFill/>
           </a:ln>
-          <a:effectLst/>
           <a:effectLst>
             <a:softEdge rad="1005840"/>
           </a:effectLst>
@@ -3210,7 +3209,6 @@
           <a:ln>
             <a:noFill/>
           </a:ln>
-          <a:effectLst/>
           <a:effectLst>
             <a:softEdge rad="1005840"/>
           </a:effectLst>
@@ -3276,7 +3274,6 @@
           <a:ln>
             <a:noFill/>
           </a:ln>
-          <a:effectLst/>
           <a:effectLst>
             <a:softEdge rad="1005840"/>
           </a:effectLst>
@@ -3559,13 +3556,6 @@
                   <a:srgbClr val="F6F5FB"/>
                 </a:solidFill>
                 <a:latin typeface="Calibri"/>
-                <a:effectLst>
-                  <a:glow rad="127000">
-                    <a:srgbClr val="8B5CF6">
-                      <a:alpha val="45000"/>
-                    </a:srgbClr>
-                  </a:glow>
-                </a:effectLst>
               </a:rPr>
               <a:t>VR Car</a:t>
             </a:r>
@@ -4181,7 +4171,6 @@
           <a:ln>
             <a:noFill/>
           </a:ln>
-          <a:effectLst/>
           <a:effectLst>
             <a:softEdge rad="1005840"/>
           </a:effectLst>
@@ -4247,7 +4236,6 @@
           <a:ln>
             <a:noFill/>
           </a:ln>
-          <a:effectLst/>
           <a:effectLst>
             <a:softEdge rad="1005840"/>
           </a:effectLst>
@@ -4313,7 +4301,6 @@
           <a:ln>
             <a:noFill/>
           </a:ln>
-          <a:effectLst/>
           <a:effectLst>
             <a:softEdge rad="1005840"/>
           </a:effectLst>
@@ -4418,13 +4405,6 @@
                   <a:srgbClr val="F6F5FB"/>
                 </a:solidFill>
                 <a:latin typeface="Calibri"/>
-                <a:effectLst>
-                  <a:glow rad="127000">
-                    <a:srgbClr val="F46FB8">
-                      <a:alpha val="45000"/>
-                    </a:srgbClr>
-                  </a:glow>
-                </a:effectLst>
               </a:rPr>
               <a:t>¿Preguntas?</a:t>
             </a:r>
@@ -4639,7 +4619,6 @@
           <a:ln>
             <a:noFill/>
           </a:ln>
-          <a:effectLst/>
           <a:effectLst>
             <a:softEdge rad="1005840"/>
           </a:effectLst>
@@ -4705,7 +4684,6 @@
           <a:ln>
             <a:noFill/>
           </a:ln>
-          <a:effectLst/>
           <a:effectLst>
             <a:softEdge rad="1005840"/>
           </a:effectLst>
@@ -5559,7 +5537,6 @@
           <a:ln>
             <a:noFill/>
           </a:ln>
-          <a:effectLst/>
           <a:effectLst>
             <a:softEdge rad="1005840"/>
           </a:effectLst>
@@ -5625,7 +5602,6 @@
           <a:ln>
             <a:noFill/>
           </a:ln>
-          <a:effectLst/>
           <a:effectLst>
             <a:softEdge rad="1005840"/>
           </a:effectLst>
@@ -6374,7 +6350,6 @@
           <a:ln>
             <a:noFill/>
           </a:ln>
-          <a:effectLst/>
           <a:effectLst>
             <a:softEdge rad="1005840"/>
           </a:effectLst>
@@ -6440,7 +6415,6 @@
           <a:ln>
             <a:noFill/>
           </a:ln>
-          <a:effectLst/>
           <a:effectLst>
             <a:softEdge rad="1005840"/>
           </a:effectLst>
@@ -7210,7 +7184,6 @@
           <a:ln>
             <a:noFill/>
           </a:ln>
-          <a:effectLst/>
           <a:effectLst>
             <a:softEdge rad="1005840"/>
           </a:effectLst>
@@ -7276,7 +7249,6 @@
           <a:ln>
             <a:noFill/>
           </a:ln>
-          <a:effectLst/>
           <a:effectLst>
             <a:softEdge rad="1005840"/>
           </a:effectLst>
@@ -8424,7 +8396,6 @@
           <a:ln>
             <a:noFill/>
           </a:ln>
-          <a:effectLst/>
           <a:effectLst>
             <a:softEdge rad="1005840"/>
           </a:effectLst>
@@ -8490,7 +8461,6 @@
           <a:ln>
             <a:noFill/>
           </a:ln>
-          <a:effectLst/>
           <a:effectLst>
             <a:softEdge rad="1005840"/>
           </a:effectLst>
@@ -9628,7 +9598,6 @@
           <a:ln>
             <a:noFill/>
           </a:ln>
-          <a:effectLst/>
           <a:effectLst>
             <a:softEdge rad="1005840"/>
           </a:effectLst>
@@ -9694,7 +9663,6 @@
           <a:ln>
             <a:noFill/>
           </a:ln>
-          <a:effectLst/>
           <a:effectLst>
             <a:softEdge rad="1005840"/>
           </a:effectLst>
@@ -10679,7 +10647,6 @@
           <a:ln>
             <a:noFill/>
           </a:ln>
-          <a:effectLst/>
           <a:effectLst>
             <a:softEdge rad="1005840"/>
           </a:effectLst>
@@ -10745,7 +10712,6 @@
           <a:ln>
             <a:noFill/>
           </a:ln>
-          <a:effectLst/>
           <a:effectLst>
             <a:softEdge rad="1005840"/>
           </a:effectLst>
@@ -11592,7 +11558,6 @@
           <a:ln>
             <a:noFill/>
           </a:ln>
-          <a:effectLst/>
           <a:effectLst>
             <a:softEdge rad="1005840"/>
           </a:effectLst>
@@ -11658,7 +11623,6 @@
           <a:ln>
             <a:noFill/>
           </a:ln>
-          <a:effectLst/>
           <a:effectLst>
             <a:softEdge rad="1005840"/>
           </a:effectLst>
